--- a/images/サーチファンドスキーム図.pptx
+++ b/images/サーチファンドスキーム図.pptx
@@ -5,13 +5,14 @@
     <p:sldMasterId id="2147485185" r:id="rId4"/>
   </p:sldMasterIdLst>
   <p:notesMasterIdLst>
-    <p:notesMasterId r:id="rId6"/>
+    <p:notesMasterId r:id="rId7"/>
   </p:notesMasterIdLst>
   <p:handoutMasterIdLst>
-    <p:handoutMasterId r:id="rId7"/>
+    <p:handoutMasterId r:id="rId8"/>
   </p:handoutMasterIdLst>
   <p:sldIdLst>
     <p:sldId id="367" r:id="rId5"/>
+    <p:sldId id="368" r:id="rId6"/>
   </p:sldIdLst>
   <p:sldSz cx="12192000" cy="6858000"/>
   <p:notesSz cx="6858000" cy="9875838"/>
@@ -21,7 +22,7 @@
     </p:custShow>
   </p:custShowLst>
   <p:custDataLst>
-    <p:tags r:id="rId8"/>
+    <p:tags r:id="rId9"/>
   </p:custDataLst>
   <p:defaultTextStyle>
     <a:defPPr>
@@ -124,6 +125,7 @@
         <p14:section name="cover" id="{6FF47C9A-03A8-4E0A-B2CE-82D15B86BE4C}">
           <p14:sldIdLst>
             <p14:sldId id="367"/>
+            <p14:sldId id="368"/>
           </p14:sldIdLst>
         </p14:section>
       </p14:sectionLst>
@@ -152,7 +154,7 @@
 <file path=ppt/revisionInfo.xml><?xml version="1.0" encoding="utf-8"?>
 <p1510:revInfo xmlns:a="http://schemas.openxmlformats.org/drawingml/2006/main" xmlns:r="http://schemas.openxmlformats.org/officeDocument/2006/relationships" xmlns:p1510="http://schemas.microsoft.com/office/powerpoint/2015/10/main">
   <p1510:revLst>
-    <p1510:client id="{DF1694DE-827C-482F-A0E1-435170DEF0E4}" v="80" dt="2026-08-07T07:18:12.005"/>
+    <p1510:client id="{DF1694DE-827C-482F-A0E1-435170DEF0E4}" v="84" dt="2026-08-08T00:45:38.072"/>
   </p1510:revLst>
 </p1510:revInfo>
 </file>
@@ -162,7 +164,7 @@
   <pc:docChgLst>
     <pc:chgData name="Kazuaki Yoshikawa" userId="2a70605763630a66" providerId="LiveId" clId="{A284EDFC-03CE-46B6-B12D-149692514020}"/>
     <pc:docChg chg="undo redo custSel addSld delSld modSld sldOrd modMainMaster addSection delSection modSection modNotesMaster modHandout">
-      <pc:chgData name="Kazuaki Yoshikawa" userId="2a70605763630a66" providerId="LiveId" clId="{A284EDFC-03CE-46B6-B12D-149692514020}" dt="2026-08-07T10:40:50.680" v="15563" actId="14100"/>
+      <pc:chgData name="Kazuaki Yoshikawa" userId="2a70605763630a66" providerId="LiveId" clId="{A284EDFC-03CE-46B6-B12D-149692514020}" dt="2026-08-08T00:46:59.633" v="15804" actId="20577"/>
       <pc:docMkLst>
         <pc:docMk/>
       </pc:docMkLst>
@@ -384,7 +386,7 @@
         </pc:sldMkLst>
       </pc:sldChg>
       <pc:sldChg chg="addSp delSp modSp mod modNotes">
-        <pc:chgData name="Kazuaki Yoshikawa" userId="2a70605763630a66" providerId="LiveId" clId="{A284EDFC-03CE-46B6-B12D-149692514020}" dt="2026-08-07T10:40:50.680" v="15563" actId="14100"/>
+        <pc:chgData name="Kazuaki Yoshikawa" userId="2a70605763630a66" providerId="LiveId" clId="{A284EDFC-03CE-46B6-B12D-149692514020}" dt="2026-08-08T00:40:53.510" v="15565" actId="478"/>
         <pc:sldMkLst>
           <pc:docMk/>
           <pc:sldMk cId="151999308" sldId="367"/>
@@ -861,6 +863,14 @@
             <ac:graphicFrameMk id="5" creationId="{1D8E98DD-D6AD-5A37-8924-7057C8380D1F}"/>
           </ac:graphicFrameMkLst>
         </pc:graphicFrameChg>
+        <pc:picChg chg="add del">
+          <ac:chgData name="Kazuaki Yoshikawa" userId="2a70605763630a66" providerId="LiveId" clId="{A284EDFC-03CE-46B6-B12D-149692514020}" dt="2026-08-08T00:40:53.510" v="15565" actId="478"/>
+          <ac:picMkLst>
+            <pc:docMk/>
+            <pc:sldMk cId="151999308" sldId="367"/>
+            <ac:picMk id="8" creationId="{DA856AE2-CF51-945D-1388-BE3E83A9F1E1}"/>
+          </ac:picMkLst>
+        </pc:picChg>
         <pc:picChg chg="del mod topLvl">
           <ac:chgData name="Kazuaki Yoshikawa" userId="2a70605763630a66" providerId="LiveId" clId="{A284EDFC-03CE-46B6-B12D-149692514020}" dt="2026-08-07T06:35:46.166" v="14736" actId="478"/>
           <ac:picMkLst>
@@ -996,6 +1006,141 @@
           <pc:docMk/>
           <pc:sldMk cId="1398219461" sldId="368"/>
         </pc:sldMkLst>
+      </pc:sldChg>
+      <pc:sldChg chg="addSp delSp modSp add mod">
+        <pc:chgData name="Kazuaki Yoshikawa" userId="2a70605763630a66" providerId="LiveId" clId="{A284EDFC-03CE-46B6-B12D-149692514020}" dt="2026-08-08T00:46:59.633" v="15804" actId="20577"/>
+        <pc:sldMkLst>
+          <pc:docMk/>
+          <pc:sldMk cId="2543384049" sldId="368"/>
+        </pc:sldMkLst>
+        <pc:spChg chg="mod">
+          <ac:chgData name="Kazuaki Yoshikawa" userId="2a70605763630a66" providerId="LiveId" clId="{A284EDFC-03CE-46B6-B12D-149692514020}" dt="2026-08-08T00:46:48.097" v="15803" actId="14100"/>
+          <ac:spMkLst>
+            <pc:docMk/>
+            <pc:sldMk cId="2543384049" sldId="368"/>
+            <ac:spMk id="3" creationId="{04FC4312-98CD-920A-591D-0E46EAEFF669}"/>
+          </ac:spMkLst>
+        </pc:spChg>
+        <pc:spChg chg="add del mod">
+          <ac:chgData name="Kazuaki Yoshikawa" userId="2a70605763630a66" providerId="LiveId" clId="{A284EDFC-03CE-46B6-B12D-149692514020}" dt="2026-08-08T00:45:36.383" v="15741"/>
+          <ac:spMkLst>
+            <pc:docMk/>
+            <pc:sldMk cId="2543384049" sldId="368"/>
+            <ac:spMk id="4" creationId="{5B6946A8-96D9-E0EC-E79D-360470B68FDC}"/>
+          </ac:spMkLst>
+        </pc:spChg>
+        <pc:spChg chg="mod">
+          <ac:chgData name="Kazuaki Yoshikawa" userId="2a70605763630a66" providerId="LiveId" clId="{A284EDFC-03CE-46B6-B12D-149692514020}" dt="2026-08-08T00:43:57.374" v="15646" actId="3064"/>
+          <ac:spMkLst>
+            <pc:docMk/>
+            <pc:sldMk cId="2543384049" sldId="368"/>
+            <ac:spMk id="6" creationId="{A3D915FA-487E-C9C4-2E06-4630EE6FBC91}"/>
+          </ac:spMkLst>
+        </pc:spChg>
+        <pc:spChg chg="mod">
+          <ac:chgData name="Kazuaki Yoshikawa" userId="2a70605763630a66" providerId="LiveId" clId="{A284EDFC-03CE-46B6-B12D-149692514020}" dt="2026-08-08T00:46:59.633" v="15804" actId="20577"/>
+          <ac:spMkLst>
+            <pc:docMk/>
+            <pc:sldMk cId="2543384049" sldId="368"/>
+            <ac:spMk id="9" creationId="{C06C89FC-379A-7310-C264-F919ABB324C1}"/>
+          </ac:spMkLst>
+        </pc:spChg>
+        <pc:spChg chg="mod">
+          <ac:chgData name="Kazuaki Yoshikawa" userId="2a70605763630a66" providerId="LiveId" clId="{A284EDFC-03CE-46B6-B12D-149692514020}" dt="2026-08-08T00:44:47.447" v="15695" actId="165"/>
+          <ac:spMkLst>
+            <pc:docMk/>
+            <pc:sldMk cId="2543384049" sldId="368"/>
+            <ac:spMk id="38" creationId="{39F2BD2B-BC2F-4B43-66A8-8B264EF1CF9F}"/>
+          </ac:spMkLst>
+        </pc:spChg>
+        <pc:spChg chg="mod">
+          <ac:chgData name="Kazuaki Yoshikawa" userId="2a70605763630a66" providerId="LiveId" clId="{A284EDFC-03CE-46B6-B12D-149692514020}" dt="2026-08-08T00:44:47.447" v="15695" actId="165"/>
+          <ac:spMkLst>
+            <pc:docMk/>
+            <pc:sldMk cId="2543384049" sldId="368"/>
+            <ac:spMk id="39" creationId="{5A6168D8-601B-0FE0-DE95-5BE12DFAF2FA}"/>
+          </ac:spMkLst>
+        </pc:spChg>
+        <pc:spChg chg="mod">
+          <ac:chgData name="Kazuaki Yoshikawa" userId="2a70605763630a66" providerId="LiveId" clId="{A284EDFC-03CE-46B6-B12D-149692514020}" dt="2026-08-08T00:45:55.339" v="15763" actId="20577"/>
+          <ac:spMkLst>
+            <pc:docMk/>
+            <pc:sldMk cId="2543384049" sldId="368"/>
+            <ac:spMk id="40" creationId="{A0885063-2E48-5198-C5C8-B83434BE2B57}"/>
+          </ac:spMkLst>
+        </pc:spChg>
+        <pc:spChg chg="mod">
+          <ac:chgData name="Kazuaki Yoshikawa" userId="2a70605763630a66" providerId="LiveId" clId="{A284EDFC-03CE-46B6-B12D-149692514020}" dt="2026-08-08T00:46:07.166" v="15785" actId="20577"/>
+          <ac:spMkLst>
+            <pc:docMk/>
+            <pc:sldMk cId="2543384049" sldId="368"/>
+            <ac:spMk id="41" creationId="{1BCC2625-9555-E67C-9DEE-05BEBB8AA0FE}"/>
+          </ac:spMkLst>
+        </pc:spChg>
+        <pc:spChg chg="mod">
+          <ac:chgData name="Kazuaki Yoshikawa" userId="2a70605763630a66" providerId="LiveId" clId="{A284EDFC-03CE-46B6-B12D-149692514020}" dt="2026-08-08T00:43:57.374" v="15646" actId="3064"/>
+          <ac:spMkLst>
+            <pc:docMk/>
+            <pc:sldMk cId="2543384049" sldId="368"/>
+            <ac:spMk id="43" creationId="{424CBBE8-DBDB-1768-FE9A-79ABD20A9A59}"/>
+          </ac:spMkLst>
+        </pc:spChg>
+        <pc:spChg chg="mod topLvl">
+          <ac:chgData name="Kazuaki Yoshikawa" userId="2a70605763630a66" providerId="LiveId" clId="{A284EDFC-03CE-46B6-B12D-149692514020}" dt="2026-08-08T00:44:49.932" v="15700" actId="1036"/>
+          <ac:spMkLst>
+            <pc:docMk/>
+            <pc:sldMk cId="2543384049" sldId="368"/>
+            <ac:spMk id="44" creationId="{FC3293BB-5D99-A842-2CF3-49E6F98B4F2A}"/>
+          </ac:spMkLst>
+        </pc:spChg>
+        <pc:spChg chg="mod">
+          <ac:chgData name="Kazuaki Yoshikawa" userId="2a70605763630a66" providerId="LiveId" clId="{A284EDFC-03CE-46B6-B12D-149692514020}" dt="2026-08-08T00:44:47.447" v="15695" actId="165"/>
+          <ac:spMkLst>
+            <pc:docMk/>
+            <pc:sldMk cId="2543384049" sldId="368"/>
+            <ac:spMk id="45" creationId="{70D8C301-AF08-4E05-8623-2EC047047F93}"/>
+          </ac:spMkLst>
+        </pc:spChg>
+        <pc:spChg chg="mod">
+          <ac:chgData name="Kazuaki Yoshikawa" userId="2a70605763630a66" providerId="LiveId" clId="{A284EDFC-03CE-46B6-B12D-149692514020}" dt="2026-08-08T00:44:47.447" v="15695" actId="165"/>
+          <ac:spMkLst>
+            <pc:docMk/>
+            <pc:sldMk cId="2543384049" sldId="368"/>
+            <ac:spMk id="46" creationId="{FDC2241B-9C45-1CFA-CAD7-6CFBC0909844}"/>
+          </ac:spMkLst>
+        </pc:spChg>
+        <pc:spChg chg="mod">
+          <ac:chgData name="Kazuaki Yoshikawa" userId="2a70605763630a66" providerId="LiveId" clId="{A284EDFC-03CE-46B6-B12D-149692514020}" dt="2026-08-08T00:45:26.517" v="15739" actId="20577"/>
+          <ac:spMkLst>
+            <pc:docMk/>
+            <pc:sldMk cId="2543384049" sldId="368"/>
+            <ac:spMk id="47" creationId="{C7BDF827-2FDE-87F0-F2F6-BAF290D4915B}"/>
+          </ac:spMkLst>
+        </pc:spChg>
+        <pc:spChg chg="mod">
+          <ac:chgData name="Kazuaki Yoshikawa" userId="2a70605763630a66" providerId="LiveId" clId="{A284EDFC-03CE-46B6-B12D-149692514020}" dt="2026-08-08T00:45:45.678" v="15744" actId="20577"/>
+          <ac:spMkLst>
+            <pc:docMk/>
+            <pc:sldMk cId="2543384049" sldId="368"/>
+            <ac:spMk id="48" creationId="{E6BFA825-2430-41B1-40B7-BA78BE828138}"/>
+          </ac:spMkLst>
+        </pc:spChg>
+        <pc:spChg chg="mod topLvl">
+          <ac:chgData name="Kazuaki Yoshikawa" userId="2a70605763630a66" providerId="LiveId" clId="{A284EDFC-03CE-46B6-B12D-149692514020}" dt="2026-08-08T00:44:47.447" v="15695" actId="165"/>
+          <ac:spMkLst>
+            <pc:docMk/>
+            <pc:sldMk cId="2543384049" sldId="368"/>
+            <ac:spMk id="49" creationId="{326AACCA-C8D3-AF49-1850-942CE027F6AE}"/>
+          </ac:spMkLst>
+        </pc:spChg>
+        <pc:cxnChg chg="mod">
+          <ac:chgData name="Kazuaki Yoshikawa" userId="2a70605763630a66" providerId="LiveId" clId="{A284EDFC-03CE-46B6-B12D-149692514020}" dt="2026-08-08T00:46:48.097" v="15803" actId="14100"/>
+          <ac:cxnSpMkLst>
+            <pc:docMk/>
+            <pc:sldMk cId="2543384049" sldId="368"/>
+            <ac:cxnSpMk id="7" creationId="{BEBF1478-1F41-7B75-33BB-FD20402A3716}"/>
+          </ac:cxnSpMkLst>
+        </pc:cxnChg>
       </pc:sldChg>
       <pc:sldChg chg="del modNotes">
         <pc:chgData name="Kazuaki Yoshikawa" userId="2a70605763630a66" providerId="LiveId" clId="{A284EDFC-03CE-46B6-B12D-149692514020}" dt="2026-08-07T06:30:42.146" v="14471" actId="47"/>
@@ -1225,7 +1370,7 @@
           <a:p>
             <a:fld id="{57691E93-EF64-46CC-85E2-BBB5BEDB9501}" type="datetimeFigureOut">
               <a:rPr lang="en-US" sz="800"/>
-              <a:t>8/7/2026</a:t>
+              <a:t>8/8/2026</a:t>
             </a:fld>
             <a:endParaRPr lang="en-US" sz="800"/>
           </a:p>
@@ -1601,7 +1746,7 @@
           <a:p>
             <a:fld id="{F2C7CF5F-7CF3-4DF3-838A-EE34544862CC}" type="datetimeFigureOut">
               <a:rPr lang="en-US" smtClean="0"/>
-              <a:t>8/7/2026</a:t>
+              <a:t>8/8/2026</a:t>
             </a:fld>
             <a:endParaRPr lang="en-US"/>
           </a:p>
@@ -1866,6 +2011,124 @@
     <p:extLst>
       <p:ext uri="{BB962C8B-B14F-4D97-AF65-F5344CB8AC3E}">
         <p14:creationId xmlns:p14="http://schemas.microsoft.com/office/powerpoint/2010/main" val="1983838810"/>
+      </p:ext>
+    </p:extLst>
+  </p:cSld>
+  <p:clrMapOvr>
+    <a:masterClrMapping/>
+  </p:clrMapOvr>
+</p:notes>
+</file>
+
+<file path=ppt/notesSlides/notesSlide2.xml><?xml version="1.0" encoding="utf-8"?>
+<p:notes xmlns:a="http://schemas.openxmlformats.org/drawingml/2006/main" xmlns:r="http://schemas.openxmlformats.org/officeDocument/2006/relationships" xmlns:p="http://schemas.openxmlformats.org/presentationml/2006/main">
+  <p:cSld>
+    <p:spTree>
+      <p:nvGrpSpPr>
+        <p:cNvPr id="1" name="">
+          <a:extLst>
+            <a:ext uri="{FF2B5EF4-FFF2-40B4-BE49-F238E27FC236}">
+              <a16:creationId xmlns:a16="http://schemas.microsoft.com/office/drawing/2014/main" id="{1878033F-9E57-29A5-3BD6-0C4BBEBF2C97}"/>
+            </a:ext>
+          </a:extLst>
+        </p:cNvPr>
+        <p:cNvGrpSpPr/>
+        <p:nvPr/>
+      </p:nvGrpSpPr>
+      <p:grpSpPr>
+        <a:xfrm>
+          <a:off x="0" y="0"/>
+          <a:ext cx="0" cy="0"/>
+          <a:chOff x="0" y="0"/>
+          <a:chExt cx="0" cy="0"/>
+        </a:xfrm>
+      </p:grpSpPr>
+      <p:sp>
+        <p:nvSpPr>
+          <p:cNvPr id="2" name="Slide Image Placeholder 1">
+            <a:extLst>
+              <a:ext uri="{FF2B5EF4-FFF2-40B4-BE49-F238E27FC236}">
+                <a16:creationId xmlns:a16="http://schemas.microsoft.com/office/drawing/2014/main" id="{BB283607-83DC-3C9F-3309-F1A29A9ED939}"/>
+              </a:ext>
+            </a:extLst>
+          </p:cNvPr>
+          <p:cNvSpPr>
+            <a:spLocks noGrp="1" noRot="1" noChangeAspect="1"/>
+          </p:cNvSpPr>
+          <p:nvPr>
+            <p:ph type="sldImg"/>
+          </p:nvPr>
+        </p:nvSpPr>
+        <p:spPr>
+          <a:xfrm>
+            <a:off x="-120650" y="614363"/>
+            <a:ext cx="7081838" cy="3983037"/>
+          </a:xfrm>
+        </p:spPr>
+      </p:sp>
+      <p:sp>
+        <p:nvSpPr>
+          <p:cNvPr id="3" name="Notes Placeholder 2">
+            <a:extLst>
+              <a:ext uri="{FF2B5EF4-FFF2-40B4-BE49-F238E27FC236}">
+                <a16:creationId xmlns:a16="http://schemas.microsoft.com/office/drawing/2014/main" id="{F46AFF7C-D641-79B1-DD31-0DA8378E903D}"/>
+              </a:ext>
+            </a:extLst>
+          </p:cNvPr>
+          <p:cNvSpPr>
+            <a:spLocks noGrp="1"/>
+          </p:cNvSpPr>
+          <p:nvPr>
+            <p:ph type="body" idx="1"/>
+          </p:nvPr>
+        </p:nvSpPr>
+        <p:spPr/>
+        <p:txBody>
+          <a:bodyPr/>
+          <a:lstStyle/>
+          <a:p>
+            <a:endParaRPr kumimoji="1" lang="ja-JP" altLang="en-US" dirty="0"/>
+          </a:p>
+        </p:txBody>
+      </p:sp>
+      <p:sp>
+        <p:nvSpPr>
+          <p:cNvPr id="4" name="Slide Number Placeholder 3">
+            <a:extLst>
+              <a:ext uri="{FF2B5EF4-FFF2-40B4-BE49-F238E27FC236}">
+                <a16:creationId xmlns:a16="http://schemas.microsoft.com/office/drawing/2014/main" id="{3F54B37A-625A-B9C9-7469-ECAF70D95E58}"/>
+              </a:ext>
+            </a:extLst>
+          </p:cNvPr>
+          <p:cNvSpPr>
+            <a:spLocks noGrp="1"/>
+          </p:cNvSpPr>
+          <p:nvPr>
+            <p:ph type="sldNum" sz="quarter" idx="5"/>
+          </p:nvPr>
+        </p:nvSpPr>
+        <p:spPr/>
+        <p:txBody>
+          <a:bodyPr/>
+          <a:lstStyle/>
+          <a:p>
+            <a:r>
+              <a:rPr lang="en-US"/>
+              <a:t>Notes view: </a:t>
+            </a:r>
+            <a:fld id="{128CEAFE-FA94-43E5-B0FF-D47E1CCDD1B4}" type="slidenum">
+              <a:rPr lang="en-US" smtClean="0"/>
+              <a:pPr/>
+              <a:t>1</a:t>
+            </a:fld>
+            <a:endParaRPr lang="en-US"/>
+          </a:p>
+        </p:txBody>
+      </p:sp>
+    </p:spTree>
+    <p:extLst>
+      <p:ext uri="{BB962C8B-B14F-4D97-AF65-F5344CB8AC3E}">
+        <p14:creationId xmlns:p14="http://schemas.microsoft.com/office/powerpoint/2010/main" val="2082523552"/>
       </p:ext>
     </p:extLst>
   </p:cSld>
@@ -5450,6 +5713,1387 @@
 </p:sld>
 </file>
 
+<file path=ppt/slides/slide2.xml><?xml version="1.0" encoding="utf-8"?>
+<p:sld xmlns:a="http://schemas.openxmlformats.org/drawingml/2006/main" xmlns:r="http://schemas.openxmlformats.org/officeDocument/2006/relationships" xmlns:p="http://schemas.openxmlformats.org/presentationml/2006/main">
+  <p:cSld>
+    <p:spTree>
+      <p:nvGrpSpPr>
+        <p:cNvPr id="1" name="">
+          <a:extLst>
+            <a:ext uri="{FF2B5EF4-FFF2-40B4-BE49-F238E27FC236}">
+              <a16:creationId xmlns:a16="http://schemas.microsoft.com/office/drawing/2014/main" id="{913C2BF0-483F-550C-4E9B-ABEA7AB9CB6F}"/>
+            </a:ext>
+          </a:extLst>
+        </p:cNvPr>
+        <p:cNvGrpSpPr/>
+        <p:nvPr/>
+      </p:nvGrpSpPr>
+      <p:grpSpPr>
+        <a:xfrm>
+          <a:off x="0" y="0"/>
+          <a:ext cx="0" cy="0"/>
+          <a:chOff x="0" y="0"/>
+          <a:chExt cx="0" cy="0"/>
+        </a:xfrm>
+      </p:grpSpPr>
+      <p:graphicFrame>
+        <p:nvGraphicFramePr>
+          <p:cNvPr id="5" name="think-cell data - do not delete" hidden="1">
+            <a:extLst>
+              <a:ext uri="{FF2B5EF4-FFF2-40B4-BE49-F238E27FC236}">
+                <a16:creationId xmlns:a16="http://schemas.microsoft.com/office/drawing/2014/main" id="{46408EC8-1DF3-E9B3-3F39-FC155A178967}"/>
+              </a:ext>
+            </a:extLst>
+          </p:cNvPr>
+          <p:cNvGraphicFramePr>
+            <a:graphicFrameLocks/>
+          </p:cNvGraphicFramePr>
+          <p:nvPr>
+            <p:custDataLst>
+              <p:tags r:id="rId1"/>
+            </p:custDataLst>
+          </p:nvPr>
+        </p:nvGraphicFramePr>
+        <p:xfrm>
+          <a:off x="1588" y="1588"/>
+          <a:ext cx="1588" cy="1588"/>
+        </p:xfrm>
+        <a:graphic>
+          <a:graphicData uri="http://schemas.openxmlformats.org/presentationml/2006/ole">
+            <mc:AlternateContent xmlns:mc="http://schemas.openxmlformats.org/markup-compatibility/2006">
+              <mc:Choice xmlns:v="urn:schemas-microsoft-com:vml" Requires="v">
+                <p:oleObj name="think-cell Slide" r:id="rId4" imgW="501" imgH="500" progId="TCLayout.ActiveDocument.1">
+                  <p:embed/>
+                </p:oleObj>
+              </mc:Choice>
+              <mc:Fallback>
+                <p:oleObj name="think-cell Slide" r:id="rId4" imgW="501" imgH="500" progId="TCLayout.ActiveDocument.1">
+                  <p:embed/>
+                  <p:pic>
+                    <p:nvPicPr>
+                      <p:cNvPr id="5" name="think-cell data - do not delete" hidden="1">
+                        <a:extLst>
+                          <a:ext uri="{FF2B5EF4-FFF2-40B4-BE49-F238E27FC236}">
+                            <a16:creationId xmlns:a16="http://schemas.microsoft.com/office/drawing/2014/main" id="{46408EC8-1DF3-E9B3-3F39-FC155A178967}"/>
+                          </a:ext>
+                        </a:extLst>
+                      </p:cNvPr>
+                      <p:cNvPicPr/>
+                      <p:nvPr/>
+                    </p:nvPicPr>
+                    <p:blipFill>
+                      <a:blip r:embed="rId5"/>
+                      <a:stretch>
+                        <a:fillRect/>
+                      </a:stretch>
+                    </p:blipFill>
+                    <p:spPr>
+                      <a:xfrm>
+                        <a:off x="1588" y="1588"/>
+                        <a:ext cx="1588" cy="1588"/>
+                      </a:xfrm>
+                      <a:prstGeom prst="rect">
+                        <a:avLst/>
+                      </a:prstGeom>
+                    </p:spPr>
+                  </p:pic>
+                </p:oleObj>
+              </mc:Fallback>
+            </mc:AlternateContent>
+          </a:graphicData>
+        </a:graphic>
+      </p:graphicFrame>
+      <p:sp>
+        <p:nvSpPr>
+          <p:cNvPr id="2" name="Title 1">
+            <a:extLst>
+              <a:ext uri="{FF2B5EF4-FFF2-40B4-BE49-F238E27FC236}">
+                <a16:creationId xmlns:a16="http://schemas.microsoft.com/office/drawing/2014/main" id="{75D96F48-0739-FB70-1019-2C9941804C87}"/>
+              </a:ext>
+            </a:extLst>
+          </p:cNvPr>
+          <p:cNvSpPr>
+            <a:spLocks noGrp="1"/>
+          </p:cNvSpPr>
+          <p:nvPr>
+            <p:ph type="title"/>
+          </p:nvPr>
+        </p:nvSpPr>
+        <p:spPr>
+          <a:xfrm>
+            <a:off x="478365" y="529044"/>
+            <a:ext cx="10790527" cy="596935"/>
+          </a:xfrm>
+        </p:spPr>
+        <p:txBody>
+          <a:bodyPr vert="horz" rIns="91440"/>
+          <a:lstStyle/>
+          <a:p>
+            <a:r>
+              <a:rPr lang="ja-JP" altLang="en-US" dirty="0"/>
+              <a:t>サーチファンドとは：ビジネスの仕組み</a:t>
+            </a:r>
+          </a:p>
+        </p:txBody>
+      </p:sp>
+      <p:sp>
+        <p:nvSpPr>
+          <p:cNvPr id="26" name="Text Placeholder 2">
+            <a:extLst>
+              <a:ext uri="{FF2B5EF4-FFF2-40B4-BE49-F238E27FC236}">
+                <a16:creationId xmlns:a16="http://schemas.microsoft.com/office/drawing/2014/main" id="{67A8A01F-811B-60A1-9218-419E06F8C29B}"/>
+              </a:ext>
+            </a:extLst>
+          </p:cNvPr>
+          <p:cNvSpPr>
+            <a:spLocks noGrp="1"/>
+          </p:cNvSpPr>
+          <p:nvPr>
+            <p:ph type="body" sz="quarter" idx="19"/>
+          </p:nvPr>
+        </p:nvSpPr>
+        <p:spPr>
+          <a:xfrm>
+            <a:off x="478366" y="1186593"/>
+            <a:ext cx="11340000" cy="329974"/>
+          </a:xfrm>
+        </p:spPr>
+        <p:txBody>
+          <a:bodyPr anchor="ctr">
+            <a:noAutofit/>
+          </a:bodyPr>
+          <a:lstStyle/>
+          <a:p>
+            <a:r>
+              <a:rPr lang="ja-JP" altLang="en-US" b="0" dirty="0"/>
+              <a:t>投資家の支援を受けて、</a:t>
+            </a:r>
+            <a:r>
+              <a:rPr lang="ja-JP" altLang="en-US" dirty="0"/>
+              <a:t>サーチャー個人（吉川）が自ら</a:t>
+            </a:r>
+            <a:r>
+              <a:rPr lang="ja-JP" altLang="en-US" b="0" dirty="0"/>
+              <a:t>魅力ある</a:t>
+            </a:r>
+            <a:r>
+              <a:rPr lang="ja-JP" altLang="en-US" dirty="0"/>
+              <a:t>中小企業</a:t>
+            </a:r>
+            <a:r>
+              <a:rPr lang="en-US" altLang="ja-JP" dirty="0"/>
+              <a:t>1</a:t>
+            </a:r>
+            <a:r>
+              <a:rPr lang="ja-JP" altLang="en-US" dirty="0"/>
+              <a:t>社を事業承継によって買収し、</a:t>
+            </a:r>
+            <a:br>
+              <a:rPr lang="en-US" altLang="ja-JP" dirty="0"/>
+            </a:br>
+            <a:r>
+              <a:rPr lang="ja-JP" altLang="en-US" dirty="0"/>
+              <a:t>成長させ、収益を挙げる</a:t>
+            </a:r>
+            <a:r>
+              <a:rPr lang="ja-JP" altLang="en-US" b="0" dirty="0"/>
+              <a:t>ことを目指します</a:t>
+            </a:r>
+          </a:p>
+        </p:txBody>
+      </p:sp>
+      <p:sp>
+        <p:nvSpPr>
+          <p:cNvPr id="43" name="Rectangle 42">
+            <a:extLst>
+              <a:ext uri="{FF2B5EF4-FFF2-40B4-BE49-F238E27FC236}">
+                <a16:creationId xmlns:a16="http://schemas.microsoft.com/office/drawing/2014/main" id="{424CBBE8-DBDB-1768-FE9A-79ABD20A9A59}"/>
+              </a:ext>
+            </a:extLst>
+          </p:cNvPr>
+          <p:cNvSpPr/>
+          <p:nvPr/>
+        </p:nvSpPr>
+        <p:spPr>
+          <a:xfrm>
+            <a:off x="4219004" y="1989224"/>
+            <a:ext cx="1652677" cy="634512"/>
+          </a:xfrm>
+          <a:prstGeom prst="rect">
+            <a:avLst/>
+          </a:prstGeom>
+          <a:solidFill>
+            <a:srgbClr val="C43529"/>
+          </a:solidFill>
+          <a:ln w="3175" cmpd="sng">
+            <a:noFill/>
+          </a:ln>
+        </p:spPr>
+        <p:txBody>
+          <a:bodyPr rot="0" spcFirstLastPara="0" vertOverflow="overflow" horzOverflow="overflow" vert="horz" wrap="none" lIns="91440" tIns="45720" rIns="91440" bIns="45720" numCol="1" spcCol="0" rtlCol="0" fromWordArt="0" anchor="ctr" anchorCtr="0" forceAA="0" compatLnSpc="1">
+            <a:prstTxWarp prst="textNoShape">
+              <a:avLst/>
+            </a:prstTxWarp>
+            <a:noAutofit/>
+          </a:bodyPr>
+          <a:lstStyle/>
+          <a:p>
+            <a:pPr algn="ctr">
+              <a:spcBef>
+                <a:spcPct val="0"/>
+              </a:spcBef>
+              <a:buFont typeface="Arial"/>
+              <a:buNone/>
+            </a:pPr>
+            <a:r>
+              <a:rPr kumimoji="1" lang="en-US" altLang="ja-JP" sz="1200" dirty="0">
+                <a:solidFill>
+                  <a:schemeClr val="bg1"/>
+                </a:solidFill>
+                <a:latin typeface="Trebuchet MS" panose="020B0603020202020204" pitchFamily="34" charset="0"/>
+                <a:ea typeface="Meiryo UI" panose="020B0604030504040204" pitchFamily="50" charset="-128"/>
+              </a:rPr>
+              <a:t>Investors</a:t>
+            </a:r>
+            <a:endParaRPr kumimoji="1" lang="ja-JP" altLang="en-US" sz="1200" dirty="0">
+              <a:solidFill>
+                <a:schemeClr val="bg1"/>
+              </a:solidFill>
+              <a:latin typeface="Trebuchet MS" panose="020B0603020202020204" pitchFamily="34" charset="0"/>
+              <a:ea typeface="Meiryo UI" panose="020B0604030504040204" pitchFamily="50" charset="-128"/>
+            </a:endParaRPr>
+          </a:p>
+        </p:txBody>
+      </p:sp>
+      <p:sp>
+        <p:nvSpPr>
+          <p:cNvPr id="6" name="Rectangle 5">
+            <a:extLst>
+              <a:ext uri="{FF2B5EF4-FFF2-40B4-BE49-F238E27FC236}">
+                <a16:creationId xmlns:a16="http://schemas.microsoft.com/office/drawing/2014/main" id="{A3D915FA-487E-C9C4-2E06-4630EE6FBC91}"/>
+              </a:ext>
+            </a:extLst>
+          </p:cNvPr>
+          <p:cNvSpPr/>
+          <p:nvPr/>
+        </p:nvSpPr>
+        <p:spPr>
+          <a:xfrm>
+            <a:off x="2365316" y="1994550"/>
+            <a:ext cx="1652677" cy="634512"/>
+          </a:xfrm>
+          <a:prstGeom prst="rect">
+            <a:avLst/>
+          </a:prstGeom>
+          <a:solidFill>
+            <a:srgbClr val="C43529"/>
+          </a:solidFill>
+          <a:ln w="3175" cmpd="sng">
+            <a:noFill/>
+          </a:ln>
+        </p:spPr>
+        <p:txBody>
+          <a:bodyPr rot="0" spcFirstLastPara="0" vertOverflow="overflow" horzOverflow="overflow" vert="horz" wrap="none" lIns="91440" tIns="45720" rIns="91440" bIns="45720" numCol="1" spcCol="0" rtlCol="0" fromWordArt="0" anchor="ctr" anchorCtr="0" forceAA="0" compatLnSpc="1">
+            <a:prstTxWarp prst="textNoShape">
+              <a:avLst/>
+            </a:prstTxWarp>
+            <a:noAutofit/>
+          </a:bodyPr>
+          <a:lstStyle/>
+          <a:p>
+            <a:pPr algn="ctr">
+              <a:spcBef>
+                <a:spcPct val="0"/>
+              </a:spcBef>
+              <a:buFont typeface="Arial"/>
+              <a:buNone/>
+            </a:pPr>
+            <a:r>
+              <a:rPr kumimoji="1" lang="en-US" altLang="ja-JP" sz="1200" dirty="0">
+                <a:solidFill>
+                  <a:schemeClr val="bg1"/>
+                </a:solidFill>
+                <a:latin typeface="Trebuchet MS" panose="020B0603020202020204" pitchFamily="34" charset="0"/>
+                <a:ea typeface="Meiryo UI" panose="020B0604030504040204" pitchFamily="50" charset="-128"/>
+              </a:rPr>
+              <a:t>Searcher</a:t>
+            </a:r>
+            <a:endParaRPr kumimoji="1" lang="ja-JP" altLang="en-US" sz="1200" dirty="0">
+              <a:solidFill>
+                <a:schemeClr val="bg1"/>
+              </a:solidFill>
+              <a:latin typeface="Trebuchet MS" panose="020B0603020202020204" pitchFamily="34" charset="0"/>
+              <a:ea typeface="Meiryo UI" panose="020B0604030504040204" pitchFamily="50" charset="-128"/>
+            </a:endParaRPr>
+          </a:p>
+        </p:txBody>
+      </p:sp>
+      <p:sp>
+        <p:nvSpPr>
+          <p:cNvPr id="9" name="Rectangle 8">
+            <a:extLst>
+              <a:ext uri="{FF2B5EF4-FFF2-40B4-BE49-F238E27FC236}">
+                <a16:creationId xmlns:a16="http://schemas.microsoft.com/office/drawing/2014/main" id="{C06C89FC-379A-7310-C264-F919ABB324C1}"/>
+              </a:ext>
+            </a:extLst>
+          </p:cNvPr>
+          <p:cNvSpPr/>
+          <p:nvPr/>
+        </p:nvSpPr>
+        <p:spPr>
+          <a:xfrm>
+            <a:off x="511628" y="1989224"/>
+            <a:ext cx="1652677" cy="634512"/>
+          </a:xfrm>
+          <a:prstGeom prst="rect">
+            <a:avLst/>
+          </a:prstGeom>
+          <a:solidFill>
+            <a:srgbClr val="C43529"/>
+          </a:solidFill>
+          <a:ln w="3175" cmpd="sng">
+            <a:noFill/>
+          </a:ln>
+        </p:spPr>
+        <p:txBody>
+          <a:bodyPr rot="0" spcFirstLastPara="0" vertOverflow="overflow" horzOverflow="overflow" vert="horz" wrap="none" lIns="91440" tIns="45720" rIns="91440" bIns="45720" numCol="1" spcCol="0" rtlCol="0" fromWordArt="0" anchor="ctr" anchorCtr="0" forceAA="0" compatLnSpc="1">
+            <a:prstTxWarp prst="textNoShape">
+              <a:avLst/>
+            </a:prstTxWarp>
+            <a:noAutofit/>
+          </a:bodyPr>
+          <a:lstStyle/>
+          <a:p>
+            <a:pPr algn="ctr">
+              <a:spcBef>
+                <a:spcPct val="0"/>
+              </a:spcBef>
+              <a:buFont typeface="Arial"/>
+              <a:buNone/>
+            </a:pPr>
+            <a:r>
+              <a:rPr kumimoji="1" lang="pl-PL" altLang="ja-JP" sz="1200" dirty="0">
+                <a:solidFill>
+                  <a:schemeClr val="bg1"/>
+                </a:solidFill>
+                <a:latin typeface="Trebuchet MS" panose="020B0603020202020204" pitchFamily="34" charset="0"/>
+                <a:ea typeface="Meiryo UI" panose="020B0604030504040204" pitchFamily="50" charset="-128"/>
+              </a:rPr>
+              <a:t>Company </a:t>
+            </a:r>
+            <a:r>
+              <a:rPr kumimoji="1" lang="en-US" altLang="ja-JP" sz="1200" dirty="0">
+                <a:solidFill>
+                  <a:schemeClr val="bg1"/>
+                </a:solidFill>
+                <a:latin typeface="Trebuchet MS" panose="020B0603020202020204" pitchFamily="34" charset="0"/>
+                <a:ea typeface="Meiryo UI" panose="020B0604030504040204" pitchFamily="50" charset="-128"/>
+              </a:rPr>
+              <a:t>without</a:t>
+            </a:r>
+            <a:r>
+              <a:rPr kumimoji="1" lang="pl-PL" altLang="ja-JP" sz="1200" dirty="0">
+                <a:solidFill>
+                  <a:schemeClr val="bg1"/>
+                </a:solidFill>
+                <a:latin typeface="Trebuchet MS" panose="020B0603020202020204" pitchFamily="34" charset="0"/>
+                <a:ea typeface="Meiryo UI" panose="020B0604030504040204" pitchFamily="50" charset="-128"/>
+              </a:rPr>
+              <a:t> </a:t>
+            </a:r>
+            <a:br>
+              <a:rPr kumimoji="1" lang="en-US" altLang="ja-JP" sz="1200" dirty="0">
+                <a:solidFill>
+                  <a:schemeClr val="bg1"/>
+                </a:solidFill>
+                <a:latin typeface="Trebuchet MS" panose="020B0603020202020204" pitchFamily="34" charset="0"/>
+                <a:ea typeface="Meiryo UI" panose="020B0604030504040204" pitchFamily="50" charset="-128"/>
+              </a:rPr>
+            </a:br>
+            <a:r>
+              <a:rPr kumimoji="1" lang="pl-PL" altLang="ja-JP" sz="1200" dirty="0">
+                <a:solidFill>
+                  <a:schemeClr val="bg1"/>
+                </a:solidFill>
+                <a:latin typeface="Trebuchet MS" panose="020B0603020202020204" pitchFamily="34" charset="0"/>
+                <a:ea typeface="Meiryo UI" panose="020B0604030504040204" pitchFamily="50" charset="-128"/>
+              </a:rPr>
+              <a:t>Successor</a:t>
+            </a:r>
+            <a:endParaRPr kumimoji="1" lang="ja-JP" altLang="en-US" sz="1200" dirty="0">
+              <a:solidFill>
+                <a:schemeClr val="bg1"/>
+              </a:solidFill>
+              <a:latin typeface="Trebuchet MS" panose="020B0603020202020204" pitchFamily="34" charset="0"/>
+              <a:ea typeface="Meiryo UI" panose="020B0604030504040204" pitchFamily="50" charset="-128"/>
+            </a:endParaRPr>
+          </a:p>
+        </p:txBody>
+      </p:sp>
+      <p:grpSp>
+        <p:nvGrpSpPr>
+          <p:cNvPr id="16" name="Group 15">
+            <a:extLst>
+              <a:ext uri="{FF2B5EF4-FFF2-40B4-BE49-F238E27FC236}">
+                <a16:creationId xmlns:a16="http://schemas.microsoft.com/office/drawing/2014/main" id="{29DABBC7-CB90-050C-7E1D-EA2E6F4237C3}"/>
+              </a:ext>
+            </a:extLst>
+          </p:cNvPr>
+          <p:cNvGrpSpPr/>
+          <p:nvPr/>
+        </p:nvGrpSpPr>
+        <p:grpSpPr>
+          <a:xfrm>
+            <a:off x="3794498" y="3028158"/>
+            <a:ext cx="648000" cy="1023734"/>
+            <a:chOff x="4617184" y="2938071"/>
+            <a:chExt cx="910800" cy="1023734"/>
+          </a:xfrm>
+        </p:grpSpPr>
+        <p:grpSp>
+          <p:nvGrpSpPr>
+            <p:cNvPr id="13" name="Group 12">
+              <a:extLst>
+                <a:ext uri="{FF2B5EF4-FFF2-40B4-BE49-F238E27FC236}">
+                  <a16:creationId xmlns:a16="http://schemas.microsoft.com/office/drawing/2014/main" id="{EBDF575E-1FAD-A2FF-1F97-07D7936155C6}"/>
+                </a:ext>
+              </a:extLst>
+            </p:cNvPr>
+            <p:cNvGrpSpPr/>
+            <p:nvPr/>
+          </p:nvGrpSpPr>
+          <p:grpSpPr>
+            <a:xfrm>
+              <a:off x="4617184" y="2938071"/>
+              <a:ext cx="910798" cy="434433"/>
+              <a:chOff x="4617184" y="3436363"/>
+              <a:chExt cx="910798" cy="434433"/>
+            </a:xfrm>
+          </p:grpSpPr>
+          <p:sp>
+            <p:nvSpPr>
+              <p:cNvPr id="38" name="Arrow: Right 37">
+                <a:extLst>
+                  <a:ext uri="{FF2B5EF4-FFF2-40B4-BE49-F238E27FC236}">
+                    <a16:creationId xmlns:a16="http://schemas.microsoft.com/office/drawing/2014/main" id="{39F2BD2B-BC2F-4B43-66A8-8B264EF1CF9F}"/>
+                  </a:ext>
+                </a:extLst>
+              </p:cNvPr>
+              <p:cNvSpPr/>
+              <p:nvPr/>
+            </p:nvSpPr>
+            <p:spPr>
+              <a:xfrm>
+                <a:off x="4617185" y="3436363"/>
+                <a:ext cx="910797" cy="243116"/>
+              </a:xfrm>
+              <a:prstGeom prst="rightArrow">
+                <a:avLst/>
+              </a:prstGeom>
+              <a:solidFill>
+                <a:srgbClr val="FFCCCC"/>
+              </a:solidFill>
+              <a:ln w="3175" cmpd="sng">
+                <a:noFill/>
+              </a:ln>
+            </p:spPr>
+            <p:txBody>
+              <a:bodyPr rot="0" spcFirstLastPara="0" vertOverflow="overflow" horzOverflow="overflow" vert="horz" wrap="none" lIns="91440" tIns="45720" rIns="91440" bIns="45720" numCol="1" spcCol="0" rtlCol="0" fromWordArt="0" anchor="ctr" anchorCtr="0" forceAA="0" compatLnSpc="1">
+                <a:prstTxWarp prst="textNoShape">
+                  <a:avLst/>
+                </a:prstTxWarp>
+                <a:noAutofit/>
+              </a:bodyPr>
+              <a:lstStyle/>
+              <a:p>
+                <a:pPr algn="ctr">
+                  <a:spcBef>
+                    <a:spcPct val="0"/>
+                  </a:spcBef>
+                </a:pPr>
+                <a:endParaRPr kumimoji="1" lang="ja-JP" altLang="en-US" sz="1050" dirty="0">
+                  <a:solidFill>
+                    <a:schemeClr val="bg1"/>
+                  </a:solidFill>
+                  <a:latin typeface="Trebuchet MS" panose="020B0603020202020204" pitchFamily="34" charset="0"/>
+                  <a:ea typeface="Meiryo UI" panose="020B0604030504040204" pitchFamily="50" charset="-128"/>
+                </a:endParaRPr>
+              </a:p>
+            </p:txBody>
+          </p:sp>
+          <p:sp>
+            <p:nvSpPr>
+              <p:cNvPr id="40" name="Rectangle 39">
+                <a:extLst>
+                  <a:ext uri="{FF2B5EF4-FFF2-40B4-BE49-F238E27FC236}">
+                    <a16:creationId xmlns:a16="http://schemas.microsoft.com/office/drawing/2014/main" id="{A0885063-2E48-5198-C5C8-B83434BE2B57}"/>
+                  </a:ext>
+                </a:extLst>
+              </p:cNvPr>
+              <p:cNvSpPr/>
+              <p:nvPr/>
+            </p:nvSpPr>
+            <p:spPr>
+              <a:xfrm>
+                <a:off x="4617184" y="3666241"/>
+                <a:ext cx="861235" cy="204555"/>
+              </a:xfrm>
+              <a:prstGeom prst="rect">
+                <a:avLst/>
+              </a:prstGeom>
+              <a:noFill/>
+              <a:ln w="3175" cmpd="sng">
+                <a:noFill/>
+              </a:ln>
+            </p:spPr>
+            <p:txBody>
+              <a:bodyPr rot="0" spcFirstLastPara="0" vertOverflow="overflow" horzOverflow="overflow" vert="horz" wrap="none" lIns="91440" tIns="45720" rIns="91440" bIns="45720" numCol="1" spcCol="0" rtlCol="0" fromWordArt="0" anchor="t" anchorCtr="0" forceAA="0" compatLnSpc="1">
+                <a:prstTxWarp prst="textNoShape">
+                  <a:avLst/>
+                </a:prstTxWarp>
+                <a:noAutofit/>
+              </a:bodyPr>
+              <a:lstStyle/>
+              <a:p>
+                <a:pPr algn="ctr">
+                  <a:spcBef>
+                    <a:spcPct val="0"/>
+                  </a:spcBef>
+                </a:pPr>
+                <a:r>
+                  <a:rPr kumimoji="1" lang="en-US" altLang="ja-JP" sz="1050" dirty="0">
+                    <a:solidFill>
+                      <a:schemeClr val="tx2"/>
+                    </a:solidFill>
+                    <a:latin typeface="Trebuchet MS" panose="020B0603020202020204" pitchFamily="34" charset="0"/>
+                    <a:ea typeface="Meiryo UI" panose="020B0604030504040204" pitchFamily="50" charset="-128"/>
+                  </a:rPr>
+                  <a:t>Financial</a:t>
+                </a:r>
+                <a:br>
+                  <a:rPr kumimoji="1" lang="en-US" altLang="ja-JP" sz="1050" dirty="0">
+                    <a:solidFill>
+                      <a:schemeClr val="tx2"/>
+                    </a:solidFill>
+                    <a:latin typeface="Trebuchet MS" panose="020B0603020202020204" pitchFamily="34" charset="0"/>
+                    <a:ea typeface="Meiryo UI" panose="020B0604030504040204" pitchFamily="50" charset="-128"/>
+                  </a:rPr>
+                </a:br>
+                <a:r>
+                  <a:rPr kumimoji="1" lang="en-US" altLang="ja-JP" sz="1050" dirty="0">
+                    <a:solidFill>
+                      <a:schemeClr val="tx2"/>
+                    </a:solidFill>
+                    <a:latin typeface="Trebuchet MS" panose="020B0603020202020204" pitchFamily="34" charset="0"/>
+                    <a:ea typeface="Meiryo UI" panose="020B0604030504040204" pitchFamily="50" charset="-128"/>
+                  </a:rPr>
+                  <a:t>Returns</a:t>
+                </a:r>
+                <a:endParaRPr kumimoji="1" lang="ja-JP" altLang="en-US" sz="1050" dirty="0">
+                  <a:solidFill>
+                    <a:schemeClr val="tx2"/>
+                  </a:solidFill>
+                  <a:latin typeface="Trebuchet MS" panose="020B0603020202020204" pitchFamily="34" charset="0"/>
+                  <a:ea typeface="Meiryo UI" panose="020B0604030504040204" pitchFamily="50" charset="-128"/>
+                </a:endParaRPr>
+              </a:p>
+            </p:txBody>
+          </p:sp>
+        </p:grpSp>
+        <p:sp>
+          <p:nvSpPr>
+            <p:cNvPr id="39" name="Arrow: Right 38">
+              <a:extLst>
+                <a:ext uri="{FF2B5EF4-FFF2-40B4-BE49-F238E27FC236}">
+                  <a16:creationId xmlns:a16="http://schemas.microsoft.com/office/drawing/2014/main" id="{5A6168D8-601B-0FE0-DE95-5BE12DFAF2FA}"/>
+                </a:ext>
+              </a:extLst>
+            </p:cNvPr>
+            <p:cNvSpPr/>
+            <p:nvPr/>
+          </p:nvSpPr>
+          <p:spPr>
+            <a:xfrm rot="10800000">
+              <a:off x="4617185" y="3565251"/>
+              <a:ext cx="910797" cy="243116"/>
+            </a:xfrm>
+            <a:prstGeom prst="rightArrow">
+              <a:avLst/>
+            </a:prstGeom>
+            <a:solidFill>
+              <a:srgbClr val="FF6566"/>
+            </a:solidFill>
+            <a:ln w="3175" cmpd="sng">
+              <a:noFill/>
+            </a:ln>
+          </p:spPr>
+          <p:txBody>
+            <a:bodyPr rot="0" spcFirstLastPara="0" vertOverflow="overflow" horzOverflow="overflow" vert="horz" wrap="none" lIns="91440" tIns="45720" rIns="91440" bIns="45720" numCol="1" spcCol="0" rtlCol="0" fromWordArt="0" anchor="ctr" anchorCtr="0" forceAA="0" compatLnSpc="1">
+              <a:prstTxWarp prst="textNoShape">
+                <a:avLst/>
+              </a:prstTxWarp>
+              <a:noAutofit/>
+            </a:bodyPr>
+            <a:lstStyle/>
+            <a:p>
+              <a:pPr algn="ctr">
+                <a:spcBef>
+                  <a:spcPct val="0"/>
+                </a:spcBef>
+              </a:pPr>
+              <a:endParaRPr kumimoji="1" lang="ja-JP" altLang="en-US" sz="1050" dirty="0">
+                <a:solidFill>
+                  <a:schemeClr val="bg1"/>
+                </a:solidFill>
+                <a:latin typeface="Trebuchet MS" panose="020B0603020202020204" pitchFamily="34" charset="0"/>
+                <a:ea typeface="Meiryo UI" panose="020B0604030504040204" pitchFamily="50" charset="-128"/>
+              </a:endParaRPr>
+            </a:p>
+          </p:txBody>
+        </p:sp>
+        <p:sp>
+          <p:nvSpPr>
+            <p:cNvPr id="41" name="Rectangle 40">
+              <a:extLst>
+                <a:ext uri="{FF2B5EF4-FFF2-40B4-BE49-F238E27FC236}">
+                  <a16:creationId xmlns:a16="http://schemas.microsoft.com/office/drawing/2014/main" id="{1BCC2625-9555-E67C-9DEE-05BEBB8AA0FE}"/>
+                </a:ext>
+              </a:extLst>
+            </p:cNvPr>
+            <p:cNvSpPr/>
+            <p:nvPr/>
+          </p:nvSpPr>
+          <p:spPr>
+            <a:xfrm>
+              <a:off x="4617185" y="3757250"/>
+              <a:ext cx="910799" cy="204555"/>
+            </a:xfrm>
+            <a:prstGeom prst="rect">
+              <a:avLst/>
+            </a:prstGeom>
+            <a:noFill/>
+            <a:ln w="3175" cmpd="sng">
+              <a:noFill/>
+            </a:ln>
+          </p:spPr>
+          <p:txBody>
+            <a:bodyPr rot="0" spcFirstLastPara="0" vertOverflow="overflow" horzOverflow="overflow" vert="horz" wrap="none" lIns="91440" tIns="45720" rIns="91440" bIns="45720" numCol="1" spcCol="0" rtlCol="0" fromWordArt="0" anchor="t" anchorCtr="0" forceAA="0" compatLnSpc="1">
+              <a:prstTxWarp prst="textNoShape">
+                <a:avLst/>
+              </a:prstTxWarp>
+              <a:noAutofit/>
+            </a:bodyPr>
+            <a:lstStyle/>
+            <a:p>
+              <a:pPr algn="ctr">
+                <a:spcBef>
+                  <a:spcPct val="0"/>
+                </a:spcBef>
+              </a:pPr>
+              <a:r>
+                <a:rPr kumimoji="1" lang="en-US" altLang="ja-JP" sz="1050" dirty="0">
+                  <a:solidFill>
+                    <a:schemeClr val="tx2"/>
+                  </a:solidFill>
+                  <a:latin typeface="Trebuchet MS" panose="020B0603020202020204" pitchFamily="34" charset="0"/>
+                  <a:ea typeface="Meiryo UI" panose="020B0604030504040204" pitchFamily="50" charset="-128"/>
+                </a:rPr>
+                <a:t>Capital / </a:t>
+              </a:r>
+              <a:br>
+                <a:rPr kumimoji="1" lang="en-US" altLang="ja-JP" sz="1050" dirty="0">
+                  <a:solidFill>
+                    <a:schemeClr val="tx2"/>
+                  </a:solidFill>
+                  <a:latin typeface="Trebuchet MS" panose="020B0603020202020204" pitchFamily="34" charset="0"/>
+                  <a:ea typeface="Meiryo UI" panose="020B0604030504040204" pitchFamily="50" charset="-128"/>
+                </a:rPr>
+              </a:br>
+              <a:r>
+                <a:rPr kumimoji="1" lang="en-US" altLang="ja-JP" sz="1050" dirty="0">
+                  <a:solidFill>
+                    <a:schemeClr val="tx2"/>
+                  </a:solidFill>
+                  <a:latin typeface="Trebuchet MS" panose="020B0603020202020204" pitchFamily="34" charset="0"/>
+                  <a:ea typeface="Meiryo UI" panose="020B0604030504040204" pitchFamily="50" charset="-128"/>
+                </a:rPr>
+                <a:t>Expertise</a:t>
+              </a:r>
+              <a:endParaRPr kumimoji="1" lang="ja-JP" altLang="en-US" sz="1050" dirty="0">
+                <a:solidFill>
+                  <a:schemeClr val="tx2"/>
+                </a:solidFill>
+                <a:latin typeface="Trebuchet MS" panose="020B0603020202020204" pitchFamily="34" charset="0"/>
+                <a:ea typeface="Meiryo UI" panose="020B0604030504040204" pitchFamily="50" charset="-128"/>
+              </a:endParaRPr>
+            </a:p>
+          </p:txBody>
+        </p:sp>
+      </p:grpSp>
+      <p:grpSp>
+        <p:nvGrpSpPr>
+          <p:cNvPr id="15" name="Group 14">
+            <a:extLst>
+              <a:ext uri="{FF2B5EF4-FFF2-40B4-BE49-F238E27FC236}">
+                <a16:creationId xmlns:a16="http://schemas.microsoft.com/office/drawing/2014/main" id="{8AC7B87C-D98D-06F7-12BF-96A171C27021}"/>
+              </a:ext>
+            </a:extLst>
+          </p:cNvPr>
+          <p:cNvGrpSpPr/>
+          <p:nvPr/>
+        </p:nvGrpSpPr>
+        <p:grpSpPr>
+          <a:xfrm>
+            <a:off x="1940834" y="3028158"/>
+            <a:ext cx="647954" cy="1023730"/>
+            <a:chOff x="2273417" y="2938071"/>
+            <a:chExt cx="910287" cy="1023730"/>
+          </a:xfrm>
+        </p:grpSpPr>
+        <p:sp>
+          <p:nvSpPr>
+            <p:cNvPr id="45" name="Arrow: Right 44">
+              <a:extLst>
+                <a:ext uri="{FF2B5EF4-FFF2-40B4-BE49-F238E27FC236}">
+                  <a16:creationId xmlns:a16="http://schemas.microsoft.com/office/drawing/2014/main" id="{70D8C301-AF08-4E05-8623-2EC047047F93}"/>
+                </a:ext>
+              </a:extLst>
+            </p:cNvPr>
+            <p:cNvSpPr/>
+            <p:nvPr/>
+          </p:nvSpPr>
+          <p:spPr>
+            <a:xfrm>
+              <a:off x="2273419" y="2938071"/>
+              <a:ext cx="910284" cy="243116"/>
+            </a:xfrm>
+            <a:prstGeom prst="rightArrow">
+              <a:avLst/>
+            </a:prstGeom>
+            <a:solidFill>
+              <a:srgbClr val="FFCCCC"/>
+            </a:solidFill>
+            <a:ln w="3175" cmpd="sng">
+              <a:noFill/>
+            </a:ln>
+          </p:spPr>
+          <p:txBody>
+            <a:bodyPr rot="0" spcFirstLastPara="0" vertOverflow="overflow" horzOverflow="overflow" vert="horz" wrap="none" lIns="91440" tIns="45720" rIns="91440" bIns="45720" numCol="1" spcCol="0" rtlCol="0" fromWordArt="0" anchor="ctr" anchorCtr="0" forceAA="0" compatLnSpc="1">
+              <a:prstTxWarp prst="textNoShape">
+                <a:avLst/>
+              </a:prstTxWarp>
+              <a:noAutofit/>
+            </a:bodyPr>
+            <a:lstStyle/>
+            <a:p>
+              <a:pPr algn="ctr">
+                <a:spcBef>
+                  <a:spcPct val="0"/>
+                </a:spcBef>
+              </a:pPr>
+              <a:endParaRPr kumimoji="1" lang="ja-JP" altLang="en-US" sz="1200" dirty="0">
+                <a:solidFill>
+                  <a:schemeClr val="bg1"/>
+                </a:solidFill>
+                <a:latin typeface="Trebuchet MS" panose="020B0603020202020204" pitchFamily="34" charset="0"/>
+                <a:ea typeface="Meiryo UI" panose="020B0604030504040204" pitchFamily="50" charset="-128"/>
+              </a:endParaRPr>
+            </a:p>
+          </p:txBody>
+        </p:sp>
+        <p:sp>
+          <p:nvSpPr>
+            <p:cNvPr id="47" name="Rectangle 46">
+              <a:extLst>
+                <a:ext uri="{FF2B5EF4-FFF2-40B4-BE49-F238E27FC236}">
+                  <a16:creationId xmlns:a16="http://schemas.microsoft.com/office/drawing/2014/main" id="{C7BDF827-2FDE-87F0-F2F6-BAF290D4915B}"/>
+                </a:ext>
+              </a:extLst>
+            </p:cNvPr>
+            <p:cNvSpPr/>
+            <p:nvPr/>
+          </p:nvSpPr>
+          <p:spPr>
+            <a:xfrm>
+              <a:off x="2273417" y="3167949"/>
+              <a:ext cx="860749" cy="204555"/>
+            </a:xfrm>
+            <a:prstGeom prst="rect">
+              <a:avLst/>
+            </a:prstGeom>
+            <a:noFill/>
+            <a:ln w="3175" cmpd="sng">
+              <a:noFill/>
+            </a:ln>
+          </p:spPr>
+          <p:txBody>
+            <a:bodyPr rot="0" spcFirstLastPara="0" vertOverflow="overflow" horzOverflow="overflow" vert="horz" wrap="none" lIns="91440" tIns="45720" rIns="91440" bIns="45720" numCol="1" spcCol="0" rtlCol="0" fromWordArt="0" anchor="t" anchorCtr="0" forceAA="0" compatLnSpc="1">
+              <a:prstTxWarp prst="textNoShape">
+                <a:avLst/>
+              </a:prstTxWarp>
+              <a:noAutofit/>
+            </a:bodyPr>
+            <a:lstStyle/>
+            <a:p>
+              <a:pPr algn="ctr">
+                <a:spcBef>
+                  <a:spcPct val="0"/>
+                </a:spcBef>
+                <a:buFont typeface="Arial"/>
+                <a:buNone/>
+              </a:pPr>
+              <a:r>
+                <a:rPr kumimoji="1" lang="en-US" altLang="ja-JP" sz="1050" dirty="0">
+                  <a:solidFill>
+                    <a:schemeClr val="tx2"/>
+                  </a:solidFill>
+                  <a:latin typeface="Trebuchet MS" panose="020B0603020202020204" pitchFamily="34" charset="0"/>
+                  <a:ea typeface="Meiryo UI" panose="020B0604030504040204" pitchFamily="50" charset="-128"/>
+                </a:rPr>
+                <a:t>Ownership</a:t>
+              </a:r>
+              <a:br>
+                <a:rPr kumimoji="1" lang="en-US" altLang="ja-JP" sz="1050" dirty="0">
+                  <a:solidFill>
+                    <a:schemeClr val="tx2"/>
+                  </a:solidFill>
+                  <a:latin typeface="Trebuchet MS" panose="020B0603020202020204" pitchFamily="34" charset="0"/>
+                  <a:ea typeface="Meiryo UI" panose="020B0604030504040204" pitchFamily="50" charset="-128"/>
+                </a:rPr>
+              </a:br>
+              <a:r>
+                <a:rPr kumimoji="1" lang="en-US" altLang="ja-JP" sz="1050" dirty="0">
+                  <a:solidFill>
+                    <a:schemeClr val="tx2"/>
+                  </a:solidFill>
+                  <a:latin typeface="Trebuchet MS" panose="020B0603020202020204" pitchFamily="34" charset="0"/>
+                  <a:ea typeface="Meiryo UI" panose="020B0604030504040204" pitchFamily="50" charset="-128"/>
+                </a:rPr>
+                <a:t>Transfer</a:t>
+              </a:r>
+            </a:p>
+          </p:txBody>
+        </p:sp>
+        <p:sp>
+          <p:nvSpPr>
+            <p:cNvPr id="46" name="Arrow: Right 45">
+              <a:extLst>
+                <a:ext uri="{FF2B5EF4-FFF2-40B4-BE49-F238E27FC236}">
+                  <a16:creationId xmlns:a16="http://schemas.microsoft.com/office/drawing/2014/main" id="{FDC2241B-9C45-1CFA-CAD7-6CFBC0909844}"/>
+                </a:ext>
+              </a:extLst>
+            </p:cNvPr>
+            <p:cNvSpPr/>
+            <p:nvPr/>
+          </p:nvSpPr>
+          <p:spPr>
+            <a:xfrm rot="10800000">
+              <a:off x="2273419" y="3565251"/>
+              <a:ext cx="910284" cy="243116"/>
+            </a:xfrm>
+            <a:prstGeom prst="rightArrow">
+              <a:avLst/>
+            </a:prstGeom>
+            <a:solidFill>
+              <a:srgbClr val="FF6566"/>
+            </a:solidFill>
+            <a:ln w="3175" cmpd="sng">
+              <a:noFill/>
+            </a:ln>
+          </p:spPr>
+          <p:txBody>
+            <a:bodyPr rot="0" spcFirstLastPara="0" vertOverflow="overflow" horzOverflow="overflow" vert="horz" wrap="none" lIns="91440" tIns="45720" rIns="91440" bIns="45720" numCol="1" spcCol="0" rtlCol="0" fromWordArt="0" anchor="ctr" anchorCtr="0" forceAA="0" compatLnSpc="1">
+              <a:prstTxWarp prst="textNoShape">
+                <a:avLst/>
+              </a:prstTxWarp>
+              <a:noAutofit/>
+            </a:bodyPr>
+            <a:lstStyle/>
+            <a:p>
+              <a:pPr algn="ctr">
+                <a:spcBef>
+                  <a:spcPct val="0"/>
+                </a:spcBef>
+              </a:pPr>
+              <a:endParaRPr kumimoji="1" lang="ja-JP" altLang="en-US" sz="1200" dirty="0">
+                <a:solidFill>
+                  <a:schemeClr val="bg1"/>
+                </a:solidFill>
+                <a:latin typeface="Trebuchet MS" panose="020B0603020202020204" pitchFamily="34" charset="0"/>
+                <a:ea typeface="Meiryo UI" panose="020B0604030504040204" pitchFamily="50" charset="-128"/>
+              </a:endParaRPr>
+            </a:p>
+          </p:txBody>
+        </p:sp>
+        <p:sp>
+          <p:nvSpPr>
+            <p:cNvPr id="48" name="Rectangle 47">
+              <a:extLst>
+                <a:ext uri="{FF2B5EF4-FFF2-40B4-BE49-F238E27FC236}">
+                  <a16:creationId xmlns:a16="http://schemas.microsoft.com/office/drawing/2014/main" id="{E6BFA825-2430-41B1-40B7-BA78BE828138}"/>
+                </a:ext>
+              </a:extLst>
+            </p:cNvPr>
+            <p:cNvSpPr/>
+            <p:nvPr/>
+          </p:nvSpPr>
+          <p:spPr>
+            <a:xfrm>
+              <a:off x="2273418" y="3757246"/>
+              <a:ext cx="910286" cy="204555"/>
+            </a:xfrm>
+            <a:prstGeom prst="rect">
+              <a:avLst/>
+            </a:prstGeom>
+            <a:noFill/>
+            <a:ln w="3175" cmpd="sng">
+              <a:noFill/>
+            </a:ln>
+          </p:spPr>
+          <p:txBody>
+            <a:bodyPr rot="0" spcFirstLastPara="0" vertOverflow="overflow" horzOverflow="overflow" vert="horz" wrap="none" lIns="91440" tIns="45720" rIns="91440" bIns="45720" numCol="1" spcCol="0" rtlCol="0" fromWordArt="0" anchor="t" anchorCtr="0" forceAA="0" compatLnSpc="1">
+              <a:prstTxWarp prst="textNoShape">
+                <a:avLst/>
+              </a:prstTxWarp>
+              <a:noAutofit/>
+            </a:bodyPr>
+            <a:lstStyle/>
+            <a:p>
+              <a:pPr algn="ctr">
+                <a:spcBef>
+                  <a:spcPct val="0"/>
+                </a:spcBef>
+                <a:buFont typeface="Arial"/>
+                <a:buNone/>
+              </a:pPr>
+              <a:r>
+                <a:rPr lang="ja-JP" altLang="ja-JP" sz="1050" dirty="0"/>
+                <a:t>Succession / </a:t>
+              </a:r>
+              <a:br>
+                <a:rPr lang="en-US" altLang="ja-JP" sz="1050" dirty="0"/>
+              </a:br>
+              <a:r>
+                <a:rPr lang="ja-JP" altLang="ja-JP" sz="1050" dirty="0"/>
+                <a:t>Long-term </a:t>
+              </a:r>
+              <a:br>
+                <a:rPr lang="en-US" altLang="ja-JP" sz="1050" dirty="0"/>
+              </a:br>
+              <a:r>
+                <a:rPr lang="ja-JP" altLang="ja-JP" sz="1050" dirty="0"/>
+                <a:t>Management</a:t>
+              </a:r>
+              <a:endParaRPr kumimoji="1" lang="en-US" altLang="ja-JP" sz="1050" dirty="0">
+                <a:solidFill>
+                  <a:schemeClr val="tx2"/>
+                </a:solidFill>
+                <a:latin typeface="Trebuchet MS" panose="020B0603020202020204" pitchFamily="34" charset="0"/>
+                <a:ea typeface="Meiryo UI" panose="020B0604030504040204" pitchFamily="50" charset="-128"/>
+              </a:endParaRPr>
+            </a:p>
+          </p:txBody>
+        </p:sp>
+      </p:grpSp>
+      <p:pic>
+        <p:nvPicPr>
+          <p:cNvPr id="50" name="Graphic 49" descr="Building with solid fill">
+            <a:extLst>
+              <a:ext uri="{FF2B5EF4-FFF2-40B4-BE49-F238E27FC236}">
+                <a16:creationId xmlns:a16="http://schemas.microsoft.com/office/drawing/2014/main" id="{6302DA17-0BF2-B4BA-06B9-301DBD73389A}"/>
+              </a:ext>
+            </a:extLst>
+          </p:cNvPr>
+          <p:cNvPicPr>
+            <a:picLocks noChangeAspect="1"/>
+          </p:cNvPicPr>
+          <p:nvPr/>
+        </p:nvPicPr>
+        <p:blipFill>
+          <a:blip>
+            <a:extLst>
+              <a:ext uri="{96DAC541-7B7A-43D3-8B79-37D633B846F1}">
+                <asvg:svgBlip xmlns:asvg="http://schemas.microsoft.com/office/drawing/2016/SVG/main" r:embed="rId6"/>
+              </a:ext>
+            </a:extLst>
+          </a:blip>
+          <a:stretch>
+            <a:fillRect/>
+          </a:stretch>
+        </p:blipFill>
+        <p:spPr>
+          <a:xfrm>
+            <a:off x="758877" y="3040953"/>
+            <a:ext cx="1090326" cy="998140"/>
+          </a:xfrm>
+          <a:prstGeom prst="rect">
+            <a:avLst/>
+          </a:prstGeom>
+        </p:spPr>
+      </p:pic>
+      <p:pic>
+        <p:nvPicPr>
+          <p:cNvPr id="68" name="Graphic 67" descr="Office worker male with solid fill">
+            <a:extLst>
+              <a:ext uri="{FF2B5EF4-FFF2-40B4-BE49-F238E27FC236}">
+                <a16:creationId xmlns:a16="http://schemas.microsoft.com/office/drawing/2014/main" id="{E27E2DFA-8917-701E-1988-93381D879B80}"/>
+              </a:ext>
+            </a:extLst>
+          </p:cNvPr>
+          <p:cNvPicPr>
+            <a:picLocks noChangeAspect="1"/>
+          </p:cNvPicPr>
+          <p:nvPr/>
+        </p:nvPicPr>
+        <p:blipFill>
+          <a:blip>
+            <a:extLst>
+              <a:ext uri="{96DAC541-7B7A-43D3-8B79-37D633B846F1}">
+                <asvg:svgBlip xmlns:asvg="http://schemas.microsoft.com/office/drawing/2016/SVG/main" r:embed="rId7"/>
+              </a:ext>
+            </a:extLst>
+          </a:blip>
+          <a:stretch>
+            <a:fillRect/>
+          </a:stretch>
+        </p:blipFill>
+        <p:spPr>
+          <a:xfrm>
+            <a:off x="2740648" y="3040953"/>
+            <a:ext cx="902013" cy="998140"/>
+          </a:xfrm>
+          <a:prstGeom prst="rect">
+            <a:avLst/>
+          </a:prstGeom>
+        </p:spPr>
+      </p:pic>
+      <p:sp>
+        <p:nvSpPr>
+          <p:cNvPr id="44" name="Rectangle 43">
+            <a:extLst>
+              <a:ext uri="{FF2B5EF4-FFF2-40B4-BE49-F238E27FC236}">
+                <a16:creationId xmlns:a16="http://schemas.microsoft.com/office/drawing/2014/main" id="{FC3293BB-5D99-A842-2CF3-49E6F98B4F2A}"/>
+              </a:ext>
+            </a:extLst>
+          </p:cNvPr>
+          <p:cNvSpPr/>
+          <p:nvPr/>
+        </p:nvSpPr>
+        <p:spPr>
+          <a:xfrm>
+            <a:off x="4594336" y="3328602"/>
+            <a:ext cx="902013" cy="180596"/>
+          </a:xfrm>
+          <a:prstGeom prst="rect">
+            <a:avLst/>
+          </a:prstGeom>
+          <a:noFill/>
+          <a:ln w="3175" cmpd="sng">
+            <a:noFill/>
+          </a:ln>
+        </p:spPr>
+        <p:txBody>
+          <a:bodyPr rot="0" spcFirstLastPara="0" vertOverflow="overflow" horzOverflow="overflow" vert="horz" wrap="none" lIns="91440" tIns="45720" rIns="91440" bIns="45720" numCol="1" spcCol="0" rtlCol="0" fromWordArt="0" anchor="ctr" anchorCtr="0" forceAA="0" compatLnSpc="1">
+            <a:prstTxWarp prst="textNoShape">
+              <a:avLst/>
+            </a:prstTxWarp>
+            <a:noAutofit/>
+          </a:bodyPr>
+          <a:lstStyle/>
+          <a:p>
+            <a:pPr algn="ctr">
+              <a:spcBef>
+                <a:spcPct val="0"/>
+              </a:spcBef>
+              <a:buFont typeface="Arial"/>
+              <a:buNone/>
+            </a:pPr>
+            <a:r>
+              <a:rPr kumimoji="1" lang="en-US" altLang="ja-JP" sz="1050" dirty="0">
+                <a:latin typeface="Trebuchet MS" panose="020B0603020202020204" pitchFamily="34" charset="0"/>
+                <a:ea typeface="Meiryo UI" panose="020B0604030504040204" pitchFamily="50" charset="-128"/>
+              </a:rPr>
+              <a:t>Institutional</a:t>
+            </a:r>
+            <a:br>
+              <a:rPr kumimoji="1" lang="en-US" altLang="ja-JP" sz="1050" dirty="0">
+                <a:latin typeface="Trebuchet MS" panose="020B0603020202020204" pitchFamily="34" charset="0"/>
+                <a:ea typeface="Meiryo UI" panose="020B0604030504040204" pitchFamily="50" charset="-128"/>
+              </a:rPr>
+            </a:br>
+            <a:r>
+              <a:rPr kumimoji="1" lang="en-US" altLang="ja-JP" sz="1050" dirty="0">
+                <a:latin typeface="Trebuchet MS" panose="020B0603020202020204" pitchFamily="34" charset="0"/>
+                <a:ea typeface="Meiryo UI" panose="020B0604030504040204" pitchFamily="50" charset="-128"/>
+              </a:rPr>
+              <a:t>Investors</a:t>
+            </a:r>
+            <a:endParaRPr kumimoji="1" lang="ja-JP" altLang="en-US" sz="1050" dirty="0">
+              <a:latin typeface="Trebuchet MS" panose="020B0603020202020204" pitchFamily="34" charset="0"/>
+              <a:ea typeface="Meiryo UI" panose="020B0604030504040204" pitchFamily="50" charset="-128"/>
+            </a:endParaRPr>
+          </a:p>
+        </p:txBody>
+      </p:sp>
+      <p:sp>
+        <p:nvSpPr>
+          <p:cNvPr id="49" name="Rectangle 48">
+            <a:extLst>
+              <a:ext uri="{FF2B5EF4-FFF2-40B4-BE49-F238E27FC236}">
+                <a16:creationId xmlns:a16="http://schemas.microsoft.com/office/drawing/2014/main" id="{326AACCA-C8D3-AF49-1850-942CE027F6AE}"/>
+              </a:ext>
+            </a:extLst>
+          </p:cNvPr>
+          <p:cNvSpPr/>
+          <p:nvPr/>
+        </p:nvSpPr>
+        <p:spPr>
+          <a:xfrm>
+            <a:off x="4596719" y="4218523"/>
+            <a:ext cx="897246" cy="180596"/>
+          </a:xfrm>
+          <a:prstGeom prst="rect">
+            <a:avLst/>
+          </a:prstGeom>
+          <a:noFill/>
+          <a:ln w="3175" cmpd="sng">
+            <a:noFill/>
+          </a:ln>
+        </p:spPr>
+        <p:txBody>
+          <a:bodyPr rot="0" spcFirstLastPara="0" vertOverflow="overflow" horzOverflow="overflow" vert="horz" wrap="none" lIns="91440" tIns="45720" rIns="91440" bIns="45720" numCol="1" spcCol="0" rtlCol="0" fromWordArt="0" anchor="ctr" anchorCtr="0" forceAA="0" compatLnSpc="1">
+            <a:prstTxWarp prst="textNoShape">
+              <a:avLst/>
+            </a:prstTxWarp>
+            <a:noAutofit/>
+          </a:bodyPr>
+          <a:lstStyle/>
+          <a:p>
+            <a:pPr algn="ctr">
+              <a:spcBef>
+                <a:spcPct val="0"/>
+              </a:spcBef>
+              <a:buFont typeface="Arial"/>
+              <a:buNone/>
+            </a:pPr>
+            <a:r>
+              <a:rPr kumimoji="1" lang="en-US" altLang="ja-JP" sz="1050" dirty="0">
+                <a:latin typeface="Trebuchet MS" panose="020B0603020202020204" pitchFamily="34" charset="0"/>
+                <a:ea typeface="Meiryo UI" panose="020B0604030504040204" pitchFamily="50" charset="-128"/>
+              </a:rPr>
+              <a:t>Individual</a:t>
+            </a:r>
+            <a:br>
+              <a:rPr kumimoji="1" lang="en-US" altLang="ja-JP" sz="1050" dirty="0">
+                <a:latin typeface="Trebuchet MS" panose="020B0603020202020204" pitchFamily="34" charset="0"/>
+                <a:ea typeface="Meiryo UI" panose="020B0604030504040204" pitchFamily="50" charset="-128"/>
+              </a:rPr>
+            </a:br>
+            <a:r>
+              <a:rPr kumimoji="1" lang="en-US" altLang="ja-JP" sz="1050" dirty="0">
+                <a:latin typeface="Trebuchet MS" panose="020B0603020202020204" pitchFamily="34" charset="0"/>
+                <a:ea typeface="Meiryo UI" panose="020B0604030504040204" pitchFamily="50" charset="-128"/>
+              </a:rPr>
+              <a:t>Investors</a:t>
+            </a:r>
+            <a:endParaRPr kumimoji="1" lang="ja-JP" altLang="en-US" sz="1050" dirty="0">
+              <a:latin typeface="Trebuchet MS" panose="020B0603020202020204" pitchFamily="34" charset="0"/>
+              <a:ea typeface="Meiryo UI" panose="020B0604030504040204" pitchFamily="50" charset="-128"/>
+            </a:endParaRPr>
+          </a:p>
+        </p:txBody>
+      </p:sp>
+      <p:pic>
+        <p:nvPicPr>
+          <p:cNvPr id="55" name="Graphic 54" descr="Bank with solid fill">
+            <a:extLst>
+              <a:ext uri="{FF2B5EF4-FFF2-40B4-BE49-F238E27FC236}">
+                <a16:creationId xmlns:a16="http://schemas.microsoft.com/office/drawing/2014/main" id="{DF5FFDCC-78DA-B7E8-E491-509EA35BD58B}"/>
+              </a:ext>
+            </a:extLst>
+          </p:cNvPr>
+          <p:cNvPicPr>
+            <a:picLocks noChangeAspect="1"/>
+          </p:cNvPicPr>
+          <p:nvPr/>
+        </p:nvPicPr>
+        <p:blipFill>
+          <a:blip>
+            <a:extLst>
+              <a:ext uri="{96DAC541-7B7A-43D3-8B79-37D633B846F1}">
+                <asvg:svgBlip xmlns:asvg="http://schemas.microsoft.com/office/drawing/2016/SVG/main" r:embed="rId8"/>
+              </a:ext>
+            </a:extLst>
+          </a:blip>
+          <a:stretch>
+            <a:fillRect/>
+          </a:stretch>
+        </p:blipFill>
+        <p:spPr>
+          <a:xfrm>
+            <a:off x="4599104" y="2680931"/>
+            <a:ext cx="892478" cy="647001"/>
+          </a:xfrm>
+          <a:prstGeom prst="rect">
+            <a:avLst/>
+          </a:prstGeom>
+        </p:spPr>
+      </p:pic>
+      <p:pic>
+        <p:nvPicPr>
+          <p:cNvPr id="72" name="Graphic 71" descr="Users with solid fill">
+            <a:extLst>
+              <a:ext uri="{FF2B5EF4-FFF2-40B4-BE49-F238E27FC236}">
+                <a16:creationId xmlns:a16="http://schemas.microsoft.com/office/drawing/2014/main" id="{CC4F1904-8D35-3EE1-7E51-A4CEACBC3B7B}"/>
+              </a:ext>
+            </a:extLst>
+          </p:cNvPr>
+          <p:cNvPicPr>
+            <a:picLocks noChangeAspect="1"/>
+          </p:cNvPicPr>
+          <p:nvPr/>
+        </p:nvPicPr>
+        <p:blipFill>
+          <a:blip>
+            <a:extLst>
+              <a:ext uri="{96DAC541-7B7A-43D3-8B79-37D633B846F1}">
+                <asvg:svgBlip xmlns:asvg="http://schemas.microsoft.com/office/drawing/2016/SVG/main" r:embed="rId9"/>
+              </a:ext>
+            </a:extLst>
+          </a:blip>
+          <a:stretch>
+            <a:fillRect/>
+          </a:stretch>
+        </p:blipFill>
+        <p:spPr>
+          <a:xfrm>
+            <a:off x="4648153" y="3482896"/>
+            <a:ext cx="803910" cy="803248"/>
+          </a:xfrm>
+          <a:prstGeom prst="rect">
+            <a:avLst/>
+          </a:prstGeom>
+        </p:spPr>
+      </p:pic>
+      <p:sp>
+        <p:nvSpPr>
+          <p:cNvPr id="3" name="Oval 2">
+            <a:extLst>
+              <a:ext uri="{FF2B5EF4-FFF2-40B4-BE49-F238E27FC236}">
+                <a16:creationId xmlns:a16="http://schemas.microsoft.com/office/drawing/2014/main" id="{04FC4312-98CD-920A-591D-0E46EAEFF669}"/>
+              </a:ext>
+            </a:extLst>
+          </p:cNvPr>
+          <p:cNvSpPr/>
+          <p:nvPr/>
+        </p:nvSpPr>
+        <p:spPr>
+          <a:xfrm>
+            <a:off x="2646680" y="4587756"/>
+            <a:ext cx="2805383" cy="407713"/>
+          </a:xfrm>
+          <a:prstGeom prst="ellipse">
+            <a:avLst/>
+          </a:prstGeom>
+          <a:solidFill>
+            <a:schemeClr val="bg1"/>
+          </a:solidFill>
+          <a:ln w="3175" cmpd="sng">
+            <a:solidFill>
+              <a:schemeClr val="accent6">
+                <a:lumMod val="50000"/>
+              </a:schemeClr>
+            </a:solidFill>
+          </a:ln>
+        </p:spPr>
+        <p:txBody>
+          <a:bodyPr rot="0" spcFirstLastPara="0" vertOverflow="overflow" horzOverflow="overflow" vert="horz" wrap="square" lIns="0" tIns="0" rIns="0" bIns="0" numCol="1" spcCol="0" rtlCol="0" fromWordArt="0" anchor="ctr" anchorCtr="0" forceAA="0" compatLnSpc="1">
+            <a:prstTxWarp prst="textNoShape">
+              <a:avLst/>
+            </a:prstTxWarp>
+            <a:noAutofit/>
+          </a:bodyPr>
+          <a:lstStyle/>
+          <a:p>
+            <a:pPr>
+              <a:spcBef>
+                <a:spcPct val="0"/>
+              </a:spcBef>
+              <a:buFont typeface="Arial"/>
+              <a:buNone/>
+            </a:pPr>
+            <a:r>
+              <a:rPr kumimoji="1" lang="en-US" altLang="ja-JP" sz="900" dirty="0">
+                <a:latin typeface="Trebuchet MS" panose="020B0603020202020204" pitchFamily="34" charset="0"/>
+                <a:ea typeface="Meiryo UI" panose="020B0604030504040204" pitchFamily="50" charset="-128"/>
+              </a:rPr>
+              <a:t>Public co. execs, PE/VC firms, corporates (Head hunting, Legal, etc.)</a:t>
+            </a:r>
+            <a:endParaRPr kumimoji="1" lang="ja-JP" altLang="en-US" sz="900" dirty="0">
+              <a:latin typeface="Trebuchet MS" panose="020B0603020202020204" pitchFamily="34" charset="0"/>
+              <a:ea typeface="Meiryo UI" panose="020B0604030504040204" pitchFamily="50" charset="-128"/>
+            </a:endParaRPr>
+          </a:p>
+        </p:txBody>
+      </p:sp>
+      <p:cxnSp>
+        <p:nvCxnSpPr>
+          <p:cNvPr id="7" name="Straight Connector 6">
+            <a:extLst>
+              <a:ext uri="{FF2B5EF4-FFF2-40B4-BE49-F238E27FC236}">
+                <a16:creationId xmlns:a16="http://schemas.microsoft.com/office/drawing/2014/main" id="{BEBF1478-1F41-7B75-33BB-FD20402A3716}"/>
+              </a:ext>
+            </a:extLst>
+          </p:cNvPr>
+          <p:cNvCxnSpPr>
+            <a:cxnSpLocks/>
+            <a:stCxn id="3" idx="0"/>
+          </p:cNvCxnSpPr>
+          <p:nvPr/>
+        </p:nvCxnSpPr>
+        <p:spPr>
+          <a:xfrm flipV="1">
+            <a:off x="4049372" y="4440438"/>
+            <a:ext cx="675028" cy="147318"/>
+          </a:xfrm>
+          <a:prstGeom prst="line">
+            <a:avLst/>
+          </a:prstGeom>
+          <a:ln w="6350">
+            <a:solidFill>
+              <a:schemeClr val="tx1"/>
+            </a:solidFill>
+          </a:ln>
+          <a:effectLst/>
+        </p:spPr>
+        <p:style>
+          <a:lnRef idx="2">
+            <a:schemeClr val="accent1"/>
+          </a:lnRef>
+          <a:fillRef idx="0">
+            <a:schemeClr val="accent1"/>
+          </a:fillRef>
+          <a:effectRef idx="1">
+            <a:schemeClr val="accent1"/>
+          </a:effectRef>
+          <a:fontRef idx="minor">
+            <a:schemeClr val="tx1"/>
+          </a:fontRef>
+        </p:style>
+      </p:cxnSp>
+    </p:spTree>
+    <p:extLst>
+      <p:ext uri="{BB962C8B-B14F-4D97-AF65-F5344CB8AC3E}">
+        <p14:creationId xmlns:p14="http://schemas.microsoft.com/office/powerpoint/2010/main" val="2543384049"/>
+      </p:ext>
+    </p:extLst>
+  </p:cSld>
+  <p:clrMapOvr>
+    <a:masterClrMapping/>
+  </p:clrMapOvr>
+</p:sld>
+</file>
+
 <file path=ppt/tags/tag1.xml><?xml version="1.0" encoding="utf-8"?>
 <p:tagLst xmlns:a="http://schemas.openxmlformats.org/drawingml/2006/main" xmlns:r="http://schemas.openxmlformats.org/officeDocument/2006/relationships" xmlns:p="http://schemas.openxmlformats.org/presentationml/2006/main">
   <p:tag name="EE4P_STYLE_ID" val="39dcc26a-7131-49f4-a9eb-1c0521500c03"/>
@@ -5498,6 +7142,12 @@
 </file>
 
 <file path=ppt/tags/tag8.xml><?xml version="1.0" encoding="utf-8"?>
+<p:tagLst xmlns:a="http://schemas.openxmlformats.org/drawingml/2006/main" xmlns:r="http://schemas.openxmlformats.org/officeDocument/2006/relationships" xmlns:p="http://schemas.openxmlformats.org/presentationml/2006/main">
+  <p:tag name="THINKCELLSHAPEDONOTDELETE" val="thinkcellActiveDocDoNotDelete"/>
+</p:tagLst>
+</file>
+
+<file path=ppt/tags/tag9.xml><?xml version="1.0" encoding="utf-8"?>
 <p:tagLst xmlns:a="http://schemas.openxmlformats.org/drawingml/2006/main" xmlns:r="http://schemas.openxmlformats.org/officeDocument/2006/relationships" xmlns:p="http://schemas.openxmlformats.org/presentationml/2006/main">
   <p:tag name="THINKCELLSHAPEDONOTDELETE" val="thinkcellActiveDocDoNotDelete"/>
 </p:tagLst>
@@ -6197,16 +7847,12 @@
 </file>
 
 <file path=customXml/item1.xml><?xml version="1.0" encoding="utf-8"?>
-<p:properties xmlns:p="http://schemas.microsoft.com/office/2006/metadata/properties" xmlns:xsi="http://www.w3.org/2001/XMLSchema-instance" xmlns:pc="http://schemas.microsoft.com/office/infopath/2007/PartnerControls">
-  <documentManagement>
-    <TaxCatchAll xmlns="52176ee0-b196-4eee-81dc-b20517a45410" xsi:nil="true"/>
-    <_x6559__x6388__x540d_ xmlns="bebe00b0-6253-4163-a3a9-ff8e32f5841b" xsi:nil="true"/>
-    <_x5e74__x5ea6_ xmlns="bebe00b0-6253-4163-a3a9-ff8e32f5841b" xsi:nil="true"/>
-    <lcf76f155ced4ddcb4097134ff3c332f xmlns="bebe00b0-6253-4163-a3a9-ff8e32f5841b">
-      <Terms xmlns="http://schemas.microsoft.com/office/infopath/2007/PartnerControls"/>
-    </lcf76f155ced4ddcb4097134ff3c332f>
-  </documentManagement>
-</p:properties>
+<?mso-contentType ?>
+<FormTemplates xmlns="http://schemas.microsoft.com/sharepoint/v3/contenttype/forms">
+  <Display>DocumentLibraryForm</Display>
+  <Edit>DocumentLibraryForm</Edit>
+  <New>DocumentLibraryForm</New>
+</FormTemplates>
 </file>
 
 <file path=customXml/item2.xml><?xml version="1.0" encoding="utf-8"?>
@@ -6465,27 +8111,22 @@
 </file>
 
 <file path=customXml/item3.xml><?xml version="1.0" encoding="utf-8"?>
-<?mso-contentType ?>
-<FormTemplates xmlns="http://schemas.microsoft.com/sharepoint/v3/contenttype/forms">
-  <Display>DocumentLibraryForm</Display>
-  <Edit>DocumentLibraryForm</Edit>
-  <New>DocumentLibraryForm</New>
-</FormTemplates>
+<p:properties xmlns:p="http://schemas.microsoft.com/office/2006/metadata/properties" xmlns:xsi="http://www.w3.org/2001/XMLSchema-instance" xmlns:pc="http://schemas.microsoft.com/office/infopath/2007/PartnerControls">
+  <documentManagement>
+    <TaxCatchAll xmlns="52176ee0-b196-4eee-81dc-b20517a45410" xsi:nil="true"/>
+    <_x6559__x6388__x540d_ xmlns="bebe00b0-6253-4163-a3a9-ff8e32f5841b" xsi:nil="true"/>
+    <_x5e74__x5ea6_ xmlns="bebe00b0-6253-4163-a3a9-ff8e32f5841b" xsi:nil="true"/>
+    <lcf76f155ced4ddcb4097134ff3c332f xmlns="bebe00b0-6253-4163-a3a9-ff8e32f5841b">
+      <Terms xmlns="http://schemas.microsoft.com/office/infopath/2007/PartnerControls"/>
+    </lcf76f155ced4ddcb4097134ff3c332f>
+  </documentManagement>
+</p:properties>
 </file>
 
 <file path=customXml/itemProps1.xml><?xml version="1.0" encoding="utf-8"?>
-<ds:datastoreItem xmlns:ds="http://schemas.openxmlformats.org/officeDocument/2006/customXml" ds:itemID="{FB5871EA-75A5-49D4-880D-C439ABCEF157}">
+<ds:datastoreItem xmlns:ds="http://schemas.openxmlformats.org/officeDocument/2006/customXml" ds:itemID="{2273376A-1569-4A1E-9453-558A6DBEF259}">
   <ds:schemaRefs>
-    <ds:schemaRef ds:uri="http://purl.org/dc/elements/1.1/"/>
-    <ds:schemaRef ds:uri="http://schemas.openxmlformats.org/package/2006/metadata/core-properties"/>
-    <ds:schemaRef ds:uri="http://purl.org/dc/dcmitype/"/>
-    <ds:schemaRef ds:uri="http://schemas.microsoft.com/office/infopath/2007/PartnerControls"/>
-    <ds:schemaRef ds:uri="http://www.w3.org/XML/1998/namespace"/>
-    <ds:schemaRef ds:uri="http://schemas.microsoft.com/office/2006/documentManagement/types"/>
-    <ds:schemaRef ds:uri="52176ee0-b196-4eee-81dc-b20517a45410"/>
-    <ds:schemaRef ds:uri="bebe00b0-6253-4163-a3a9-ff8e32f5841b"/>
-    <ds:schemaRef ds:uri="http://schemas.microsoft.com/office/2006/metadata/properties"/>
-    <ds:schemaRef ds:uri="http://purl.org/dc/terms/"/>
+    <ds:schemaRef ds:uri="http://schemas.microsoft.com/sharepoint/v3/contenttype/forms"/>
   </ds:schemaRefs>
 </ds:datastoreItem>
 </file>
@@ -6510,9 +8151,18 @@
 </file>
 
 <file path=customXml/itemProps3.xml><?xml version="1.0" encoding="utf-8"?>
-<ds:datastoreItem xmlns:ds="http://schemas.openxmlformats.org/officeDocument/2006/customXml" ds:itemID="{2273376A-1569-4A1E-9453-558A6DBEF259}">
+<ds:datastoreItem xmlns:ds="http://schemas.openxmlformats.org/officeDocument/2006/customXml" ds:itemID="{FB5871EA-75A5-49D4-880D-C439ABCEF157}">
   <ds:schemaRefs>
-    <ds:schemaRef ds:uri="http://schemas.microsoft.com/sharepoint/v3/contenttype/forms"/>
+    <ds:schemaRef ds:uri="http://purl.org/dc/elements/1.1/"/>
+    <ds:schemaRef ds:uri="http://schemas.openxmlformats.org/package/2006/metadata/core-properties"/>
+    <ds:schemaRef ds:uri="http://purl.org/dc/dcmitype/"/>
+    <ds:schemaRef ds:uri="http://schemas.microsoft.com/office/infopath/2007/PartnerControls"/>
+    <ds:schemaRef ds:uri="http://www.w3.org/XML/1998/namespace"/>
+    <ds:schemaRef ds:uri="http://schemas.microsoft.com/office/2006/documentManagement/types"/>
+    <ds:schemaRef ds:uri="52176ee0-b196-4eee-81dc-b20517a45410"/>
+    <ds:schemaRef ds:uri="bebe00b0-6253-4163-a3a9-ff8e32f5841b"/>
+    <ds:schemaRef ds:uri="http://schemas.microsoft.com/office/2006/metadata/properties"/>
+    <ds:schemaRef ds:uri="http://purl.org/dc/terms/"/>
   </ds:schemaRefs>
 </ds:datastoreItem>
 </file>
--- a/images/サーチファンドスキーム図.pptx
+++ b/images/サーチファンドスキーム図.pptx
@@ -154,7 +154,7 @@
 <file path=ppt/revisionInfo.xml><?xml version="1.0" encoding="utf-8"?>
 <p1510:revInfo xmlns:a="http://schemas.openxmlformats.org/drawingml/2006/main" xmlns:r="http://schemas.openxmlformats.org/officeDocument/2006/relationships" xmlns:p1510="http://schemas.microsoft.com/office/powerpoint/2015/10/main">
   <p1510:revLst>
-    <p1510:client id="{DF1694DE-827C-482F-A0E1-435170DEF0E4}" v="84" dt="2026-08-08T00:45:38.072"/>
+    <p1510:client id="{DF1694DE-827C-482F-A0E1-435170DEF0E4}" v="97" dt="2026-08-08T23:41:44.895"/>
   </p1510:revLst>
 </p1510:revInfo>
 </file>
@@ -164,7 +164,7 @@
   <pc:docChgLst>
     <pc:chgData name="Kazuaki Yoshikawa" userId="2a70605763630a66" providerId="LiveId" clId="{A284EDFC-03CE-46B6-B12D-149692514020}"/>
     <pc:docChg chg="undo redo custSel addSld delSld modSld sldOrd modMainMaster addSection delSection modSection modNotesMaster modHandout">
-      <pc:chgData name="Kazuaki Yoshikawa" userId="2a70605763630a66" providerId="LiveId" clId="{A284EDFC-03CE-46B6-B12D-149692514020}" dt="2026-08-08T00:46:59.633" v="15804" actId="20577"/>
+      <pc:chgData name="Kazuaki Yoshikawa" userId="2a70605763630a66" providerId="LiveId" clId="{A284EDFC-03CE-46B6-B12D-149692514020}" dt="2026-08-08T23:41:52.212" v="15827" actId="2711"/>
       <pc:docMkLst>
         <pc:docMk/>
       </pc:docMkLst>
@@ -386,7 +386,7 @@
         </pc:sldMkLst>
       </pc:sldChg>
       <pc:sldChg chg="addSp delSp modSp mod modNotes">
-        <pc:chgData name="Kazuaki Yoshikawa" userId="2a70605763630a66" providerId="LiveId" clId="{A284EDFC-03CE-46B6-B12D-149692514020}" dt="2026-08-08T00:40:53.510" v="15565" actId="478"/>
+        <pc:chgData name="Kazuaki Yoshikawa" userId="2a70605763630a66" providerId="LiveId" clId="{A284EDFC-03CE-46B6-B12D-149692514020}" dt="2026-08-08T23:41:41.244" v="15824" actId="207"/>
         <pc:sldMkLst>
           <pc:docMk/>
           <pc:sldMk cId="151999308" sldId="367"/>
@@ -416,7 +416,7 @@
           </ac:spMkLst>
         </pc:spChg>
         <pc:spChg chg="mod ord topLvl">
-          <ac:chgData name="Kazuaki Yoshikawa" userId="2a70605763630a66" providerId="LiveId" clId="{A284EDFC-03CE-46B6-B12D-149692514020}" dt="2026-08-07T07:17:22.116" v="15293" actId="12788"/>
+          <ac:chgData name="Kazuaki Yoshikawa" userId="2a70605763630a66" providerId="LiveId" clId="{A284EDFC-03CE-46B6-B12D-149692514020}" dt="2026-08-08T23:41:41.244" v="15824" actId="207"/>
           <ac:spMkLst>
             <pc:docMk/>
             <pc:sldMk cId="151999308" sldId="367"/>
@@ -424,7 +424,7 @@
           </ac:spMkLst>
         </pc:spChg>
         <pc:spChg chg="mod topLvl">
-          <ac:chgData name="Kazuaki Yoshikawa" userId="2a70605763630a66" providerId="LiveId" clId="{A284EDFC-03CE-46B6-B12D-149692514020}" dt="2026-08-07T07:17:26.843" v="15295" actId="12788"/>
+          <ac:chgData name="Kazuaki Yoshikawa" userId="2a70605763630a66" providerId="LiveId" clId="{A284EDFC-03CE-46B6-B12D-149692514020}" dt="2026-08-08T23:41:41.244" v="15824" actId="207"/>
           <ac:spMkLst>
             <pc:docMk/>
             <pc:sldMk cId="151999308" sldId="367"/>
@@ -512,7 +512,7 @@
           </ac:spMkLst>
         </pc:spChg>
         <pc:spChg chg="mod topLvl">
-          <ac:chgData name="Kazuaki Yoshikawa" userId="2a70605763630a66" providerId="LiveId" clId="{A284EDFC-03CE-46B6-B12D-149692514020}" dt="2026-08-07T07:18:05.133" v="15312" actId="165"/>
+          <ac:chgData name="Kazuaki Yoshikawa" userId="2a70605763630a66" providerId="LiveId" clId="{A284EDFC-03CE-46B6-B12D-149692514020}" dt="2026-08-08T23:39:54.721" v="15812" actId="207"/>
           <ac:spMkLst>
             <pc:docMk/>
             <pc:sldMk cId="151999308" sldId="367"/>
@@ -520,7 +520,7 @@
           </ac:spMkLst>
         </pc:spChg>
         <pc:spChg chg="mod topLvl">
-          <ac:chgData name="Kazuaki Yoshikawa" userId="2a70605763630a66" providerId="LiveId" clId="{A284EDFC-03CE-46B6-B12D-149692514020}" dt="2026-08-07T07:18:05.133" v="15312" actId="165"/>
+          <ac:chgData name="Kazuaki Yoshikawa" userId="2a70605763630a66" providerId="LiveId" clId="{A284EDFC-03CE-46B6-B12D-149692514020}" dt="2026-08-08T23:39:41.056" v="15810" actId="207"/>
           <ac:spMkLst>
             <pc:docMk/>
             <pc:sldMk cId="151999308" sldId="367"/>
@@ -528,7 +528,7 @@
           </ac:spMkLst>
         </pc:spChg>
         <pc:spChg chg="mod topLvl">
-          <ac:chgData name="Kazuaki Yoshikawa" userId="2a70605763630a66" providerId="LiveId" clId="{A284EDFC-03CE-46B6-B12D-149692514020}" dt="2026-08-07T07:18:05.133" v="15312" actId="165"/>
+          <ac:chgData name="Kazuaki Yoshikawa" userId="2a70605763630a66" providerId="LiveId" clId="{A284EDFC-03CE-46B6-B12D-149692514020}" dt="2026-08-08T23:39:46.238" v="15811" actId="165"/>
           <ac:spMkLst>
             <pc:docMk/>
             <pc:sldMk cId="151999308" sldId="367"/>
@@ -536,7 +536,7 @@
           </ac:spMkLst>
         </pc:spChg>
         <pc:spChg chg="mod topLvl">
-          <ac:chgData name="Kazuaki Yoshikawa" userId="2a70605763630a66" providerId="LiveId" clId="{A284EDFC-03CE-46B6-B12D-149692514020}" dt="2026-08-07T07:18:05.133" v="15312" actId="165"/>
+          <ac:chgData name="Kazuaki Yoshikawa" userId="2a70605763630a66" providerId="LiveId" clId="{A284EDFC-03CE-46B6-B12D-149692514020}" dt="2026-08-08T23:39:29.156" v="15809" actId="165"/>
           <ac:spMkLst>
             <pc:docMk/>
             <pc:sldMk cId="151999308" sldId="367"/>
@@ -544,7 +544,7 @@
           </ac:spMkLst>
         </pc:spChg>
         <pc:spChg chg="mod topLvl">
-          <ac:chgData name="Kazuaki Yoshikawa" userId="2a70605763630a66" providerId="LiveId" clId="{A284EDFC-03CE-46B6-B12D-149692514020}" dt="2026-08-07T07:17:59.208" v="15309" actId="12788"/>
+          <ac:chgData name="Kazuaki Yoshikawa" userId="2a70605763630a66" providerId="LiveId" clId="{A284EDFC-03CE-46B6-B12D-149692514020}" dt="2026-08-08T23:41:41.244" v="15824" actId="207"/>
           <ac:spMkLst>
             <pc:docMk/>
             <pc:sldMk cId="151999308" sldId="367"/>
@@ -552,7 +552,7 @@
           </ac:spMkLst>
         </pc:spChg>
         <pc:spChg chg="mod topLvl">
-          <ac:chgData name="Kazuaki Yoshikawa" userId="2a70605763630a66" providerId="LiveId" clId="{A284EDFC-03CE-46B6-B12D-149692514020}" dt="2026-08-07T07:18:12.005" v="15313" actId="164"/>
+          <ac:chgData name="Kazuaki Yoshikawa" userId="2a70605763630a66" providerId="LiveId" clId="{A284EDFC-03CE-46B6-B12D-149692514020}" dt="2026-08-08T23:39:26.726" v="15807" actId="165"/>
           <ac:spMkLst>
             <pc:docMk/>
             <pc:sldMk cId="151999308" sldId="367"/>
@@ -560,7 +560,7 @@
           </ac:spMkLst>
         </pc:spChg>
         <pc:spChg chg="mod topLvl">
-          <ac:chgData name="Kazuaki Yoshikawa" userId="2a70605763630a66" providerId="LiveId" clId="{A284EDFC-03CE-46B6-B12D-149692514020}" dt="2026-08-07T07:18:05.133" v="15312" actId="165"/>
+          <ac:chgData name="Kazuaki Yoshikawa" userId="2a70605763630a66" providerId="LiveId" clId="{A284EDFC-03CE-46B6-B12D-149692514020}" dt="2026-08-08T23:39:54.721" v="15812" actId="207"/>
           <ac:spMkLst>
             <pc:docMk/>
             <pc:sldMk cId="151999308" sldId="367"/>
@@ -568,7 +568,7 @@
           </ac:spMkLst>
         </pc:spChg>
         <pc:spChg chg="mod topLvl">
-          <ac:chgData name="Kazuaki Yoshikawa" userId="2a70605763630a66" providerId="LiveId" clId="{A284EDFC-03CE-46B6-B12D-149692514020}" dt="2026-08-07T07:18:05.133" v="15312" actId="165"/>
+          <ac:chgData name="Kazuaki Yoshikawa" userId="2a70605763630a66" providerId="LiveId" clId="{A284EDFC-03CE-46B6-B12D-149692514020}" dt="2026-08-08T23:39:41.056" v="15810" actId="207"/>
           <ac:spMkLst>
             <pc:docMk/>
             <pc:sldMk cId="151999308" sldId="367"/>
@@ -576,7 +576,7 @@
           </ac:spMkLst>
         </pc:spChg>
         <pc:spChg chg="mod topLvl">
-          <ac:chgData name="Kazuaki Yoshikawa" userId="2a70605763630a66" providerId="LiveId" clId="{A284EDFC-03CE-46B6-B12D-149692514020}" dt="2026-08-07T07:18:05.133" v="15312" actId="165"/>
+          <ac:chgData name="Kazuaki Yoshikawa" userId="2a70605763630a66" providerId="LiveId" clId="{A284EDFC-03CE-46B6-B12D-149692514020}" dt="2026-08-08T23:39:28.585" v="15808" actId="165"/>
           <ac:spMkLst>
             <pc:docMk/>
             <pc:sldMk cId="151999308" sldId="367"/>
@@ -584,7 +584,7 @@
           </ac:spMkLst>
         </pc:spChg>
         <pc:spChg chg="mod topLvl">
-          <ac:chgData name="Kazuaki Yoshikawa" userId="2a70605763630a66" providerId="LiveId" clId="{A284EDFC-03CE-46B6-B12D-149692514020}" dt="2026-08-07T07:18:05.133" v="15312" actId="165"/>
+          <ac:chgData name="Kazuaki Yoshikawa" userId="2a70605763630a66" providerId="LiveId" clId="{A284EDFC-03CE-46B6-B12D-149692514020}" dt="2026-08-08T23:39:28.585" v="15808" actId="165"/>
           <ac:spMkLst>
             <pc:docMk/>
             <pc:sldMk cId="151999308" sldId="367"/>
@@ -592,7 +592,7 @@
           </ac:spMkLst>
         </pc:spChg>
         <pc:spChg chg="mod topLvl">
-          <ac:chgData name="Kazuaki Yoshikawa" userId="2a70605763630a66" providerId="LiveId" clId="{A284EDFC-03CE-46B6-B12D-149692514020}" dt="2026-08-07T07:18:12.005" v="15313" actId="164"/>
+          <ac:chgData name="Kazuaki Yoshikawa" userId="2a70605763630a66" providerId="LiveId" clId="{A284EDFC-03CE-46B6-B12D-149692514020}" dt="2026-08-08T23:39:26.726" v="15807" actId="165"/>
           <ac:spMkLst>
             <pc:docMk/>
             <pc:sldMk cId="151999308" sldId="367"/>
@@ -695,8 +695,8 @@
             <ac:grpSpMk id="12" creationId="{71010DCE-F764-8F39-75F4-95F24AEFA66C}"/>
           </ac:grpSpMkLst>
         </pc:grpChg>
-        <pc:grpChg chg="add mod">
-          <ac:chgData name="Kazuaki Yoshikawa" userId="2a70605763630a66" providerId="LiveId" clId="{A284EDFC-03CE-46B6-B12D-149692514020}" dt="2026-08-07T07:16:43.273" v="15281" actId="164"/>
+        <pc:grpChg chg="add del mod topLvl">
+          <ac:chgData name="Kazuaki Yoshikawa" userId="2a70605763630a66" providerId="LiveId" clId="{A284EDFC-03CE-46B6-B12D-149692514020}" dt="2026-08-08T23:39:46.238" v="15811" actId="165"/>
           <ac:grpSpMkLst>
             <pc:docMk/>
             <pc:sldMk cId="151999308" sldId="367"/>
@@ -711,8 +711,8 @@
             <ac:grpSpMk id="14" creationId="{8888A0EA-E3FC-E764-AD09-9F7FDA856BCD}"/>
           </ac:grpSpMkLst>
         </pc:grpChg>
-        <pc:grpChg chg="add mod">
-          <ac:chgData name="Kazuaki Yoshikawa" userId="2a70605763630a66" providerId="LiveId" clId="{A284EDFC-03CE-46B6-B12D-149692514020}" dt="2026-08-07T07:18:12.005" v="15313" actId="164"/>
+        <pc:grpChg chg="add del mod">
+          <ac:chgData name="Kazuaki Yoshikawa" userId="2a70605763630a66" providerId="LiveId" clId="{A284EDFC-03CE-46B6-B12D-149692514020}" dt="2026-08-08T23:39:28.585" v="15808" actId="165"/>
           <ac:grpSpMkLst>
             <pc:docMk/>
             <pc:sldMk cId="151999308" sldId="367"/>
@@ -727,8 +727,8 @@
             <ac:grpSpMk id="16" creationId="{BE3A5E58-71D0-F38B-3761-07CF16ADFB76}"/>
           </ac:grpSpMkLst>
         </pc:grpChg>
-        <pc:grpChg chg="add mod">
-          <ac:chgData name="Kazuaki Yoshikawa" userId="2a70605763630a66" providerId="LiveId" clId="{A284EDFC-03CE-46B6-B12D-149692514020}" dt="2026-08-07T07:18:12.005" v="15313" actId="164"/>
+        <pc:grpChg chg="add del mod">
+          <ac:chgData name="Kazuaki Yoshikawa" userId="2a70605763630a66" providerId="LiveId" clId="{A284EDFC-03CE-46B6-B12D-149692514020}" dt="2026-08-08T23:39:29.156" v="15809" actId="165"/>
           <ac:grpSpMkLst>
             <pc:docMk/>
             <pc:sldMk cId="151999308" sldId="367"/>
@@ -1008,7 +1008,7 @@
         </pc:sldMkLst>
       </pc:sldChg>
       <pc:sldChg chg="addSp delSp modSp add mod">
-        <pc:chgData name="Kazuaki Yoshikawa" userId="2a70605763630a66" providerId="LiveId" clId="{A284EDFC-03CE-46B6-B12D-149692514020}" dt="2026-08-08T00:46:59.633" v="15804" actId="20577"/>
+        <pc:chgData name="Kazuaki Yoshikawa" userId="2a70605763630a66" providerId="LiveId" clId="{A284EDFC-03CE-46B6-B12D-149692514020}" dt="2026-08-08T23:41:52.212" v="15827" actId="2711"/>
         <pc:sldMkLst>
           <pc:docMk/>
           <pc:sldMk cId="2543384049" sldId="368"/>
@@ -1030,7 +1030,7 @@
           </ac:spMkLst>
         </pc:spChg>
         <pc:spChg chg="mod">
-          <ac:chgData name="Kazuaki Yoshikawa" userId="2a70605763630a66" providerId="LiveId" clId="{A284EDFC-03CE-46B6-B12D-149692514020}" dt="2026-08-08T00:43:57.374" v="15646" actId="3064"/>
+          <ac:chgData name="Kazuaki Yoshikawa" userId="2a70605763630a66" providerId="LiveId" clId="{A284EDFC-03CE-46B6-B12D-149692514020}" dt="2026-08-08T23:41:52.212" v="15827" actId="2711"/>
           <ac:spMkLst>
             <pc:docMk/>
             <pc:sldMk cId="2543384049" sldId="368"/>
@@ -1038,39 +1038,39 @@
           </ac:spMkLst>
         </pc:spChg>
         <pc:spChg chg="mod">
-          <ac:chgData name="Kazuaki Yoshikawa" userId="2a70605763630a66" providerId="LiveId" clId="{A284EDFC-03CE-46B6-B12D-149692514020}" dt="2026-08-08T00:46:59.633" v="15804" actId="20577"/>
+          <ac:chgData name="Kazuaki Yoshikawa" userId="2a70605763630a66" providerId="LiveId" clId="{A284EDFC-03CE-46B6-B12D-149692514020}" dt="2026-08-08T23:41:52.212" v="15827" actId="2711"/>
           <ac:spMkLst>
             <pc:docMk/>
             <pc:sldMk cId="2543384049" sldId="368"/>
             <ac:spMk id="9" creationId="{C06C89FC-379A-7310-C264-F919ABB324C1}"/>
           </ac:spMkLst>
         </pc:spChg>
-        <pc:spChg chg="mod">
-          <ac:chgData name="Kazuaki Yoshikawa" userId="2a70605763630a66" providerId="LiveId" clId="{A284EDFC-03CE-46B6-B12D-149692514020}" dt="2026-08-08T00:44:47.447" v="15695" actId="165"/>
+        <pc:spChg chg="mod topLvl">
+          <ac:chgData name="Kazuaki Yoshikawa" userId="2a70605763630a66" providerId="LiveId" clId="{A284EDFC-03CE-46B6-B12D-149692514020}" dt="2026-08-08T23:40:50.303" v="15823" actId="207"/>
           <ac:spMkLst>
             <pc:docMk/>
             <pc:sldMk cId="2543384049" sldId="368"/>
             <ac:spMk id="38" creationId="{39F2BD2B-BC2F-4B43-66A8-8B264EF1CF9F}"/>
           </ac:spMkLst>
         </pc:spChg>
-        <pc:spChg chg="mod">
-          <ac:chgData name="Kazuaki Yoshikawa" userId="2a70605763630a66" providerId="LiveId" clId="{A284EDFC-03CE-46B6-B12D-149692514020}" dt="2026-08-08T00:44:47.447" v="15695" actId="165"/>
+        <pc:spChg chg="mod topLvl">
+          <ac:chgData name="Kazuaki Yoshikawa" userId="2a70605763630a66" providerId="LiveId" clId="{A284EDFC-03CE-46B6-B12D-149692514020}" dt="2026-08-08T23:40:38.058" v="15821" actId="207"/>
           <ac:spMkLst>
             <pc:docMk/>
             <pc:sldMk cId="2543384049" sldId="368"/>
             <ac:spMk id="39" creationId="{5A6168D8-601B-0FE0-DE95-5BE12DFAF2FA}"/>
           </ac:spMkLst>
         </pc:spChg>
-        <pc:spChg chg="mod">
-          <ac:chgData name="Kazuaki Yoshikawa" userId="2a70605763630a66" providerId="LiveId" clId="{A284EDFC-03CE-46B6-B12D-149692514020}" dt="2026-08-08T00:45:55.339" v="15763" actId="20577"/>
+        <pc:spChg chg="mod topLvl">
+          <ac:chgData name="Kazuaki Yoshikawa" userId="2a70605763630a66" providerId="LiveId" clId="{A284EDFC-03CE-46B6-B12D-149692514020}" dt="2026-08-08T23:40:42.955" v="15822" actId="165"/>
           <ac:spMkLst>
             <pc:docMk/>
             <pc:sldMk cId="2543384049" sldId="368"/>
             <ac:spMk id="40" creationId="{A0885063-2E48-5198-C5C8-B83434BE2B57}"/>
           </ac:spMkLst>
         </pc:spChg>
-        <pc:spChg chg="mod">
-          <ac:chgData name="Kazuaki Yoshikawa" userId="2a70605763630a66" providerId="LiveId" clId="{A284EDFC-03CE-46B6-B12D-149692514020}" dt="2026-08-08T00:46:07.166" v="15785" actId="20577"/>
+        <pc:spChg chg="mod topLvl">
+          <ac:chgData name="Kazuaki Yoshikawa" userId="2a70605763630a66" providerId="LiveId" clId="{A284EDFC-03CE-46B6-B12D-149692514020}" dt="2026-08-08T23:40:23.193" v="15816" actId="165"/>
           <ac:spMkLst>
             <pc:docMk/>
             <pc:sldMk cId="2543384049" sldId="368"/>
@@ -1078,7 +1078,7 @@
           </ac:spMkLst>
         </pc:spChg>
         <pc:spChg chg="mod">
-          <ac:chgData name="Kazuaki Yoshikawa" userId="2a70605763630a66" providerId="LiveId" clId="{A284EDFC-03CE-46B6-B12D-149692514020}" dt="2026-08-08T00:43:57.374" v="15646" actId="3064"/>
+          <ac:chgData name="Kazuaki Yoshikawa" userId="2a70605763630a66" providerId="LiveId" clId="{A284EDFC-03CE-46B6-B12D-149692514020}" dt="2026-08-08T23:41:52.212" v="15827" actId="2711"/>
           <ac:spMkLst>
             <pc:docMk/>
             <pc:sldMk cId="2543384049" sldId="368"/>
@@ -1093,32 +1093,32 @@
             <ac:spMk id="44" creationId="{FC3293BB-5D99-A842-2CF3-49E6F98B4F2A}"/>
           </ac:spMkLst>
         </pc:spChg>
-        <pc:spChg chg="mod">
-          <ac:chgData name="Kazuaki Yoshikawa" userId="2a70605763630a66" providerId="LiveId" clId="{A284EDFC-03CE-46B6-B12D-149692514020}" dt="2026-08-08T00:44:47.447" v="15695" actId="165"/>
+        <pc:spChg chg="mod topLvl">
+          <ac:chgData name="Kazuaki Yoshikawa" userId="2a70605763630a66" providerId="LiveId" clId="{A284EDFC-03CE-46B6-B12D-149692514020}" dt="2026-08-08T23:40:50.303" v="15823" actId="207"/>
           <ac:spMkLst>
             <pc:docMk/>
             <pc:sldMk cId="2543384049" sldId="368"/>
             <ac:spMk id="45" creationId="{70D8C301-AF08-4E05-8623-2EC047047F93}"/>
           </ac:spMkLst>
         </pc:spChg>
-        <pc:spChg chg="mod">
-          <ac:chgData name="Kazuaki Yoshikawa" userId="2a70605763630a66" providerId="LiveId" clId="{A284EDFC-03CE-46B6-B12D-149692514020}" dt="2026-08-08T00:44:47.447" v="15695" actId="165"/>
+        <pc:spChg chg="mod topLvl">
+          <ac:chgData name="Kazuaki Yoshikawa" userId="2a70605763630a66" providerId="LiveId" clId="{A284EDFC-03CE-46B6-B12D-149692514020}" dt="2026-08-08T23:40:38.058" v="15821" actId="207"/>
           <ac:spMkLst>
             <pc:docMk/>
             <pc:sldMk cId="2543384049" sldId="368"/>
             <ac:spMk id="46" creationId="{FDC2241B-9C45-1CFA-CAD7-6CFBC0909844}"/>
           </ac:spMkLst>
         </pc:spChg>
-        <pc:spChg chg="mod">
-          <ac:chgData name="Kazuaki Yoshikawa" userId="2a70605763630a66" providerId="LiveId" clId="{A284EDFC-03CE-46B6-B12D-149692514020}" dt="2026-08-08T00:45:26.517" v="15739" actId="20577"/>
+        <pc:spChg chg="mod topLvl">
+          <ac:chgData name="Kazuaki Yoshikawa" userId="2a70605763630a66" providerId="LiveId" clId="{A284EDFC-03CE-46B6-B12D-149692514020}" dt="2026-08-08T23:40:23.193" v="15816" actId="165"/>
           <ac:spMkLst>
             <pc:docMk/>
             <pc:sldMk cId="2543384049" sldId="368"/>
             <ac:spMk id="47" creationId="{C7BDF827-2FDE-87F0-F2F6-BAF290D4915B}"/>
           </ac:spMkLst>
         </pc:spChg>
-        <pc:spChg chg="mod">
-          <ac:chgData name="Kazuaki Yoshikawa" userId="2a70605763630a66" providerId="LiveId" clId="{A284EDFC-03CE-46B6-B12D-149692514020}" dt="2026-08-08T00:45:45.678" v="15744" actId="20577"/>
+        <pc:spChg chg="mod topLvl">
+          <ac:chgData name="Kazuaki Yoshikawa" userId="2a70605763630a66" providerId="LiveId" clId="{A284EDFC-03CE-46B6-B12D-149692514020}" dt="2026-08-08T23:40:23.193" v="15816" actId="165"/>
           <ac:spMkLst>
             <pc:docMk/>
             <pc:sldMk cId="2543384049" sldId="368"/>
@@ -1133,6 +1133,22 @@
             <ac:spMk id="49" creationId="{326AACCA-C8D3-AF49-1850-942CE027F6AE}"/>
           </ac:spMkLst>
         </pc:spChg>
+        <pc:grpChg chg="del mod topLvl">
+          <ac:chgData name="Kazuaki Yoshikawa" userId="2a70605763630a66" providerId="LiveId" clId="{A284EDFC-03CE-46B6-B12D-149692514020}" dt="2026-08-08T23:40:42.955" v="15822" actId="165"/>
+          <ac:grpSpMkLst>
+            <pc:docMk/>
+            <pc:sldMk cId="2543384049" sldId="368"/>
+            <ac:grpSpMk id="13" creationId="{EBDF575E-1FAD-A2FF-1F97-07D7936155C6}"/>
+          </ac:grpSpMkLst>
+        </pc:grpChg>
+        <pc:grpChg chg="del">
+          <ac:chgData name="Kazuaki Yoshikawa" userId="2a70605763630a66" providerId="LiveId" clId="{A284EDFC-03CE-46B6-B12D-149692514020}" dt="2026-08-08T23:40:23.193" v="15816" actId="165"/>
+          <ac:grpSpMkLst>
+            <pc:docMk/>
+            <pc:sldMk cId="2543384049" sldId="368"/>
+            <ac:grpSpMk id="16" creationId="{29DABBC7-CB90-050C-7E1D-EA2E6F4237C3}"/>
+          </ac:grpSpMkLst>
+        </pc:grpChg>
         <pc:cxnChg chg="mod">
           <ac:chgData name="Kazuaki Yoshikawa" userId="2a70605763630a66" providerId="LiveId" clId="{A284EDFC-03CE-46B6-B12D-149692514020}" dt="2026-08-08T00:46:48.097" v="15803" actId="14100"/>
           <ac:cxnSpMkLst>
@@ -1370,7 +1386,7 @@
           <a:p>
             <a:fld id="{57691E93-EF64-46CC-85E2-BBB5BEDB9501}" type="datetimeFigureOut">
               <a:rPr lang="en-US" sz="800"/>
-              <a:t>8/8/2026</a:t>
+              <a:t>8/9/2026</a:t>
             </a:fld>
             <a:endParaRPr lang="en-US" sz="800"/>
           </a:p>
@@ -1746,7 +1762,7 @@
           <a:p>
             <a:fld id="{F2C7CF5F-7CF3-4DF3-838A-EE34544862CC}" type="datetimeFigureOut">
               <a:rPr lang="en-US" smtClean="0"/>
-              <a:t>8/8/2026</a:t>
+              <a:t>8/9/2026</a:t>
             </a:fld>
             <a:endParaRPr lang="en-US"/>
           </a:p>
@@ -4534,7 +4550,10 @@
             <a:avLst/>
           </a:prstGeom>
           <a:solidFill>
-            <a:srgbClr val="C43529"/>
+            <a:schemeClr val="tx2">
+              <a:lumMod val="90000"/>
+              <a:lumOff val="10000"/>
+            </a:schemeClr>
           </a:solidFill>
           <a:ln w="3175" cmpd="sng">
             <a:noFill/>
@@ -4590,7 +4609,10 @@
             <a:avLst/>
           </a:prstGeom>
           <a:solidFill>
-            <a:srgbClr val="C43529"/>
+            <a:schemeClr val="tx2">
+              <a:lumMod val="90000"/>
+              <a:lumOff val="10000"/>
+            </a:schemeClr>
           </a:solidFill>
           <a:ln w="3175" cmpd="sng">
             <a:noFill/>
@@ -4665,7 +4687,10 @@
             <a:avLst/>
           </a:prstGeom>
           <a:solidFill>
-            <a:srgbClr val="C43529"/>
+            <a:schemeClr val="tx2">
+              <a:lumMod val="90000"/>
+              <a:lumOff val="10000"/>
+            </a:schemeClr>
           </a:solidFill>
           <a:ln w="3175" cmpd="sng">
             <a:noFill/>
@@ -4719,843 +4744,771 @@
           </a:p>
         </p:txBody>
       </p:sp>
-      <p:grpSp>
-        <p:nvGrpSpPr>
-          <p:cNvPr id="18" name="Group 17">
+      <p:sp>
+        <p:nvSpPr>
+          <p:cNvPr id="38" name="Arrow: Right 37">
             <a:extLst>
               <a:ext uri="{FF2B5EF4-FFF2-40B4-BE49-F238E27FC236}">
-                <a16:creationId xmlns:a16="http://schemas.microsoft.com/office/drawing/2014/main" id="{A9F7C8B9-39DD-5F01-2BBB-FD951BD0784A}"/>
+                <a16:creationId xmlns:a16="http://schemas.microsoft.com/office/drawing/2014/main" id="{09814E7C-D9FF-6143-179A-7F63E0543950}"/>
               </a:ext>
             </a:extLst>
           </p:cNvPr>
-          <p:cNvGrpSpPr/>
+          <p:cNvSpPr/>
           <p:nvPr/>
-        </p:nvGrpSpPr>
-        <p:grpSpPr>
+        </p:nvSpPr>
+        <p:spPr>
           <a:xfrm>
-            <a:off x="758877" y="2680931"/>
-            <a:ext cx="4737472" cy="1718188"/>
-            <a:chOff x="758877" y="2706157"/>
-            <a:chExt cx="4737472" cy="1718188"/>
+            <a:off x="3794499" y="3028158"/>
+            <a:ext cx="647998" cy="243116"/>
           </a:xfrm>
-        </p:grpSpPr>
-        <p:grpSp>
-          <p:nvGrpSpPr>
-            <p:cNvPr id="16" name="Group 15">
-              <a:extLst>
-                <a:ext uri="{FF2B5EF4-FFF2-40B4-BE49-F238E27FC236}">
-                  <a16:creationId xmlns:a16="http://schemas.microsoft.com/office/drawing/2014/main" id="{C28B40FD-ECCF-B72E-432D-478B7E16AC83}"/>
-                </a:ext>
-              </a:extLst>
-            </p:cNvPr>
-            <p:cNvGrpSpPr/>
-            <p:nvPr/>
-          </p:nvGrpSpPr>
-          <p:grpSpPr>
-            <a:xfrm>
-              <a:off x="3794498" y="3053384"/>
-              <a:ext cx="648000" cy="1023734"/>
-              <a:chOff x="4617184" y="2938071"/>
-              <a:chExt cx="910800" cy="1023734"/>
-            </a:xfrm>
-          </p:grpSpPr>
-          <p:grpSp>
-            <p:nvGrpSpPr>
-              <p:cNvPr id="13" name="Group 12">
-                <a:extLst>
-                  <a:ext uri="{FF2B5EF4-FFF2-40B4-BE49-F238E27FC236}">
-                    <a16:creationId xmlns:a16="http://schemas.microsoft.com/office/drawing/2014/main" id="{3A505328-13AF-03B6-05FE-906C5F64EE39}"/>
-                  </a:ext>
-                </a:extLst>
-              </p:cNvPr>
-              <p:cNvGrpSpPr/>
-              <p:nvPr/>
-            </p:nvGrpSpPr>
-            <p:grpSpPr>
-              <a:xfrm>
-                <a:off x="4617184" y="2938071"/>
-                <a:ext cx="910798" cy="434433"/>
-                <a:chOff x="4617184" y="3436363"/>
-                <a:chExt cx="910798" cy="434433"/>
-              </a:xfrm>
-            </p:grpSpPr>
-            <p:sp>
-              <p:nvSpPr>
-                <p:cNvPr id="38" name="Arrow: Right 37">
-                  <a:extLst>
-                    <a:ext uri="{FF2B5EF4-FFF2-40B4-BE49-F238E27FC236}">
-                      <a16:creationId xmlns:a16="http://schemas.microsoft.com/office/drawing/2014/main" id="{09814E7C-D9FF-6143-179A-7F63E0543950}"/>
-                    </a:ext>
-                  </a:extLst>
-                </p:cNvPr>
-                <p:cNvSpPr/>
-                <p:nvPr/>
-              </p:nvSpPr>
-              <p:spPr>
-                <a:xfrm>
-                  <a:off x="4617185" y="3436363"/>
-                  <a:ext cx="910797" cy="243116"/>
-                </a:xfrm>
-                <a:prstGeom prst="rightArrow">
-                  <a:avLst/>
-                </a:prstGeom>
+          <a:prstGeom prst="rightArrow">
+            <a:avLst/>
+          </a:prstGeom>
+          <a:solidFill>
+            <a:schemeClr val="bg2">
+              <a:lumMod val="20000"/>
+              <a:lumOff val="80000"/>
+            </a:schemeClr>
+          </a:solidFill>
+          <a:ln w="3175" cmpd="sng">
+            <a:noFill/>
+          </a:ln>
+        </p:spPr>
+        <p:txBody>
+          <a:bodyPr rot="0" spcFirstLastPara="0" vertOverflow="overflow" horzOverflow="overflow" vert="horz" wrap="none" lIns="91440" tIns="45720" rIns="91440" bIns="45720" numCol="1" spcCol="0" rtlCol="0" fromWordArt="0" anchor="ctr" anchorCtr="0" forceAA="0" compatLnSpc="1">
+            <a:prstTxWarp prst="textNoShape">
+              <a:avLst/>
+            </a:prstTxWarp>
+            <a:noAutofit/>
+          </a:bodyPr>
+          <a:lstStyle/>
+          <a:p>
+            <a:pPr algn="ctr">
+              <a:spcBef>
+                <a:spcPct val="0"/>
+              </a:spcBef>
+            </a:pPr>
+            <a:endParaRPr kumimoji="1" lang="ja-JP" altLang="en-US" sz="1050" dirty="0">
+              <a:solidFill>
+                <a:schemeClr val="bg1"/>
+              </a:solidFill>
+              <a:latin typeface="Meiryo UI" panose="020B0604030504040204" pitchFamily="50" charset="-128"/>
+              <a:ea typeface="Meiryo UI" panose="020B0604030504040204" pitchFamily="50" charset="-128"/>
+            </a:endParaRPr>
+          </a:p>
+        </p:txBody>
+      </p:sp>
+      <p:sp>
+        <p:nvSpPr>
+          <p:cNvPr id="40" name="Rectangle 39">
+            <a:extLst>
+              <a:ext uri="{FF2B5EF4-FFF2-40B4-BE49-F238E27FC236}">
+                <a16:creationId xmlns:a16="http://schemas.microsoft.com/office/drawing/2014/main" id="{49176CB9-EBDA-8EA8-4310-00E85B9EBDE4}"/>
+              </a:ext>
+            </a:extLst>
+          </p:cNvPr>
+          <p:cNvSpPr/>
+          <p:nvPr/>
+        </p:nvSpPr>
+        <p:spPr>
+          <a:xfrm>
+            <a:off x="3794498" y="3258036"/>
+            <a:ext cx="612737" cy="204555"/>
+          </a:xfrm>
+          <a:prstGeom prst="rect">
+            <a:avLst/>
+          </a:prstGeom>
+          <a:noFill/>
+          <a:ln w="3175" cmpd="sng">
+            <a:noFill/>
+          </a:ln>
+        </p:spPr>
+        <p:txBody>
+          <a:bodyPr rot="0" spcFirstLastPara="0" vertOverflow="overflow" horzOverflow="overflow" vert="horz" wrap="none" lIns="91440" tIns="45720" rIns="91440" bIns="45720" numCol="1" spcCol="0" rtlCol="0" fromWordArt="0" anchor="t" anchorCtr="0" forceAA="0" compatLnSpc="1">
+            <a:prstTxWarp prst="textNoShape">
+              <a:avLst/>
+            </a:prstTxWarp>
+            <a:noAutofit/>
+          </a:bodyPr>
+          <a:lstStyle/>
+          <a:p>
+            <a:pPr algn="ctr">
+              <a:spcBef>
+                <a:spcPct val="0"/>
+              </a:spcBef>
+            </a:pPr>
+            <a:r>
+              <a:rPr kumimoji="1" lang="ja-JP" altLang="en-US" sz="1050" dirty="0">
                 <a:solidFill>
-                  <a:srgbClr val="FFCCCC"/>
+                  <a:schemeClr val="tx2"/>
                 </a:solidFill>
-                <a:ln w="3175" cmpd="sng">
-                  <a:noFill/>
-                </a:ln>
-              </p:spPr>
-              <p:txBody>
-                <a:bodyPr rot="0" spcFirstLastPara="0" vertOverflow="overflow" horzOverflow="overflow" vert="horz" wrap="none" lIns="91440" tIns="45720" rIns="91440" bIns="45720" numCol="1" spcCol="0" rtlCol="0" fromWordArt="0" anchor="ctr" anchorCtr="0" forceAA="0" compatLnSpc="1">
-                  <a:prstTxWarp prst="textNoShape">
-                    <a:avLst/>
-                  </a:prstTxWarp>
-                  <a:noAutofit/>
-                </a:bodyPr>
-                <a:lstStyle/>
-                <a:p>
-                  <a:pPr algn="ctr">
-                    <a:spcBef>
-                      <a:spcPct val="0"/>
-                    </a:spcBef>
-                  </a:pPr>
-                  <a:endParaRPr kumimoji="1" lang="ja-JP" altLang="en-US" sz="1050" dirty="0">
-                    <a:solidFill>
-                      <a:schemeClr val="bg1"/>
-                    </a:solidFill>
-                    <a:latin typeface="Meiryo UI" panose="020B0604030504040204" pitchFamily="50" charset="-128"/>
-                    <a:ea typeface="Meiryo UI" panose="020B0604030504040204" pitchFamily="50" charset="-128"/>
-                  </a:endParaRPr>
-                </a:p>
-              </p:txBody>
-            </p:sp>
-            <p:sp>
-              <p:nvSpPr>
-                <p:cNvPr id="40" name="Rectangle 39">
-                  <a:extLst>
-                    <a:ext uri="{FF2B5EF4-FFF2-40B4-BE49-F238E27FC236}">
-                      <a16:creationId xmlns:a16="http://schemas.microsoft.com/office/drawing/2014/main" id="{49176CB9-EBDA-8EA8-4310-00E85B9EBDE4}"/>
-                    </a:ext>
-                  </a:extLst>
-                </p:cNvPr>
-                <p:cNvSpPr/>
-                <p:nvPr/>
-              </p:nvSpPr>
-              <p:spPr>
-                <a:xfrm>
-                  <a:off x="4617184" y="3666241"/>
-                  <a:ext cx="861235" cy="204555"/>
-                </a:xfrm>
-                <a:prstGeom prst="rect">
-                  <a:avLst/>
-                </a:prstGeom>
-                <a:noFill/>
-                <a:ln w="3175" cmpd="sng">
-                  <a:noFill/>
-                </a:ln>
-              </p:spPr>
-              <p:txBody>
-                <a:bodyPr rot="0" spcFirstLastPara="0" vertOverflow="overflow" horzOverflow="overflow" vert="horz" wrap="none" lIns="91440" tIns="45720" rIns="91440" bIns="45720" numCol="1" spcCol="0" rtlCol="0" fromWordArt="0" anchor="t" anchorCtr="0" forceAA="0" compatLnSpc="1">
-                  <a:prstTxWarp prst="textNoShape">
-                    <a:avLst/>
-                  </a:prstTxWarp>
-                  <a:noAutofit/>
-                </a:bodyPr>
-                <a:lstStyle/>
-                <a:p>
-                  <a:pPr algn="ctr">
-                    <a:spcBef>
-                      <a:spcPct val="0"/>
-                    </a:spcBef>
-                  </a:pPr>
-                  <a:r>
-                    <a:rPr kumimoji="1" lang="ja-JP" altLang="en-US" sz="1050" dirty="0">
-                      <a:solidFill>
-                        <a:schemeClr val="tx2"/>
-                      </a:solidFill>
-                      <a:latin typeface="Meiryo UI" panose="020B0604030504040204" pitchFamily="50" charset="-128"/>
-                      <a:ea typeface="Meiryo UI" panose="020B0604030504040204" pitchFamily="50" charset="-128"/>
-                    </a:rPr>
-                    <a:t>経済的</a:t>
-                  </a:r>
-                  <a:br>
-                    <a:rPr kumimoji="1" lang="en-US" altLang="ja-JP" sz="1050" dirty="0">
-                      <a:solidFill>
-                        <a:schemeClr val="tx2"/>
-                      </a:solidFill>
-                      <a:latin typeface="Meiryo UI" panose="020B0604030504040204" pitchFamily="50" charset="-128"/>
-                      <a:ea typeface="Meiryo UI" panose="020B0604030504040204" pitchFamily="50" charset="-128"/>
-                    </a:rPr>
-                  </a:br>
-                  <a:r>
-                    <a:rPr kumimoji="1" lang="ja-JP" altLang="en-US" sz="1050" dirty="0">
-                      <a:solidFill>
-                        <a:schemeClr val="tx2"/>
-                      </a:solidFill>
-                      <a:latin typeface="Meiryo UI" panose="020B0604030504040204" pitchFamily="50" charset="-128"/>
-                      <a:ea typeface="Meiryo UI" panose="020B0604030504040204" pitchFamily="50" charset="-128"/>
-                    </a:rPr>
-                    <a:t>リターン</a:t>
-                  </a:r>
-                </a:p>
-              </p:txBody>
-            </p:sp>
-          </p:grpSp>
-          <p:sp>
-            <p:nvSpPr>
-              <p:cNvPr id="39" name="Arrow: Right 38">
-                <a:extLst>
-                  <a:ext uri="{FF2B5EF4-FFF2-40B4-BE49-F238E27FC236}">
-                    <a16:creationId xmlns:a16="http://schemas.microsoft.com/office/drawing/2014/main" id="{E21F5BA5-815B-291C-50D5-8682F61B7BBA}"/>
-                  </a:ext>
-                </a:extLst>
-              </p:cNvPr>
-              <p:cNvSpPr/>
-              <p:nvPr/>
-            </p:nvSpPr>
-            <p:spPr>
-              <a:xfrm rot="10800000">
-                <a:off x="4617185" y="3565251"/>
-                <a:ext cx="910797" cy="243116"/>
-              </a:xfrm>
-              <a:prstGeom prst="rightArrow">
-                <a:avLst/>
-              </a:prstGeom>
+                <a:latin typeface="Meiryo UI" panose="020B0604030504040204" pitchFamily="50" charset="-128"/>
+                <a:ea typeface="Meiryo UI" panose="020B0604030504040204" pitchFamily="50" charset="-128"/>
+              </a:rPr>
+              <a:t>経済的</a:t>
+            </a:r>
+            <a:br>
+              <a:rPr kumimoji="1" lang="en-US" altLang="ja-JP" sz="1050" dirty="0">
+                <a:solidFill>
+                  <a:schemeClr val="tx2"/>
+                </a:solidFill>
+                <a:latin typeface="Meiryo UI" panose="020B0604030504040204" pitchFamily="50" charset="-128"/>
+                <a:ea typeface="Meiryo UI" panose="020B0604030504040204" pitchFamily="50" charset="-128"/>
+              </a:rPr>
+            </a:br>
+            <a:r>
+              <a:rPr kumimoji="1" lang="ja-JP" altLang="en-US" sz="1050" dirty="0">
+                <a:solidFill>
+                  <a:schemeClr val="tx2"/>
+                </a:solidFill>
+                <a:latin typeface="Meiryo UI" panose="020B0604030504040204" pitchFamily="50" charset="-128"/>
+                <a:ea typeface="Meiryo UI" panose="020B0604030504040204" pitchFamily="50" charset="-128"/>
+              </a:rPr>
+              <a:t>リターン</a:t>
+            </a:r>
+          </a:p>
+        </p:txBody>
+      </p:sp>
+      <p:sp>
+        <p:nvSpPr>
+          <p:cNvPr id="39" name="Arrow: Right 38">
+            <a:extLst>
+              <a:ext uri="{FF2B5EF4-FFF2-40B4-BE49-F238E27FC236}">
+                <a16:creationId xmlns:a16="http://schemas.microsoft.com/office/drawing/2014/main" id="{E21F5BA5-815B-291C-50D5-8682F61B7BBA}"/>
+              </a:ext>
+            </a:extLst>
+          </p:cNvPr>
+          <p:cNvSpPr/>
+          <p:nvPr/>
+        </p:nvSpPr>
+        <p:spPr>
+          <a:xfrm rot="10800000">
+            <a:off x="3794499" y="3655338"/>
+            <a:ext cx="647998" cy="243116"/>
+          </a:xfrm>
+          <a:prstGeom prst="rightArrow">
+            <a:avLst/>
+          </a:prstGeom>
+          <a:solidFill>
+            <a:schemeClr val="bg2">
+              <a:lumMod val="60000"/>
+              <a:lumOff val="40000"/>
+            </a:schemeClr>
+          </a:solidFill>
+          <a:ln w="3175" cmpd="sng">
+            <a:noFill/>
+          </a:ln>
+        </p:spPr>
+        <p:txBody>
+          <a:bodyPr rot="0" spcFirstLastPara="0" vertOverflow="overflow" horzOverflow="overflow" vert="horz" wrap="none" lIns="91440" tIns="45720" rIns="91440" bIns="45720" numCol="1" spcCol="0" rtlCol="0" fromWordArt="0" anchor="ctr" anchorCtr="0" forceAA="0" compatLnSpc="1">
+            <a:prstTxWarp prst="textNoShape">
+              <a:avLst/>
+            </a:prstTxWarp>
+            <a:noAutofit/>
+          </a:bodyPr>
+          <a:lstStyle/>
+          <a:p>
+            <a:pPr algn="ctr">
+              <a:spcBef>
+                <a:spcPct val="0"/>
+              </a:spcBef>
+            </a:pPr>
+            <a:endParaRPr kumimoji="1" lang="ja-JP" altLang="en-US" sz="1050" dirty="0">
               <a:solidFill>
-                <a:srgbClr val="FF6566"/>
+                <a:schemeClr val="bg1"/>
               </a:solidFill>
-              <a:ln w="3175" cmpd="sng">
-                <a:noFill/>
-              </a:ln>
-            </p:spPr>
-            <p:txBody>
-              <a:bodyPr rot="0" spcFirstLastPara="0" vertOverflow="overflow" horzOverflow="overflow" vert="horz" wrap="none" lIns="91440" tIns="45720" rIns="91440" bIns="45720" numCol="1" spcCol="0" rtlCol="0" fromWordArt="0" anchor="ctr" anchorCtr="0" forceAA="0" compatLnSpc="1">
-                <a:prstTxWarp prst="textNoShape">
-                  <a:avLst/>
-                </a:prstTxWarp>
-                <a:noAutofit/>
-              </a:bodyPr>
-              <a:lstStyle/>
-              <a:p>
-                <a:pPr algn="ctr">
-                  <a:spcBef>
-                    <a:spcPct val="0"/>
-                  </a:spcBef>
-                </a:pPr>
-                <a:endParaRPr kumimoji="1" lang="ja-JP" altLang="en-US" sz="1050" dirty="0">
-                  <a:solidFill>
-                    <a:schemeClr val="bg1"/>
-                  </a:solidFill>
-                  <a:latin typeface="Meiryo UI" panose="020B0604030504040204" pitchFamily="50" charset="-128"/>
-                  <a:ea typeface="Meiryo UI" panose="020B0604030504040204" pitchFamily="50" charset="-128"/>
-                </a:endParaRPr>
-              </a:p>
-            </p:txBody>
-          </p:sp>
-          <p:sp>
-            <p:nvSpPr>
-              <p:cNvPr id="41" name="Rectangle 40">
-                <a:extLst>
-                  <a:ext uri="{FF2B5EF4-FFF2-40B4-BE49-F238E27FC236}">
-                    <a16:creationId xmlns:a16="http://schemas.microsoft.com/office/drawing/2014/main" id="{3B34FC5A-0A1D-5530-EC57-9C486026C788}"/>
-                  </a:ext>
-                </a:extLst>
-              </p:cNvPr>
-              <p:cNvSpPr/>
-              <p:nvPr/>
-            </p:nvSpPr>
-            <p:spPr>
-              <a:xfrm>
-                <a:off x="4617185" y="3757250"/>
-                <a:ext cx="910799" cy="204555"/>
-              </a:xfrm>
-              <a:prstGeom prst="rect">
-                <a:avLst/>
-              </a:prstGeom>
-              <a:noFill/>
-              <a:ln w="3175" cmpd="sng">
-                <a:noFill/>
-              </a:ln>
-            </p:spPr>
-            <p:txBody>
-              <a:bodyPr rot="0" spcFirstLastPara="0" vertOverflow="overflow" horzOverflow="overflow" vert="horz" wrap="none" lIns="91440" tIns="45720" rIns="91440" bIns="45720" numCol="1" spcCol="0" rtlCol="0" fromWordArt="0" anchor="t" anchorCtr="0" forceAA="0" compatLnSpc="1">
-                <a:prstTxWarp prst="textNoShape">
-                  <a:avLst/>
-                </a:prstTxWarp>
-                <a:noAutofit/>
-              </a:bodyPr>
-              <a:lstStyle/>
-              <a:p>
-                <a:pPr algn="ctr">
-                  <a:spcBef>
-                    <a:spcPct val="0"/>
-                  </a:spcBef>
-                </a:pPr>
-                <a:r>
-                  <a:rPr kumimoji="1" lang="ja-JP" altLang="en-US" sz="1050" dirty="0">
-                    <a:solidFill>
-                      <a:schemeClr val="tx2"/>
-                    </a:solidFill>
-                    <a:latin typeface="Meiryo UI" panose="020B0604030504040204" pitchFamily="50" charset="-128"/>
-                    <a:ea typeface="Meiryo UI" panose="020B0604030504040204" pitchFamily="50" charset="-128"/>
-                  </a:rPr>
-                  <a:t>投資</a:t>
-                </a:r>
-                <a:r>
-                  <a:rPr kumimoji="1" lang="en-US" altLang="ja-JP" sz="1050" dirty="0">
-                    <a:solidFill>
-                      <a:schemeClr val="tx2"/>
-                    </a:solidFill>
-                    <a:latin typeface="Meiryo UI" panose="020B0604030504040204" pitchFamily="50" charset="-128"/>
-                    <a:ea typeface="Meiryo UI" panose="020B0604030504040204" pitchFamily="50" charset="-128"/>
-                  </a:rPr>
-                  <a:t>/</a:t>
-                </a:r>
-                <a:br>
-                  <a:rPr kumimoji="1" lang="en-US" altLang="ja-JP" sz="1050" dirty="0">
-                    <a:solidFill>
-                      <a:schemeClr val="tx2"/>
-                    </a:solidFill>
-                    <a:latin typeface="Meiryo UI" panose="020B0604030504040204" pitchFamily="50" charset="-128"/>
-                    <a:ea typeface="Meiryo UI" panose="020B0604030504040204" pitchFamily="50" charset="-128"/>
-                  </a:rPr>
-                </a:br>
-                <a:r>
-                  <a:rPr kumimoji="1" lang="ja-JP" altLang="en-US" sz="1050" dirty="0">
-                    <a:solidFill>
-                      <a:schemeClr val="tx2"/>
-                    </a:solidFill>
-                    <a:latin typeface="Meiryo UI" panose="020B0604030504040204" pitchFamily="50" charset="-128"/>
-                    <a:ea typeface="Meiryo UI" panose="020B0604030504040204" pitchFamily="50" charset="-128"/>
-                  </a:rPr>
-                  <a:t>知見共有</a:t>
-                </a:r>
-              </a:p>
-            </p:txBody>
-          </p:sp>
-        </p:grpSp>
-        <p:grpSp>
-          <p:nvGrpSpPr>
-            <p:cNvPr id="15" name="Group 14">
-              <a:extLst>
-                <a:ext uri="{FF2B5EF4-FFF2-40B4-BE49-F238E27FC236}">
-                  <a16:creationId xmlns:a16="http://schemas.microsoft.com/office/drawing/2014/main" id="{82E94229-4714-4F17-54AB-456F173B2ABA}"/>
-                </a:ext>
-              </a:extLst>
-            </p:cNvPr>
-            <p:cNvGrpSpPr/>
-            <p:nvPr/>
-          </p:nvGrpSpPr>
-          <p:grpSpPr>
-            <a:xfrm>
-              <a:off x="1940834" y="3053384"/>
-              <a:ext cx="647954" cy="1023730"/>
-              <a:chOff x="2273417" y="2938071"/>
-              <a:chExt cx="910287" cy="1023730"/>
-            </a:xfrm>
-          </p:grpSpPr>
-          <p:sp>
-            <p:nvSpPr>
-              <p:cNvPr id="45" name="Arrow: Right 44">
-                <a:extLst>
-                  <a:ext uri="{FF2B5EF4-FFF2-40B4-BE49-F238E27FC236}">
-                    <a16:creationId xmlns:a16="http://schemas.microsoft.com/office/drawing/2014/main" id="{4A27EC41-27AC-CA04-C6C0-44A926DEE663}"/>
-                  </a:ext>
-                </a:extLst>
-              </p:cNvPr>
-              <p:cNvSpPr/>
-              <p:nvPr/>
-            </p:nvSpPr>
-            <p:spPr>
-              <a:xfrm>
-                <a:off x="2273419" y="2938071"/>
-                <a:ext cx="910284" cy="243116"/>
-              </a:xfrm>
-              <a:prstGeom prst="rightArrow">
-                <a:avLst/>
-              </a:prstGeom>
+              <a:latin typeface="Meiryo UI" panose="020B0604030504040204" pitchFamily="50" charset="-128"/>
+              <a:ea typeface="Meiryo UI" panose="020B0604030504040204" pitchFamily="50" charset="-128"/>
+            </a:endParaRPr>
+          </a:p>
+        </p:txBody>
+      </p:sp>
+      <p:sp>
+        <p:nvSpPr>
+          <p:cNvPr id="41" name="Rectangle 40">
+            <a:extLst>
+              <a:ext uri="{FF2B5EF4-FFF2-40B4-BE49-F238E27FC236}">
+                <a16:creationId xmlns:a16="http://schemas.microsoft.com/office/drawing/2014/main" id="{3B34FC5A-0A1D-5530-EC57-9C486026C788}"/>
+              </a:ext>
+            </a:extLst>
+          </p:cNvPr>
+          <p:cNvSpPr/>
+          <p:nvPr/>
+        </p:nvSpPr>
+        <p:spPr>
+          <a:xfrm>
+            <a:off x="3794499" y="3847337"/>
+            <a:ext cx="647999" cy="204555"/>
+          </a:xfrm>
+          <a:prstGeom prst="rect">
+            <a:avLst/>
+          </a:prstGeom>
+          <a:noFill/>
+          <a:ln w="3175" cmpd="sng">
+            <a:noFill/>
+          </a:ln>
+        </p:spPr>
+        <p:txBody>
+          <a:bodyPr rot="0" spcFirstLastPara="0" vertOverflow="overflow" horzOverflow="overflow" vert="horz" wrap="none" lIns="91440" tIns="45720" rIns="91440" bIns="45720" numCol="1" spcCol="0" rtlCol="0" fromWordArt="0" anchor="t" anchorCtr="0" forceAA="0" compatLnSpc="1">
+            <a:prstTxWarp prst="textNoShape">
+              <a:avLst/>
+            </a:prstTxWarp>
+            <a:noAutofit/>
+          </a:bodyPr>
+          <a:lstStyle/>
+          <a:p>
+            <a:pPr algn="ctr">
+              <a:spcBef>
+                <a:spcPct val="0"/>
+              </a:spcBef>
+            </a:pPr>
+            <a:r>
+              <a:rPr kumimoji="1" lang="ja-JP" altLang="en-US" sz="1050" dirty="0">
+                <a:solidFill>
+                  <a:schemeClr val="tx2"/>
+                </a:solidFill>
+                <a:latin typeface="Meiryo UI" panose="020B0604030504040204" pitchFamily="50" charset="-128"/>
+                <a:ea typeface="Meiryo UI" panose="020B0604030504040204" pitchFamily="50" charset="-128"/>
+              </a:rPr>
+              <a:t>投資</a:t>
+            </a:r>
+            <a:r>
+              <a:rPr kumimoji="1" lang="en-US" altLang="ja-JP" sz="1050" dirty="0">
+                <a:solidFill>
+                  <a:schemeClr val="tx2"/>
+                </a:solidFill>
+                <a:latin typeface="Meiryo UI" panose="020B0604030504040204" pitchFamily="50" charset="-128"/>
+                <a:ea typeface="Meiryo UI" panose="020B0604030504040204" pitchFamily="50" charset="-128"/>
+              </a:rPr>
+              <a:t>/</a:t>
+            </a:r>
+            <a:br>
+              <a:rPr kumimoji="1" lang="en-US" altLang="ja-JP" sz="1050" dirty="0">
+                <a:solidFill>
+                  <a:schemeClr val="tx2"/>
+                </a:solidFill>
+                <a:latin typeface="Meiryo UI" panose="020B0604030504040204" pitchFamily="50" charset="-128"/>
+                <a:ea typeface="Meiryo UI" panose="020B0604030504040204" pitchFamily="50" charset="-128"/>
+              </a:rPr>
+            </a:br>
+            <a:r>
+              <a:rPr kumimoji="1" lang="ja-JP" altLang="en-US" sz="1050" dirty="0">
+                <a:solidFill>
+                  <a:schemeClr val="tx2"/>
+                </a:solidFill>
+                <a:latin typeface="Meiryo UI" panose="020B0604030504040204" pitchFamily="50" charset="-128"/>
+                <a:ea typeface="Meiryo UI" panose="020B0604030504040204" pitchFamily="50" charset="-128"/>
+              </a:rPr>
+              <a:t>知見共有</a:t>
+            </a:r>
+          </a:p>
+        </p:txBody>
+      </p:sp>
+      <p:sp>
+        <p:nvSpPr>
+          <p:cNvPr id="45" name="Arrow: Right 44">
+            <a:extLst>
+              <a:ext uri="{FF2B5EF4-FFF2-40B4-BE49-F238E27FC236}">
+                <a16:creationId xmlns:a16="http://schemas.microsoft.com/office/drawing/2014/main" id="{4A27EC41-27AC-CA04-C6C0-44A926DEE663}"/>
+              </a:ext>
+            </a:extLst>
+          </p:cNvPr>
+          <p:cNvSpPr/>
+          <p:nvPr/>
+        </p:nvSpPr>
+        <p:spPr>
+          <a:xfrm>
+            <a:off x="1940835" y="3028158"/>
+            <a:ext cx="647952" cy="243116"/>
+          </a:xfrm>
+          <a:prstGeom prst="rightArrow">
+            <a:avLst/>
+          </a:prstGeom>
+          <a:solidFill>
+            <a:schemeClr val="bg2">
+              <a:lumMod val="20000"/>
+              <a:lumOff val="80000"/>
+            </a:schemeClr>
+          </a:solidFill>
+          <a:ln w="3175" cmpd="sng">
+            <a:noFill/>
+          </a:ln>
+        </p:spPr>
+        <p:txBody>
+          <a:bodyPr rot="0" spcFirstLastPara="0" vertOverflow="overflow" horzOverflow="overflow" vert="horz" wrap="square" lIns="91440" tIns="45720" rIns="91440" bIns="45720" numCol="1" spcCol="0" rtlCol="0" fromWordArt="0" anchor="ctr" anchorCtr="0" forceAA="0" compatLnSpc="1">
+            <a:prstTxWarp prst="textNoShape">
+              <a:avLst/>
+            </a:prstTxWarp>
+            <a:noAutofit/>
+          </a:bodyPr>
+          <a:lstStyle/>
+          <a:p>
+            <a:pPr algn="ctr">
+              <a:spcBef>
+                <a:spcPct val="0"/>
+              </a:spcBef>
+            </a:pPr>
+            <a:endParaRPr kumimoji="1" lang="ja-JP" altLang="en-US" sz="1200" dirty="0">
               <a:solidFill>
-                <a:srgbClr val="FFCCCC"/>
+                <a:schemeClr val="bg1"/>
               </a:solidFill>
-              <a:ln w="3175" cmpd="sng">
-                <a:noFill/>
-              </a:ln>
-            </p:spPr>
-            <p:txBody>
-              <a:bodyPr rot="0" spcFirstLastPara="0" vertOverflow="overflow" horzOverflow="overflow" vert="horz" wrap="square" lIns="91440" tIns="45720" rIns="91440" bIns="45720" numCol="1" spcCol="0" rtlCol="0" fromWordArt="0" anchor="ctr" anchorCtr="0" forceAA="0" compatLnSpc="1">
-                <a:prstTxWarp prst="textNoShape">
-                  <a:avLst/>
-                </a:prstTxWarp>
-                <a:noAutofit/>
-              </a:bodyPr>
-              <a:lstStyle/>
-              <a:p>
-                <a:pPr algn="ctr">
-                  <a:spcBef>
-                    <a:spcPct val="0"/>
-                  </a:spcBef>
-                </a:pPr>
-                <a:endParaRPr kumimoji="1" lang="ja-JP" altLang="en-US" sz="1200" dirty="0">
-                  <a:solidFill>
-                    <a:schemeClr val="bg1"/>
-                  </a:solidFill>
-                  <a:latin typeface="Meiryo UI" panose="020B0604030504040204" pitchFamily="50" charset="-128"/>
-                  <a:ea typeface="Meiryo UI" panose="020B0604030504040204" pitchFamily="50" charset="-128"/>
-                </a:endParaRPr>
-              </a:p>
-            </p:txBody>
-          </p:sp>
-          <p:sp>
-            <p:nvSpPr>
-              <p:cNvPr id="47" name="Rectangle 46">
-                <a:extLst>
-                  <a:ext uri="{FF2B5EF4-FFF2-40B4-BE49-F238E27FC236}">
-                    <a16:creationId xmlns:a16="http://schemas.microsoft.com/office/drawing/2014/main" id="{1EDDE7B6-9DC5-01B0-269F-4BCA6642ACB4}"/>
-                  </a:ext>
-                </a:extLst>
-              </p:cNvPr>
-              <p:cNvSpPr/>
-              <p:nvPr/>
-            </p:nvSpPr>
-            <p:spPr>
-              <a:xfrm>
-                <a:off x="2273417" y="3167949"/>
-                <a:ext cx="860749" cy="204555"/>
-              </a:xfrm>
-              <a:prstGeom prst="rect">
-                <a:avLst/>
-              </a:prstGeom>
-              <a:noFill/>
-              <a:ln w="3175" cmpd="sng">
-                <a:noFill/>
-              </a:ln>
-            </p:spPr>
-            <p:txBody>
-              <a:bodyPr rot="0" spcFirstLastPara="0" vertOverflow="overflow" horzOverflow="overflow" vert="horz" wrap="none" lIns="91440" tIns="45720" rIns="91440" bIns="45720" numCol="1" spcCol="0" rtlCol="0" fromWordArt="0" anchor="t" anchorCtr="0" forceAA="0" compatLnSpc="1">
-                <a:prstTxWarp prst="textNoShape">
-                  <a:avLst/>
-                </a:prstTxWarp>
-                <a:noAutofit/>
-              </a:bodyPr>
-              <a:lstStyle/>
-              <a:p>
-                <a:pPr algn="ctr">
-                  <a:spcBef>
-                    <a:spcPct val="0"/>
-                  </a:spcBef>
-                  <a:buFont typeface="Arial"/>
-                  <a:buNone/>
-                </a:pPr>
-                <a:r>
-                  <a:rPr kumimoji="1" lang="ja-JP" altLang="en-US" sz="1050" dirty="0">
-                    <a:solidFill>
-                      <a:schemeClr val="tx2"/>
-                    </a:solidFill>
-                    <a:latin typeface="Meiryo UI" panose="020B0604030504040204" pitchFamily="50" charset="-128"/>
-                    <a:ea typeface="Meiryo UI" panose="020B0604030504040204" pitchFamily="50" charset="-128"/>
-                  </a:rPr>
-                  <a:t>経営譲渡</a:t>
-                </a:r>
-                <a:endParaRPr kumimoji="1" lang="en-US" altLang="ja-JP" sz="1050" dirty="0">
-                  <a:solidFill>
-                    <a:schemeClr val="tx2"/>
-                  </a:solidFill>
-                  <a:latin typeface="Meiryo UI" panose="020B0604030504040204" pitchFamily="50" charset="-128"/>
-                  <a:ea typeface="Meiryo UI" panose="020B0604030504040204" pitchFamily="50" charset="-128"/>
-                </a:endParaRPr>
-              </a:p>
-            </p:txBody>
-          </p:sp>
-          <p:sp>
-            <p:nvSpPr>
-              <p:cNvPr id="46" name="Arrow: Right 45">
-                <a:extLst>
-                  <a:ext uri="{FF2B5EF4-FFF2-40B4-BE49-F238E27FC236}">
-                    <a16:creationId xmlns:a16="http://schemas.microsoft.com/office/drawing/2014/main" id="{99455373-4989-0BCA-B193-7CEAE9A88ED2}"/>
-                  </a:ext>
-                </a:extLst>
-              </p:cNvPr>
-              <p:cNvSpPr/>
-              <p:nvPr/>
-            </p:nvSpPr>
-            <p:spPr>
-              <a:xfrm rot="10800000">
-                <a:off x="2273419" y="3565251"/>
-                <a:ext cx="910284" cy="243116"/>
-              </a:xfrm>
-              <a:prstGeom prst="rightArrow">
-                <a:avLst/>
-              </a:prstGeom>
+              <a:latin typeface="Meiryo UI" panose="020B0604030504040204" pitchFamily="50" charset="-128"/>
+              <a:ea typeface="Meiryo UI" panose="020B0604030504040204" pitchFamily="50" charset="-128"/>
+            </a:endParaRPr>
+          </a:p>
+        </p:txBody>
+      </p:sp>
+      <p:sp>
+        <p:nvSpPr>
+          <p:cNvPr id="47" name="Rectangle 46">
+            <a:extLst>
+              <a:ext uri="{FF2B5EF4-FFF2-40B4-BE49-F238E27FC236}">
+                <a16:creationId xmlns:a16="http://schemas.microsoft.com/office/drawing/2014/main" id="{1EDDE7B6-9DC5-01B0-269F-4BCA6642ACB4}"/>
+              </a:ext>
+            </a:extLst>
+          </p:cNvPr>
+          <p:cNvSpPr/>
+          <p:nvPr/>
+        </p:nvSpPr>
+        <p:spPr>
+          <a:xfrm>
+            <a:off x="1940834" y="3258036"/>
+            <a:ext cx="612692" cy="204555"/>
+          </a:xfrm>
+          <a:prstGeom prst="rect">
+            <a:avLst/>
+          </a:prstGeom>
+          <a:noFill/>
+          <a:ln w="3175" cmpd="sng">
+            <a:noFill/>
+          </a:ln>
+        </p:spPr>
+        <p:txBody>
+          <a:bodyPr rot="0" spcFirstLastPara="0" vertOverflow="overflow" horzOverflow="overflow" vert="horz" wrap="none" lIns="91440" tIns="45720" rIns="91440" bIns="45720" numCol="1" spcCol="0" rtlCol="0" fromWordArt="0" anchor="t" anchorCtr="0" forceAA="0" compatLnSpc="1">
+            <a:prstTxWarp prst="textNoShape">
+              <a:avLst/>
+            </a:prstTxWarp>
+            <a:noAutofit/>
+          </a:bodyPr>
+          <a:lstStyle/>
+          <a:p>
+            <a:pPr algn="ctr">
+              <a:spcBef>
+                <a:spcPct val="0"/>
+              </a:spcBef>
+              <a:buFont typeface="Arial"/>
+              <a:buNone/>
+            </a:pPr>
+            <a:r>
+              <a:rPr kumimoji="1" lang="ja-JP" altLang="en-US" sz="1050" dirty="0">
+                <a:solidFill>
+                  <a:schemeClr val="tx2"/>
+                </a:solidFill>
+                <a:latin typeface="Meiryo UI" panose="020B0604030504040204" pitchFamily="50" charset="-128"/>
+                <a:ea typeface="Meiryo UI" panose="020B0604030504040204" pitchFamily="50" charset="-128"/>
+              </a:rPr>
+              <a:t>経営譲渡</a:t>
+            </a:r>
+            <a:endParaRPr kumimoji="1" lang="en-US" altLang="ja-JP" sz="1050" dirty="0">
               <a:solidFill>
-                <a:srgbClr val="FF6566"/>
+                <a:schemeClr val="tx2"/>
               </a:solidFill>
-              <a:ln w="3175" cmpd="sng">
-                <a:noFill/>
-              </a:ln>
-            </p:spPr>
-            <p:txBody>
-              <a:bodyPr rot="0" spcFirstLastPara="0" vertOverflow="overflow" horzOverflow="overflow" vert="horz" wrap="square" lIns="91440" tIns="45720" rIns="91440" bIns="45720" numCol="1" spcCol="0" rtlCol="0" fromWordArt="0" anchor="ctr" anchorCtr="0" forceAA="0" compatLnSpc="1">
-                <a:prstTxWarp prst="textNoShape">
-                  <a:avLst/>
-                </a:prstTxWarp>
-                <a:noAutofit/>
-              </a:bodyPr>
-              <a:lstStyle/>
-              <a:p>
-                <a:pPr algn="ctr">
-                  <a:spcBef>
-                    <a:spcPct val="0"/>
-                  </a:spcBef>
-                </a:pPr>
-                <a:endParaRPr kumimoji="1" lang="ja-JP" altLang="en-US" sz="1200" dirty="0">
-                  <a:solidFill>
-                    <a:schemeClr val="bg1"/>
-                  </a:solidFill>
-                  <a:latin typeface="Meiryo UI" panose="020B0604030504040204" pitchFamily="50" charset="-128"/>
-                  <a:ea typeface="Meiryo UI" panose="020B0604030504040204" pitchFamily="50" charset="-128"/>
-                </a:endParaRPr>
-              </a:p>
-            </p:txBody>
-          </p:sp>
-          <p:sp>
-            <p:nvSpPr>
-              <p:cNvPr id="48" name="Rectangle 47">
-                <a:extLst>
-                  <a:ext uri="{FF2B5EF4-FFF2-40B4-BE49-F238E27FC236}">
-                    <a16:creationId xmlns:a16="http://schemas.microsoft.com/office/drawing/2014/main" id="{66E8C5F7-E599-79EA-279D-CFC0A0AAB1AA}"/>
-                  </a:ext>
-                </a:extLst>
-              </p:cNvPr>
-              <p:cNvSpPr/>
-              <p:nvPr/>
-            </p:nvSpPr>
-            <p:spPr>
-              <a:xfrm>
-                <a:off x="2273418" y="3757246"/>
-                <a:ext cx="910286" cy="204555"/>
-              </a:xfrm>
-              <a:prstGeom prst="rect">
-                <a:avLst/>
-              </a:prstGeom>
-              <a:noFill/>
-              <a:ln w="3175" cmpd="sng">
-                <a:noFill/>
-              </a:ln>
-            </p:spPr>
-            <p:txBody>
-              <a:bodyPr rot="0" spcFirstLastPara="0" vertOverflow="overflow" horzOverflow="overflow" vert="horz" wrap="none" lIns="91440" tIns="45720" rIns="91440" bIns="45720" numCol="1" spcCol="0" rtlCol="0" fromWordArt="0" anchor="t" anchorCtr="0" forceAA="0" compatLnSpc="1">
-                <a:prstTxWarp prst="textNoShape">
-                  <a:avLst/>
-                </a:prstTxWarp>
-                <a:noAutofit/>
-              </a:bodyPr>
-              <a:lstStyle/>
-              <a:p>
-                <a:pPr algn="ctr">
-                  <a:spcBef>
-                    <a:spcPct val="0"/>
-                  </a:spcBef>
-                  <a:buFont typeface="Arial"/>
-                  <a:buNone/>
-                </a:pPr>
-                <a:r>
-                  <a:rPr kumimoji="1" lang="ja-JP" altLang="en-US" sz="1050" dirty="0">
-                    <a:solidFill>
-                      <a:schemeClr val="tx2"/>
-                    </a:solidFill>
-                    <a:latin typeface="Meiryo UI" panose="020B0604030504040204" pitchFamily="50" charset="-128"/>
-                    <a:ea typeface="Meiryo UI" panose="020B0604030504040204" pitchFamily="50" charset="-128"/>
-                  </a:rPr>
-                  <a:t>事業承継</a:t>
-                </a:r>
-                <a:r>
-                  <a:rPr kumimoji="1" lang="en-US" altLang="ja-JP" sz="1050" dirty="0">
-                    <a:solidFill>
-                      <a:schemeClr val="tx2"/>
-                    </a:solidFill>
-                    <a:latin typeface="Meiryo UI" panose="020B0604030504040204" pitchFamily="50" charset="-128"/>
-                    <a:ea typeface="Meiryo UI" panose="020B0604030504040204" pitchFamily="50" charset="-128"/>
-                  </a:rPr>
-                  <a:t>/</a:t>
-                </a:r>
-              </a:p>
-              <a:p>
-                <a:pPr algn="ctr">
-                  <a:spcBef>
-                    <a:spcPct val="0"/>
-                  </a:spcBef>
-                  <a:buFont typeface="Arial"/>
-                  <a:buNone/>
-                </a:pPr>
-                <a:r>
-                  <a:rPr kumimoji="1" lang="ja-JP" altLang="en-US" sz="1050" dirty="0">
-                    <a:solidFill>
-                      <a:schemeClr val="tx2"/>
-                    </a:solidFill>
-                    <a:latin typeface="Meiryo UI" panose="020B0604030504040204" pitchFamily="50" charset="-128"/>
-                    <a:ea typeface="Meiryo UI" panose="020B0604030504040204" pitchFamily="50" charset="-128"/>
-                  </a:rPr>
-                  <a:t>長期的経営</a:t>
-                </a:r>
-                <a:endParaRPr kumimoji="1" lang="en-US" altLang="ja-JP" sz="1050" dirty="0">
-                  <a:solidFill>
-                    <a:schemeClr val="tx2"/>
-                  </a:solidFill>
-                  <a:latin typeface="Meiryo UI" panose="020B0604030504040204" pitchFamily="50" charset="-128"/>
-                  <a:ea typeface="Meiryo UI" panose="020B0604030504040204" pitchFamily="50" charset="-128"/>
-                </a:endParaRPr>
-              </a:p>
-            </p:txBody>
-          </p:sp>
-        </p:grpSp>
-        <p:pic>
-          <p:nvPicPr>
-            <p:cNvPr id="50" name="Graphic 49" descr="Building with solid fill">
-              <a:extLst>
-                <a:ext uri="{FF2B5EF4-FFF2-40B4-BE49-F238E27FC236}">
-                  <a16:creationId xmlns:a16="http://schemas.microsoft.com/office/drawing/2014/main" id="{EE20E312-0128-C875-649D-D5C66DF38186}"/>
-                </a:ext>
-              </a:extLst>
-            </p:cNvPr>
-            <p:cNvPicPr>
-              <a:picLocks noChangeAspect="1"/>
-            </p:cNvPicPr>
-            <p:nvPr/>
-          </p:nvPicPr>
-          <p:blipFill>
-            <a:blip>
-              <a:extLst>
-                <a:ext uri="{96DAC541-7B7A-43D3-8B79-37D633B846F1}">
-                  <asvg:svgBlip xmlns:asvg="http://schemas.microsoft.com/office/drawing/2016/SVG/main" r:embed="rId6"/>
-                </a:ext>
-              </a:extLst>
-            </a:blip>
-            <a:stretch>
-              <a:fillRect/>
-            </a:stretch>
-          </p:blipFill>
-          <p:spPr>
-            <a:xfrm>
-              <a:off x="758877" y="3066179"/>
-              <a:ext cx="1090326" cy="998140"/>
-            </a:xfrm>
-            <a:prstGeom prst="rect">
+              <a:latin typeface="Meiryo UI" panose="020B0604030504040204" pitchFamily="50" charset="-128"/>
+              <a:ea typeface="Meiryo UI" panose="020B0604030504040204" pitchFamily="50" charset="-128"/>
+            </a:endParaRPr>
+          </a:p>
+        </p:txBody>
+      </p:sp>
+      <p:sp>
+        <p:nvSpPr>
+          <p:cNvPr id="46" name="Arrow: Right 45">
+            <a:extLst>
+              <a:ext uri="{FF2B5EF4-FFF2-40B4-BE49-F238E27FC236}">
+                <a16:creationId xmlns:a16="http://schemas.microsoft.com/office/drawing/2014/main" id="{99455373-4989-0BCA-B193-7CEAE9A88ED2}"/>
+              </a:ext>
+            </a:extLst>
+          </p:cNvPr>
+          <p:cNvSpPr/>
+          <p:nvPr/>
+        </p:nvSpPr>
+        <p:spPr>
+          <a:xfrm rot="10800000">
+            <a:off x="1940835" y="3655338"/>
+            <a:ext cx="647952" cy="243116"/>
+          </a:xfrm>
+          <a:prstGeom prst="rightArrow">
+            <a:avLst/>
+          </a:prstGeom>
+          <a:solidFill>
+            <a:schemeClr val="bg2">
+              <a:lumMod val="60000"/>
+              <a:lumOff val="40000"/>
+            </a:schemeClr>
+          </a:solidFill>
+          <a:ln w="3175" cmpd="sng">
+            <a:noFill/>
+          </a:ln>
+        </p:spPr>
+        <p:txBody>
+          <a:bodyPr rot="0" spcFirstLastPara="0" vertOverflow="overflow" horzOverflow="overflow" vert="horz" wrap="square" lIns="91440" tIns="45720" rIns="91440" bIns="45720" numCol="1" spcCol="0" rtlCol="0" fromWordArt="0" anchor="ctr" anchorCtr="0" forceAA="0" compatLnSpc="1">
+            <a:prstTxWarp prst="textNoShape">
               <a:avLst/>
-            </a:prstGeom>
-          </p:spPr>
-        </p:pic>
-        <p:pic>
-          <p:nvPicPr>
-            <p:cNvPr id="68" name="Graphic 67" descr="Office worker male with solid fill">
-              <a:extLst>
-                <a:ext uri="{FF2B5EF4-FFF2-40B4-BE49-F238E27FC236}">
-                  <a16:creationId xmlns:a16="http://schemas.microsoft.com/office/drawing/2014/main" id="{942DFBC5-A5C0-9D39-20CB-2715EFD4ACE2}"/>
-                </a:ext>
-              </a:extLst>
-            </p:cNvPr>
-            <p:cNvPicPr>
-              <a:picLocks noChangeAspect="1"/>
-            </p:cNvPicPr>
-            <p:nvPr/>
-          </p:nvPicPr>
-          <p:blipFill>
-            <a:blip>
-              <a:extLst>
-                <a:ext uri="{96DAC541-7B7A-43D3-8B79-37D633B846F1}">
-                  <asvg:svgBlip xmlns:asvg="http://schemas.microsoft.com/office/drawing/2016/SVG/main" r:embed="rId7"/>
-                </a:ext>
-              </a:extLst>
-            </a:blip>
-            <a:stretch>
-              <a:fillRect/>
-            </a:stretch>
-          </p:blipFill>
-          <p:spPr>
-            <a:xfrm>
-              <a:off x="2740648" y="3066179"/>
-              <a:ext cx="902013" cy="998140"/>
-            </a:xfrm>
-            <a:prstGeom prst="rect">
+            </a:prstTxWarp>
+            <a:noAutofit/>
+          </a:bodyPr>
+          <a:lstStyle/>
+          <a:p>
+            <a:pPr algn="ctr">
+              <a:spcBef>
+                <a:spcPct val="0"/>
+              </a:spcBef>
+            </a:pPr>
+            <a:endParaRPr kumimoji="1" lang="ja-JP" altLang="en-US" sz="1200" dirty="0">
+              <a:solidFill>
+                <a:schemeClr val="bg1"/>
+              </a:solidFill>
+              <a:latin typeface="Meiryo UI" panose="020B0604030504040204" pitchFamily="50" charset="-128"/>
+              <a:ea typeface="Meiryo UI" panose="020B0604030504040204" pitchFamily="50" charset="-128"/>
+            </a:endParaRPr>
+          </a:p>
+        </p:txBody>
+      </p:sp>
+      <p:sp>
+        <p:nvSpPr>
+          <p:cNvPr id="48" name="Rectangle 47">
+            <a:extLst>
+              <a:ext uri="{FF2B5EF4-FFF2-40B4-BE49-F238E27FC236}">
+                <a16:creationId xmlns:a16="http://schemas.microsoft.com/office/drawing/2014/main" id="{66E8C5F7-E599-79EA-279D-CFC0A0AAB1AA}"/>
+              </a:ext>
+            </a:extLst>
+          </p:cNvPr>
+          <p:cNvSpPr/>
+          <p:nvPr/>
+        </p:nvSpPr>
+        <p:spPr>
+          <a:xfrm>
+            <a:off x="1940835" y="3847333"/>
+            <a:ext cx="647953" cy="204555"/>
+          </a:xfrm>
+          <a:prstGeom prst="rect">
+            <a:avLst/>
+          </a:prstGeom>
+          <a:noFill/>
+          <a:ln w="3175" cmpd="sng">
+            <a:noFill/>
+          </a:ln>
+        </p:spPr>
+        <p:txBody>
+          <a:bodyPr rot="0" spcFirstLastPara="0" vertOverflow="overflow" horzOverflow="overflow" vert="horz" wrap="none" lIns="91440" tIns="45720" rIns="91440" bIns="45720" numCol="1" spcCol="0" rtlCol="0" fromWordArt="0" anchor="t" anchorCtr="0" forceAA="0" compatLnSpc="1">
+            <a:prstTxWarp prst="textNoShape">
               <a:avLst/>
-            </a:prstGeom>
-          </p:spPr>
-        </p:pic>
-        <p:sp>
-          <p:nvSpPr>
-            <p:cNvPr id="44" name="Rectangle 43">
-              <a:extLst>
-                <a:ext uri="{FF2B5EF4-FFF2-40B4-BE49-F238E27FC236}">
-                  <a16:creationId xmlns:a16="http://schemas.microsoft.com/office/drawing/2014/main" id="{331E20CC-BC0F-FC99-D161-4585B614330C}"/>
-                </a:ext>
-              </a:extLst>
-            </p:cNvPr>
-            <p:cNvSpPr/>
-            <p:nvPr/>
-          </p:nvSpPr>
-          <p:spPr>
-            <a:xfrm>
-              <a:off x="4594336" y="3331970"/>
-              <a:ext cx="902013" cy="180596"/>
-            </a:xfrm>
-            <a:prstGeom prst="rect">
+            </a:prstTxWarp>
+            <a:noAutofit/>
+          </a:bodyPr>
+          <a:lstStyle/>
+          <a:p>
+            <a:pPr algn="ctr">
+              <a:spcBef>
+                <a:spcPct val="0"/>
+              </a:spcBef>
+              <a:buFont typeface="Arial"/>
+              <a:buNone/>
+            </a:pPr>
+            <a:r>
+              <a:rPr kumimoji="1" lang="ja-JP" altLang="en-US" sz="1050" dirty="0">
+                <a:solidFill>
+                  <a:schemeClr val="tx2"/>
+                </a:solidFill>
+                <a:latin typeface="Meiryo UI" panose="020B0604030504040204" pitchFamily="50" charset="-128"/>
+                <a:ea typeface="Meiryo UI" panose="020B0604030504040204" pitchFamily="50" charset="-128"/>
+              </a:rPr>
+              <a:t>事業承継</a:t>
+            </a:r>
+            <a:r>
+              <a:rPr kumimoji="1" lang="en-US" altLang="ja-JP" sz="1050" dirty="0">
+                <a:solidFill>
+                  <a:schemeClr val="tx2"/>
+                </a:solidFill>
+                <a:latin typeface="Meiryo UI" panose="020B0604030504040204" pitchFamily="50" charset="-128"/>
+                <a:ea typeface="Meiryo UI" panose="020B0604030504040204" pitchFamily="50" charset="-128"/>
+              </a:rPr>
+              <a:t>/</a:t>
+            </a:r>
+          </a:p>
+          <a:p>
+            <a:pPr algn="ctr">
+              <a:spcBef>
+                <a:spcPct val="0"/>
+              </a:spcBef>
+              <a:buFont typeface="Arial"/>
+              <a:buNone/>
+            </a:pPr>
+            <a:r>
+              <a:rPr kumimoji="1" lang="ja-JP" altLang="en-US" sz="1050" dirty="0">
+                <a:solidFill>
+                  <a:schemeClr val="tx2"/>
+                </a:solidFill>
+                <a:latin typeface="Meiryo UI" panose="020B0604030504040204" pitchFamily="50" charset="-128"/>
+                <a:ea typeface="Meiryo UI" panose="020B0604030504040204" pitchFamily="50" charset="-128"/>
+              </a:rPr>
+              <a:t>長期的経営</a:t>
+            </a:r>
+            <a:endParaRPr kumimoji="1" lang="en-US" altLang="ja-JP" sz="1050" dirty="0">
+              <a:solidFill>
+                <a:schemeClr val="tx2"/>
+              </a:solidFill>
+              <a:latin typeface="Meiryo UI" panose="020B0604030504040204" pitchFamily="50" charset="-128"/>
+              <a:ea typeface="Meiryo UI" panose="020B0604030504040204" pitchFamily="50" charset="-128"/>
+            </a:endParaRPr>
+          </a:p>
+        </p:txBody>
+      </p:sp>
+      <p:pic>
+        <p:nvPicPr>
+          <p:cNvPr id="50" name="Graphic 49" descr="Building with solid fill">
+            <a:extLst>
+              <a:ext uri="{FF2B5EF4-FFF2-40B4-BE49-F238E27FC236}">
+                <a16:creationId xmlns:a16="http://schemas.microsoft.com/office/drawing/2014/main" id="{EE20E312-0128-C875-649D-D5C66DF38186}"/>
+              </a:ext>
+            </a:extLst>
+          </p:cNvPr>
+          <p:cNvPicPr>
+            <a:picLocks noChangeAspect="1"/>
+          </p:cNvPicPr>
+          <p:nvPr/>
+        </p:nvPicPr>
+        <p:blipFill>
+          <a:blip>
+            <a:extLst>
+              <a:ext uri="{96DAC541-7B7A-43D3-8B79-37D633B846F1}">
+                <asvg:svgBlip xmlns:asvg="http://schemas.microsoft.com/office/drawing/2016/SVG/main" r:embed="rId6"/>
+              </a:ext>
+            </a:extLst>
+          </a:blip>
+          <a:stretch>
+            <a:fillRect/>
+          </a:stretch>
+        </p:blipFill>
+        <p:spPr>
+          <a:xfrm>
+            <a:off x="758877" y="3040953"/>
+            <a:ext cx="1090326" cy="998140"/>
+          </a:xfrm>
+          <a:prstGeom prst="rect">
+            <a:avLst/>
+          </a:prstGeom>
+        </p:spPr>
+      </p:pic>
+      <p:pic>
+        <p:nvPicPr>
+          <p:cNvPr id="68" name="Graphic 67" descr="Office worker male with solid fill">
+            <a:extLst>
+              <a:ext uri="{FF2B5EF4-FFF2-40B4-BE49-F238E27FC236}">
+                <a16:creationId xmlns:a16="http://schemas.microsoft.com/office/drawing/2014/main" id="{942DFBC5-A5C0-9D39-20CB-2715EFD4ACE2}"/>
+              </a:ext>
+            </a:extLst>
+          </p:cNvPr>
+          <p:cNvPicPr>
+            <a:picLocks noChangeAspect="1"/>
+          </p:cNvPicPr>
+          <p:nvPr/>
+        </p:nvPicPr>
+        <p:blipFill>
+          <a:blip>
+            <a:extLst>
+              <a:ext uri="{96DAC541-7B7A-43D3-8B79-37D633B846F1}">
+                <asvg:svgBlip xmlns:asvg="http://schemas.microsoft.com/office/drawing/2016/SVG/main" r:embed="rId7"/>
+              </a:ext>
+            </a:extLst>
+          </a:blip>
+          <a:stretch>
+            <a:fillRect/>
+          </a:stretch>
+        </p:blipFill>
+        <p:spPr>
+          <a:xfrm>
+            <a:off x="2740648" y="3040953"/>
+            <a:ext cx="902013" cy="998140"/>
+          </a:xfrm>
+          <a:prstGeom prst="rect">
+            <a:avLst/>
+          </a:prstGeom>
+        </p:spPr>
+      </p:pic>
+      <p:sp>
+        <p:nvSpPr>
+          <p:cNvPr id="44" name="Rectangle 43">
+            <a:extLst>
+              <a:ext uri="{FF2B5EF4-FFF2-40B4-BE49-F238E27FC236}">
+                <a16:creationId xmlns:a16="http://schemas.microsoft.com/office/drawing/2014/main" id="{331E20CC-BC0F-FC99-D161-4585B614330C}"/>
+              </a:ext>
+            </a:extLst>
+          </p:cNvPr>
+          <p:cNvSpPr/>
+          <p:nvPr/>
+        </p:nvSpPr>
+        <p:spPr>
+          <a:xfrm>
+            <a:off x="4594336" y="3306744"/>
+            <a:ext cx="902013" cy="180596"/>
+          </a:xfrm>
+          <a:prstGeom prst="rect">
+            <a:avLst/>
+          </a:prstGeom>
+          <a:noFill/>
+          <a:ln w="3175" cmpd="sng">
+            <a:noFill/>
+          </a:ln>
+        </p:spPr>
+        <p:txBody>
+          <a:bodyPr rot="0" spcFirstLastPara="0" vertOverflow="overflow" horzOverflow="overflow" vert="horz" wrap="square" lIns="91440" tIns="45720" rIns="91440" bIns="45720" numCol="1" spcCol="0" rtlCol="0" fromWordArt="0" anchor="ctr" anchorCtr="0" forceAA="0" compatLnSpc="1">
+            <a:prstTxWarp prst="textNoShape">
               <a:avLst/>
-            </a:prstGeom>
+            </a:prstTxWarp>
+            <a:noAutofit/>
+          </a:bodyPr>
+          <a:lstStyle/>
+          <a:p>
+            <a:pPr algn="ctr">
+              <a:spcBef>
+                <a:spcPct val="0"/>
+              </a:spcBef>
+              <a:buFont typeface="Arial"/>
+              <a:buNone/>
+            </a:pPr>
+            <a:r>
+              <a:rPr kumimoji="1" lang="ja-JP" altLang="en-US" sz="1050" dirty="0">
+                <a:latin typeface="Meiryo UI" panose="020B0604030504040204" pitchFamily="50" charset="-128"/>
+                <a:ea typeface="Meiryo UI" panose="020B0604030504040204" pitchFamily="50" charset="-128"/>
+              </a:rPr>
+              <a:t>機関投資家</a:t>
+            </a:r>
+          </a:p>
+        </p:txBody>
+      </p:sp>
+      <p:sp>
+        <p:nvSpPr>
+          <p:cNvPr id="49" name="Rectangle 48">
+            <a:extLst>
+              <a:ext uri="{FF2B5EF4-FFF2-40B4-BE49-F238E27FC236}">
+                <a16:creationId xmlns:a16="http://schemas.microsoft.com/office/drawing/2014/main" id="{01C44A96-2EF5-707A-71C1-B53FC85C2DC8}"/>
+              </a:ext>
+            </a:extLst>
+          </p:cNvPr>
+          <p:cNvSpPr/>
+          <p:nvPr/>
+        </p:nvSpPr>
+        <p:spPr>
+          <a:xfrm>
+            <a:off x="4596719" y="4218523"/>
+            <a:ext cx="897246" cy="180596"/>
+          </a:xfrm>
+          <a:prstGeom prst="rect">
+            <a:avLst/>
+          </a:prstGeom>
+          <a:noFill/>
+          <a:ln w="3175" cmpd="sng">
             <a:noFill/>
-            <a:ln w="3175" cmpd="sng">
-              <a:noFill/>
-            </a:ln>
-          </p:spPr>
-          <p:txBody>
-            <a:bodyPr rot="0" spcFirstLastPara="0" vertOverflow="overflow" horzOverflow="overflow" vert="horz" wrap="square" lIns="91440" tIns="45720" rIns="91440" bIns="45720" numCol="1" spcCol="0" rtlCol="0" fromWordArt="0" anchor="ctr" anchorCtr="0" forceAA="0" compatLnSpc="1">
-              <a:prstTxWarp prst="textNoShape">
-                <a:avLst/>
-              </a:prstTxWarp>
-              <a:noAutofit/>
-            </a:bodyPr>
-            <a:lstStyle/>
-            <a:p>
-              <a:pPr algn="ctr">
-                <a:spcBef>
-                  <a:spcPct val="0"/>
-                </a:spcBef>
-                <a:buFont typeface="Arial"/>
-                <a:buNone/>
-              </a:pPr>
-              <a:r>
-                <a:rPr kumimoji="1" lang="ja-JP" altLang="en-US" sz="1050" dirty="0">
-                  <a:latin typeface="Meiryo UI" panose="020B0604030504040204" pitchFamily="50" charset="-128"/>
-                  <a:ea typeface="Meiryo UI" panose="020B0604030504040204" pitchFamily="50" charset="-128"/>
-                </a:rPr>
-                <a:t>機関投資家</a:t>
-              </a:r>
-            </a:p>
-          </p:txBody>
-        </p:sp>
-        <p:sp>
-          <p:nvSpPr>
-            <p:cNvPr id="49" name="Rectangle 48">
-              <a:extLst>
-                <a:ext uri="{FF2B5EF4-FFF2-40B4-BE49-F238E27FC236}">
-                  <a16:creationId xmlns:a16="http://schemas.microsoft.com/office/drawing/2014/main" id="{01C44A96-2EF5-707A-71C1-B53FC85C2DC8}"/>
-                </a:ext>
-              </a:extLst>
-            </p:cNvPr>
-            <p:cNvSpPr/>
-            <p:nvPr/>
-          </p:nvSpPr>
-          <p:spPr>
-            <a:xfrm>
-              <a:off x="4596719" y="4243749"/>
-              <a:ext cx="897246" cy="180596"/>
-            </a:xfrm>
-            <a:prstGeom prst="rect">
+          </a:ln>
+        </p:spPr>
+        <p:txBody>
+          <a:bodyPr rot="0" spcFirstLastPara="0" vertOverflow="overflow" horzOverflow="overflow" vert="horz" wrap="square" lIns="91440" tIns="45720" rIns="91440" bIns="45720" numCol="1" spcCol="0" rtlCol="0" fromWordArt="0" anchor="ctr" anchorCtr="0" forceAA="0" compatLnSpc="1">
+            <a:prstTxWarp prst="textNoShape">
               <a:avLst/>
-            </a:prstGeom>
-            <a:noFill/>
-            <a:ln w="3175" cmpd="sng">
-              <a:noFill/>
-            </a:ln>
-          </p:spPr>
-          <p:txBody>
-            <a:bodyPr rot="0" spcFirstLastPara="0" vertOverflow="overflow" horzOverflow="overflow" vert="horz" wrap="square" lIns="91440" tIns="45720" rIns="91440" bIns="45720" numCol="1" spcCol="0" rtlCol="0" fromWordArt="0" anchor="ctr" anchorCtr="0" forceAA="0" compatLnSpc="1">
-              <a:prstTxWarp prst="textNoShape">
-                <a:avLst/>
-              </a:prstTxWarp>
-              <a:noAutofit/>
-            </a:bodyPr>
-            <a:lstStyle/>
-            <a:p>
-              <a:pPr algn="ctr">
-                <a:spcBef>
-                  <a:spcPct val="0"/>
-                </a:spcBef>
-                <a:buFont typeface="Arial"/>
-                <a:buNone/>
-              </a:pPr>
-              <a:r>
-                <a:rPr kumimoji="1" lang="ja-JP" altLang="en-US" sz="1050" dirty="0">
-                  <a:latin typeface="Meiryo UI" panose="020B0604030504040204" pitchFamily="50" charset="-128"/>
-                  <a:ea typeface="Meiryo UI" panose="020B0604030504040204" pitchFamily="50" charset="-128"/>
-                </a:rPr>
-                <a:t>個人投資家</a:t>
-              </a:r>
-            </a:p>
-          </p:txBody>
-        </p:sp>
-        <p:pic>
-          <p:nvPicPr>
-            <p:cNvPr id="55" name="Graphic 54" descr="Bank with solid fill">
-              <a:extLst>
-                <a:ext uri="{FF2B5EF4-FFF2-40B4-BE49-F238E27FC236}">
-                  <a16:creationId xmlns:a16="http://schemas.microsoft.com/office/drawing/2014/main" id="{039F7355-7B39-F0CD-EA6F-9182A3E05CD6}"/>
-                </a:ext>
-              </a:extLst>
-            </p:cNvPr>
-            <p:cNvPicPr>
-              <a:picLocks noChangeAspect="1"/>
-            </p:cNvPicPr>
-            <p:nvPr/>
-          </p:nvPicPr>
-          <p:blipFill>
-            <a:blip>
-              <a:extLst>
-                <a:ext uri="{96DAC541-7B7A-43D3-8B79-37D633B846F1}">
-                  <asvg:svgBlip xmlns:asvg="http://schemas.microsoft.com/office/drawing/2016/SVG/main" r:embed="rId8"/>
-                </a:ext>
-              </a:extLst>
-            </a:blip>
-            <a:stretch>
-              <a:fillRect/>
-            </a:stretch>
-          </p:blipFill>
-          <p:spPr>
-            <a:xfrm>
-              <a:off x="4599104" y="2706157"/>
-              <a:ext cx="892478" cy="647001"/>
-            </a:xfrm>
-            <a:prstGeom prst="rect">
-              <a:avLst/>
-            </a:prstGeom>
-          </p:spPr>
-        </p:pic>
-        <p:pic>
-          <p:nvPicPr>
-            <p:cNvPr id="72" name="Graphic 71" descr="Users with solid fill">
-              <a:extLst>
-                <a:ext uri="{FF2B5EF4-FFF2-40B4-BE49-F238E27FC236}">
-                  <a16:creationId xmlns:a16="http://schemas.microsoft.com/office/drawing/2014/main" id="{423B2A08-72A5-FDF6-05C8-594F84A9752F}"/>
-                </a:ext>
-              </a:extLst>
-            </p:cNvPr>
-            <p:cNvPicPr>
-              <a:picLocks noChangeAspect="1"/>
-            </p:cNvPicPr>
-            <p:nvPr/>
-          </p:nvPicPr>
-          <p:blipFill>
-            <a:blip>
-              <a:extLst>
-                <a:ext uri="{96DAC541-7B7A-43D3-8B79-37D633B846F1}">
-                  <asvg:svgBlip xmlns:asvg="http://schemas.microsoft.com/office/drawing/2016/SVG/main" r:embed="rId9"/>
-                </a:ext>
-              </a:extLst>
-            </a:blip>
-            <a:stretch>
-              <a:fillRect/>
-            </a:stretch>
-          </p:blipFill>
-          <p:spPr>
-            <a:xfrm>
-              <a:off x="4648153" y="3508122"/>
-              <a:ext cx="803910" cy="803248"/>
-            </a:xfrm>
-            <a:prstGeom prst="rect">
-              <a:avLst/>
-            </a:prstGeom>
-          </p:spPr>
-        </p:pic>
-      </p:grpSp>
+            </a:prstTxWarp>
+            <a:noAutofit/>
+          </a:bodyPr>
+          <a:lstStyle/>
+          <a:p>
+            <a:pPr algn="ctr">
+              <a:spcBef>
+                <a:spcPct val="0"/>
+              </a:spcBef>
+              <a:buFont typeface="Arial"/>
+              <a:buNone/>
+            </a:pPr>
+            <a:r>
+              <a:rPr kumimoji="1" lang="ja-JP" altLang="en-US" sz="1050" dirty="0">
+                <a:latin typeface="Meiryo UI" panose="020B0604030504040204" pitchFamily="50" charset="-128"/>
+                <a:ea typeface="Meiryo UI" panose="020B0604030504040204" pitchFamily="50" charset="-128"/>
+              </a:rPr>
+              <a:t>個人投資家</a:t>
+            </a:r>
+          </a:p>
+        </p:txBody>
+      </p:sp>
+      <p:pic>
+        <p:nvPicPr>
+          <p:cNvPr id="55" name="Graphic 54" descr="Bank with solid fill">
+            <a:extLst>
+              <a:ext uri="{FF2B5EF4-FFF2-40B4-BE49-F238E27FC236}">
+                <a16:creationId xmlns:a16="http://schemas.microsoft.com/office/drawing/2014/main" id="{039F7355-7B39-F0CD-EA6F-9182A3E05CD6}"/>
+              </a:ext>
+            </a:extLst>
+          </p:cNvPr>
+          <p:cNvPicPr>
+            <a:picLocks noChangeAspect="1"/>
+          </p:cNvPicPr>
+          <p:nvPr/>
+        </p:nvPicPr>
+        <p:blipFill>
+          <a:blip>
+            <a:extLst>
+              <a:ext uri="{96DAC541-7B7A-43D3-8B79-37D633B846F1}">
+                <asvg:svgBlip xmlns:asvg="http://schemas.microsoft.com/office/drawing/2016/SVG/main" r:embed="rId8"/>
+              </a:ext>
+            </a:extLst>
+          </a:blip>
+          <a:stretch>
+            <a:fillRect/>
+          </a:stretch>
+        </p:blipFill>
+        <p:spPr>
+          <a:xfrm>
+            <a:off x="4599104" y="2680931"/>
+            <a:ext cx="892478" cy="647001"/>
+          </a:xfrm>
+          <a:prstGeom prst="rect">
+            <a:avLst/>
+          </a:prstGeom>
+        </p:spPr>
+      </p:pic>
+      <p:pic>
+        <p:nvPicPr>
+          <p:cNvPr id="72" name="Graphic 71" descr="Users with solid fill">
+            <a:extLst>
+              <a:ext uri="{FF2B5EF4-FFF2-40B4-BE49-F238E27FC236}">
+                <a16:creationId xmlns:a16="http://schemas.microsoft.com/office/drawing/2014/main" id="{423B2A08-72A5-FDF6-05C8-594F84A9752F}"/>
+              </a:ext>
+            </a:extLst>
+          </p:cNvPr>
+          <p:cNvPicPr>
+            <a:picLocks noChangeAspect="1"/>
+          </p:cNvPicPr>
+          <p:nvPr/>
+        </p:nvPicPr>
+        <p:blipFill>
+          <a:blip>
+            <a:extLst>
+              <a:ext uri="{96DAC541-7B7A-43D3-8B79-37D633B846F1}">
+                <asvg:svgBlip xmlns:asvg="http://schemas.microsoft.com/office/drawing/2016/SVG/main" r:embed="rId9"/>
+              </a:ext>
+            </a:extLst>
+          </a:blip>
+          <a:stretch>
+            <a:fillRect/>
+          </a:stretch>
+        </p:blipFill>
+        <p:spPr>
+          <a:xfrm>
+            <a:off x="4648153" y="3482896"/>
+            <a:ext cx="803910" cy="803248"/>
+          </a:xfrm>
+          <a:prstGeom prst="rect">
+            <a:avLst/>
+          </a:prstGeom>
+        </p:spPr>
+      </p:pic>
       <p:sp>
         <p:nvSpPr>
           <p:cNvPr id="3" name="Oval 2">
@@ -5923,7 +5876,241 @@
             <a:avLst/>
           </a:prstGeom>
           <a:solidFill>
-            <a:srgbClr val="C43529"/>
+            <a:schemeClr val="tx2">
+              <a:lumMod val="90000"/>
+              <a:lumOff val="10000"/>
+            </a:schemeClr>
+          </a:solidFill>
+          <a:ln w="3175" cmpd="sng">
+            <a:noFill/>
+          </a:ln>
+        </p:spPr>
+        <p:txBody>
+          <a:bodyPr rot="0" spcFirstLastPara="0" vertOverflow="overflow" horzOverflow="overflow" vert="horz" wrap="square" lIns="91440" tIns="45720" rIns="91440" bIns="45720" numCol="1" spcCol="0" rtlCol="0" fromWordArt="0" anchor="ctr" anchorCtr="0" forceAA="0" compatLnSpc="1">
+            <a:prstTxWarp prst="textNoShape">
+              <a:avLst/>
+            </a:prstTxWarp>
+            <a:noAutofit/>
+          </a:bodyPr>
+          <a:lstStyle/>
+          <a:p>
+            <a:pPr algn="ctr">
+              <a:spcBef>
+                <a:spcPct val="0"/>
+              </a:spcBef>
+            </a:pPr>
+            <a:r>
+              <a:rPr kumimoji="1" lang="en-US" altLang="ja-JP" sz="1200" dirty="0">
+                <a:solidFill>
+                  <a:schemeClr val="bg1"/>
+                </a:solidFill>
+                <a:latin typeface="Trebuchet MS" panose="020B0603020202020204" pitchFamily="34" charset="0"/>
+                <a:ea typeface="Meiryo UI" panose="020B0604030504040204" pitchFamily="50" charset="-128"/>
+              </a:rPr>
+              <a:t>Investors</a:t>
+            </a:r>
+            <a:endParaRPr kumimoji="1" lang="ja-JP" altLang="en-US" sz="1200" dirty="0">
+              <a:solidFill>
+                <a:schemeClr val="bg1"/>
+              </a:solidFill>
+              <a:latin typeface="Trebuchet MS" panose="020B0603020202020204" pitchFamily="34" charset="0"/>
+              <a:ea typeface="Meiryo UI" panose="020B0604030504040204" pitchFamily="50" charset="-128"/>
+            </a:endParaRPr>
+          </a:p>
+        </p:txBody>
+      </p:sp>
+      <p:sp>
+        <p:nvSpPr>
+          <p:cNvPr id="6" name="Rectangle 5">
+            <a:extLst>
+              <a:ext uri="{FF2B5EF4-FFF2-40B4-BE49-F238E27FC236}">
+                <a16:creationId xmlns:a16="http://schemas.microsoft.com/office/drawing/2014/main" id="{A3D915FA-487E-C9C4-2E06-4630EE6FBC91}"/>
+              </a:ext>
+            </a:extLst>
+          </p:cNvPr>
+          <p:cNvSpPr/>
+          <p:nvPr/>
+        </p:nvSpPr>
+        <p:spPr>
+          <a:xfrm>
+            <a:off x="2365316" y="1994550"/>
+            <a:ext cx="1652677" cy="634512"/>
+          </a:xfrm>
+          <a:prstGeom prst="rect">
+            <a:avLst/>
+          </a:prstGeom>
+          <a:solidFill>
+            <a:schemeClr val="tx2">
+              <a:lumMod val="90000"/>
+              <a:lumOff val="10000"/>
+            </a:schemeClr>
+          </a:solidFill>
+          <a:ln w="3175" cmpd="sng">
+            <a:noFill/>
+          </a:ln>
+        </p:spPr>
+        <p:txBody>
+          <a:bodyPr rot="0" spcFirstLastPara="0" vertOverflow="overflow" horzOverflow="overflow" vert="horz" wrap="square" lIns="91440" tIns="45720" rIns="91440" bIns="45720" numCol="1" spcCol="0" rtlCol="0" fromWordArt="0" anchor="ctr" anchorCtr="0" forceAA="0" compatLnSpc="1">
+            <a:prstTxWarp prst="textNoShape">
+              <a:avLst/>
+            </a:prstTxWarp>
+            <a:noAutofit/>
+          </a:bodyPr>
+          <a:lstStyle/>
+          <a:p>
+            <a:pPr algn="ctr">
+              <a:spcBef>
+                <a:spcPct val="0"/>
+              </a:spcBef>
+            </a:pPr>
+            <a:r>
+              <a:rPr kumimoji="1" lang="en-US" altLang="ja-JP" sz="1200" dirty="0">
+                <a:solidFill>
+                  <a:schemeClr val="bg1"/>
+                </a:solidFill>
+                <a:latin typeface="Trebuchet MS" panose="020B0603020202020204" pitchFamily="34" charset="0"/>
+                <a:ea typeface="Meiryo UI" panose="020B0604030504040204" pitchFamily="50" charset="-128"/>
+              </a:rPr>
+              <a:t>Searcher</a:t>
+            </a:r>
+            <a:endParaRPr kumimoji="1" lang="ja-JP" altLang="en-US" sz="1200" dirty="0">
+              <a:solidFill>
+                <a:schemeClr val="bg1"/>
+              </a:solidFill>
+              <a:latin typeface="Trebuchet MS" panose="020B0603020202020204" pitchFamily="34" charset="0"/>
+              <a:ea typeface="Meiryo UI" panose="020B0604030504040204" pitchFamily="50" charset="-128"/>
+            </a:endParaRPr>
+          </a:p>
+        </p:txBody>
+      </p:sp>
+      <p:sp>
+        <p:nvSpPr>
+          <p:cNvPr id="9" name="Rectangle 8">
+            <a:extLst>
+              <a:ext uri="{FF2B5EF4-FFF2-40B4-BE49-F238E27FC236}">
+                <a16:creationId xmlns:a16="http://schemas.microsoft.com/office/drawing/2014/main" id="{C06C89FC-379A-7310-C264-F919ABB324C1}"/>
+              </a:ext>
+            </a:extLst>
+          </p:cNvPr>
+          <p:cNvSpPr/>
+          <p:nvPr/>
+        </p:nvSpPr>
+        <p:spPr>
+          <a:xfrm>
+            <a:off x="511628" y="1989224"/>
+            <a:ext cx="1652677" cy="634512"/>
+          </a:xfrm>
+          <a:prstGeom prst="rect">
+            <a:avLst/>
+          </a:prstGeom>
+          <a:solidFill>
+            <a:schemeClr val="tx2">
+              <a:lumMod val="90000"/>
+              <a:lumOff val="10000"/>
+            </a:schemeClr>
+          </a:solidFill>
+          <a:ln w="3175" cmpd="sng">
+            <a:noFill/>
+          </a:ln>
+        </p:spPr>
+        <p:txBody>
+          <a:bodyPr rot="0" spcFirstLastPara="0" vertOverflow="overflow" horzOverflow="overflow" vert="horz" wrap="square" lIns="91440" tIns="45720" rIns="91440" bIns="45720" numCol="1" spcCol="0" rtlCol="0" fromWordArt="0" anchor="ctr" anchorCtr="0" forceAA="0" compatLnSpc="1">
+            <a:prstTxWarp prst="textNoShape">
+              <a:avLst/>
+            </a:prstTxWarp>
+            <a:noAutofit/>
+          </a:bodyPr>
+          <a:lstStyle/>
+          <a:p>
+            <a:pPr algn="ctr">
+              <a:spcBef>
+                <a:spcPct val="0"/>
+              </a:spcBef>
+            </a:pPr>
+            <a:r>
+              <a:rPr kumimoji="1" lang="pl-PL" altLang="ja-JP" sz="1200">
+                <a:solidFill>
+                  <a:schemeClr val="bg1"/>
+                </a:solidFill>
+                <a:latin typeface="Trebuchet MS" panose="020B0603020202020204" pitchFamily="34" charset="0"/>
+                <a:ea typeface="Meiryo UI" panose="020B0604030504040204" pitchFamily="50" charset="-128"/>
+              </a:rPr>
+              <a:t>Company </a:t>
+            </a:r>
+            <a:r>
+              <a:rPr kumimoji="1" lang="en-US" altLang="ja-JP" sz="1200">
+                <a:solidFill>
+                  <a:schemeClr val="bg1"/>
+                </a:solidFill>
+                <a:latin typeface="Trebuchet MS" panose="020B0603020202020204" pitchFamily="34" charset="0"/>
+                <a:ea typeface="Meiryo UI" panose="020B0604030504040204" pitchFamily="50" charset="-128"/>
+              </a:rPr>
+              <a:t>without</a:t>
+            </a:r>
+            <a:r>
+              <a:rPr kumimoji="1" lang="pl-PL" altLang="ja-JP" sz="1200">
+                <a:solidFill>
+                  <a:schemeClr val="bg1"/>
+                </a:solidFill>
+                <a:latin typeface="Trebuchet MS" panose="020B0603020202020204" pitchFamily="34" charset="0"/>
+                <a:ea typeface="Meiryo UI" panose="020B0604030504040204" pitchFamily="50" charset="-128"/>
+              </a:rPr>
+              <a:t> </a:t>
+            </a:r>
+            <a:br>
+              <a:rPr kumimoji="1" lang="en-US" altLang="ja-JP" sz="1200">
+                <a:solidFill>
+                  <a:schemeClr val="bg1"/>
+                </a:solidFill>
+                <a:latin typeface="Trebuchet MS" panose="020B0603020202020204" pitchFamily="34" charset="0"/>
+                <a:ea typeface="Meiryo UI" panose="020B0604030504040204" pitchFamily="50" charset="-128"/>
+              </a:rPr>
+            </a:br>
+            <a:r>
+              <a:rPr kumimoji="1" lang="pl-PL" altLang="ja-JP" sz="1200" dirty="0">
+                <a:solidFill>
+                  <a:schemeClr val="bg1"/>
+                </a:solidFill>
+                <a:latin typeface="Trebuchet MS" panose="020B0603020202020204" pitchFamily="34" charset="0"/>
+                <a:ea typeface="Meiryo UI" panose="020B0604030504040204" pitchFamily="50" charset="-128"/>
+              </a:rPr>
+              <a:t>Successor</a:t>
+            </a:r>
+            <a:endParaRPr kumimoji="1" lang="ja-JP" altLang="en-US" sz="1200" dirty="0">
+              <a:solidFill>
+                <a:schemeClr val="bg1"/>
+              </a:solidFill>
+              <a:latin typeface="Trebuchet MS" panose="020B0603020202020204" pitchFamily="34" charset="0"/>
+              <a:ea typeface="Meiryo UI" panose="020B0604030504040204" pitchFamily="50" charset="-128"/>
+            </a:endParaRPr>
+          </a:p>
+        </p:txBody>
+      </p:sp>
+      <p:sp>
+        <p:nvSpPr>
+          <p:cNvPr id="38" name="Arrow: Right 37">
+            <a:extLst>
+              <a:ext uri="{FF2B5EF4-FFF2-40B4-BE49-F238E27FC236}">
+                <a16:creationId xmlns:a16="http://schemas.microsoft.com/office/drawing/2014/main" id="{39F2BD2B-BC2F-4B43-66A8-8B264EF1CF9F}"/>
+              </a:ext>
+            </a:extLst>
+          </p:cNvPr>
+          <p:cNvSpPr/>
+          <p:nvPr/>
+        </p:nvSpPr>
+        <p:spPr>
+          <a:xfrm>
+            <a:off x="3794499" y="3028158"/>
+            <a:ext cx="647998" cy="243116"/>
+          </a:xfrm>
+          <a:prstGeom prst="rightArrow">
+            <a:avLst/>
+          </a:prstGeom>
+          <a:solidFill>
+            <a:schemeClr val="bg2">
+              <a:lumMod val="20000"/>
+              <a:lumOff val="80000"/>
+            </a:schemeClr>
           </a:solidFill>
           <a:ln w="3175" cmpd="sng">
             <a:noFill/>
@@ -5942,20 +6129,8 @@
               <a:spcBef>
                 <a:spcPct val="0"/>
               </a:spcBef>
-              <a:buFont typeface="Arial"/>
-              <a:buNone/>
             </a:pPr>
-            <a:r>
-              <a:rPr kumimoji="1" lang="en-US" altLang="ja-JP" sz="1200" dirty="0">
-                <a:solidFill>
-                  <a:schemeClr val="bg1"/>
-                </a:solidFill>
-                <a:latin typeface="Trebuchet MS" panose="020B0603020202020204" pitchFamily="34" charset="0"/>
-                <a:ea typeface="Meiryo UI" panose="020B0604030504040204" pitchFamily="50" charset="-128"/>
-              </a:rPr>
-              <a:t>Investors</a:t>
-            </a:r>
-            <a:endParaRPr kumimoji="1" lang="ja-JP" altLang="en-US" sz="1200" dirty="0">
+            <a:endParaRPr kumimoji="1" lang="ja-JP" altLang="en-US" sz="1050" dirty="0">
               <a:solidFill>
                 <a:schemeClr val="bg1"/>
               </a:solidFill>
@@ -5967,10 +6142,10 @@
       </p:sp>
       <p:sp>
         <p:nvSpPr>
-          <p:cNvPr id="6" name="Rectangle 5">
+          <p:cNvPr id="40" name="Rectangle 39">
             <a:extLst>
               <a:ext uri="{FF2B5EF4-FFF2-40B4-BE49-F238E27FC236}">
-                <a16:creationId xmlns:a16="http://schemas.microsoft.com/office/drawing/2014/main" id="{A3D915FA-487E-C9C4-2E06-4630EE6FBC91}"/>
+                <a16:creationId xmlns:a16="http://schemas.microsoft.com/office/drawing/2014/main" id="{A0885063-2E48-5198-C5C8-B83434BE2B57}"/>
               </a:ext>
             </a:extLst>
           </p:cNvPr>
@@ -5979,14 +6154,95 @@
         </p:nvSpPr>
         <p:spPr>
           <a:xfrm>
-            <a:off x="2365316" y="1994550"/>
-            <a:ext cx="1652677" cy="634512"/>
+            <a:off x="3794498" y="3258036"/>
+            <a:ext cx="612737" cy="204555"/>
           </a:xfrm>
           <a:prstGeom prst="rect">
             <a:avLst/>
           </a:prstGeom>
+          <a:noFill/>
+          <a:ln w="3175" cmpd="sng">
+            <a:noFill/>
+          </a:ln>
+        </p:spPr>
+        <p:txBody>
+          <a:bodyPr rot="0" spcFirstLastPara="0" vertOverflow="overflow" horzOverflow="overflow" vert="horz" wrap="none" lIns="91440" tIns="45720" rIns="91440" bIns="45720" numCol="1" spcCol="0" rtlCol="0" fromWordArt="0" anchor="t" anchorCtr="0" forceAA="0" compatLnSpc="1">
+            <a:prstTxWarp prst="textNoShape">
+              <a:avLst/>
+            </a:prstTxWarp>
+            <a:noAutofit/>
+          </a:bodyPr>
+          <a:lstStyle/>
+          <a:p>
+            <a:pPr algn="ctr">
+              <a:spcBef>
+                <a:spcPct val="0"/>
+              </a:spcBef>
+            </a:pPr>
+            <a:r>
+              <a:rPr kumimoji="1" lang="en-US" altLang="ja-JP" sz="1050" dirty="0">
+                <a:solidFill>
+                  <a:schemeClr val="tx2"/>
+                </a:solidFill>
+                <a:latin typeface="Trebuchet MS" panose="020B0603020202020204" pitchFamily="34" charset="0"/>
+                <a:ea typeface="Meiryo UI" panose="020B0604030504040204" pitchFamily="50" charset="-128"/>
+              </a:rPr>
+              <a:t>Financial</a:t>
+            </a:r>
+            <a:br>
+              <a:rPr kumimoji="1" lang="en-US" altLang="ja-JP" sz="1050" dirty="0">
+                <a:solidFill>
+                  <a:schemeClr val="tx2"/>
+                </a:solidFill>
+                <a:latin typeface="Trebuchet MS" panose="020B0603020202020204" pitchFamily="34" charset="0"/>
+                <a:ea typeface="Meiryo UI" panose="020B0604030504040204" pitchFamily="50" charset="-128"/>
+              </a:rPr>
+            </a:br>
+            <a:r>
+              <a:rPr kumimoji="1" lang="en-US" altLang="ja-JP" sz="1050" dirty="0">
+                <a:solidFill>
+                  <a:schemeClr val="tx2"/>
+                </a:solidFill>
+                <a:latin typeface="Trebuchet MS" panose="020B0603020202020204" pitchFamily="34" charset="0"/>
+                <a:ea typeface="Meiryo UI" panose="020B0604030504040204" pitchFamily="50" charset="-128"/>
+              </a:rPr>
+              <a:t>Returns</a:t>
+            </a:r>
+            <a:endParaRPr kumimoji="1" lang="ja-JP" altLang="en-US" sz="1050" dirty="0">
+              <a:solidFill>
+                <a:schemeClr val="tx2"/>
+              </a:solidFill>
+              <a:latin typeface="Trebuchet MS" panose="020B0603020202020204" pitchFamily="34" charset="0"/>
+              <a:ea typeface="Meiryo UI" panose="020B0604030504040204" pitchFamily="50" charset="-128"/>
+            </a:endParaRPr>
+          </a:p>
+        </p:txBody>
+      </p:sp>
+      <p:sp>
+        <p:nvSpPr>
+          <p:cNvPr id="39" name="Arrow: Right 38">
+            <a:extLst>
+              <a:ext uri="{FF2B5EF4-FFF2-40B4-BE49-F238E27FC236}">
+                <a16:creationId xmlns:a16="http://schemas.microsoft.com/office/drawing/2014/main" id="{5A6168D8-601B-0FE0-DE95-5BE12DFAF2FA}"/>
+              </a:ext>
+            </a:extLst>
+          </p:cNvPr>
+          <p:cNvSpPr/>
+          <p:nvPr/>
+        </p:nvSpPr>
+        <p:spPr>
+          <a:xfrm rot="10800000">
+            <a:off x="3794499" y="3655338"/>
+            <a:ext cx="647998" cy="243116"/>
+          </a:xfrm>
+          <a:prstGeom prst="rightArrow">
+            <a:avLst/>
+          </a:prstGeom>
           <a:solidFill>
-            <a:srgbClr val="C43529"/>
+            <a:schemeClr val="bg2">
+              <a:lumMod val="60000"/>
+              <a:lumOff val="40000"/>
+            </a:schemeClr>
           </a:solidFill>
           <a:ln w="3175" cmpd="sng">
             <a:noFill/>
@@ -6005,20 +6261,8 @@
               <a:spcBef>
                 <a:spcPct val="0"/>
               </a:spcBef>
-              <a:buFont typeface="Arial"/>
-              <a:buNone/>
             </a:pPr>
-            <a:r>
-              <a:rPr kumimoji="1" lang="en-US" altLang="ja-JP" sz="1200" dirty="0">
-                <a:solidFill>
-                  <a:schemeClr val="bg1"/>
-                </a:solidFill>
-                <a:latin typeface="Trebuchet MS" panose="020B0603020202020204" pitchFamily="34" charset="0"/>
-                <a:ea typeface="Meiryo UI" panose="020B0604030504040204" pitchFamily="50" charset="-128"/>
-              </a:rPr>
-              <a:t>Searcher</a:t>
-            </a:r>
-            <a:endParaRPr kumimoji="1" lang="ja-JP" altLang="en-US" sz="1200" dirty="0">
+            <a:endParaRPr kumimoji="1" lang="ja-JP" altLang="en-US" sz="1050" dirty="0">
               <a:solidFill>
                 <a:schemeClr val="bg1"/>
               </a:solidFill>
@@ -6030,10 +6274,10 @@
       </p:sp>
       <p:sp>
         <p:nvSpPr>
-          <p:cNvPr id="9" name="Rectangle 8">
+          <p:cNvPr id="41" name="Rectangle 40">
             <a:extLst>
               <a:ext uri="{FF2B5EF4-FFF2-40B4-BE49-F238E27FC236}">
-                <a16:creationId xmlns:a16="http://schemas.microsoft.com/office/drawing/2014/main" id="{C06C89FC-379A-7310-C264-F919ABB324C1}"/>
+                <a16:creationId xmlns:a16="http://schemas.microsoft.com/office/drawing/2014/main" id="{1BCC2625-9555-E67C-9DEE-05BEBB8AA0FE}"/>
               </a:ext>
             </a:extLst>
           </p:cNvPr>
@@ -6042,14 +6286,95 @@
         </p:nvSpPr>
         <p:spPr>
           <a:xfrm>
-            <a:off x="511628" y="1989224"/>
-            <a:ext cx="1652677" cy="634512"/>
+            <a:off x="3794499" y="3847337"/>
+            <a:ext cx="647999" cy="204555"/>
           </a:xfrm>
           <a:prstGeom prst="rect">
             <a:avLst/>
           </a:prstGeom>
+          <a:noFill/>
+          <a:ln w="3175" cmpd="sng">
+            <a:noFill/>
+          </a:ln>
+        </p:spPr>
+        <p:txBody>
+          <a:bodyPr rot="0" spcFirstLastPara="0" vertOverflow="overflow" horzOverflow="overflow" vert="horz" wrap="none" lIns="91440" tIns="45720" rIns="91440" bIns="45720" numCol="1" spcCol="0" rtlCol="0" fromWordArt="0" anchor="t" anchorCtr="0" forceAA="0" compatLnSpc="1">
+            <a:prstTxWarp prst="textNoShape">
+              <a:avLst/>
+            </a:prstTxWarp>
+            <a:noAutofit/>
+          </a:bodyPr>
+          <a:lstStyle/>
+          <a:p>
+            <a:pPr algn="ctr">
+              <a:spcBef>
+                <a:spcPct val="0"/>
+              </a:spcBef>
+            </a:pPr>
+            <a:r>
+              <a:rPr kumimoji="1" lang="en-US" altLang="ja-JP" sz="1050" dirty="0">
+                <a:solidFill>
+                  <a:schemeClr val="tx2"/>
+                </a:solidFill>
+                <a:latin typeface="Trebuchet MS" panose="020B0603020202020204" pitchFamily="34" charset="0"/>
+                <a:ea typeface="Meiryo UI" panose="020B0604030504040204" pitchFamily="50" charset="-128"/>
+              </a:rPr>
+              <a:t>Capital / </a:t>
+            </a:r>
+            <a:br>
+              <a:rPr kumimoji="1" lang="en-US" altLang="ja-JP" sz="1050" dirty="0">
+                <a:solidFill>
+                  <a:schemeClr val="tx2"/>
+                </a:solidFill>
+                <a:latin typeface="Trebuchet MS" panose="020B0603020202020204" pitchFamily="34" charset="0"/>
+                <a:ea typeface="Meiryo UI" panose="020B0604030504040204" pitchFamily="50" charset="-128"/>
+              </a:rPr>
+            </a:br>
+            <a:r>
+              <a:rPr kumimoji="1" lang="en-US" altLang="ja-JP" sz="1050" dirty="0">
+                <a:solidFill>
+                  <a:schemeClr val="tx2"/>
+                </a:solidFill>
+                <a:latin typeface="Trebuchet MS" panose="020B0603020202020204" pitchFamily="34" charset="0"/>
+                <a:ea typeface="Meiryo UI" panose="020B0604030504040204" pitchFamily="50" charset="-128"/>
+              </a:rPr>
+              <a:t>Expertise</a:t>
+            </a:r>
+            <a:endParaRPr kumimoji="1" lang="ja-JP" altLang="en-US" sz="1050" dirty="0">
+              <a:solidFill>
+                <a:schemeClr val="tx2"/>
+              </a:solidFill>
+              <a:latin typeface="Trebuchet MS" panose="020B0603020202020204" pitchFamily="34" charset="0"/>
+              <a:ea typeface="Meiryo UI" panose="020B0604030504040204" pitchFamily="50" charset="-128"/>
+            </a:endParaRPr>
+          </a:p>
+        </p:txBody>
+      </p:sp>
+      <p:sp>
+        <p:nvSpPr>
+          <p:cNvPr id="45" name="Arrow: Right 44">
+            <a:extLst>
+              <a:ext uri="{FF2B5EF4-FFF2-40B4-BE49-F238E27FC236}">
+                <a16:creationId xmlns:a16="http://schemas.microsoft.com/office/drawing/2014/main" id="{70D8C301-AF08-4E05-8623-2EC047047F93}"/>
+              </a:ext>
+            </a:extLst>
+          </p:cNvPr>
+          <p:cNvSpPr/>
+          <p:nvPr/>
+        </p:nvSpPr>
+        <p:spPr>
+          <a:xfrm>
+            <a:off x="1940835" y="3028158"/>
+            <a:ext cx="647952" cy="243116"/>
+          </a:xfrm>
+          <a:prstGeom prst="rightArrow">
+            <a:avLst/>
+          </a:prstGeom>
           <a:solidFill>
-            <a:srgbClr val="C43529"/>
+            <a:schemeClr val="bg2">
+              <a:lumMod val="20000"/>
+              <a:lumOff val="80000"/>
+            </a:schemeClr>
           </a:solidFill>
           <a:ln w="3175" cmpd="sng">
             <a:noFill/>
@@ -6068,58 +6393,7 @@
               <a:spcBef>
                 <a:spcPct val="0"/>
               </a:spcBef>
-              <a:buFont typeface="Arial"/>
-              <a:buNone/>
             </a:pPr>
-            <a:r>
-              <a:rPr kumimoji="1" lang="pl-PL" altLang="ja-JP" sz="1200" dirty="0">
-                <a:solidFill>
-                  <a:schemeClr val="bg1"/>
-                </a:solidFill>
-                <a:latin typeface="Trebuchet MS" panose="020B0603020202020204" pitchFamily="34" charset="0"/>
-                <a:ea typeface="Meiryo UI" panose="020B0604030504040204" pitchFamily="50" charset="-128"/>
-              </a:rPr>
-              <a:t>Company </a:t>
-            </a:r>
-            <a:r>
-              <a:rPr kumimoji="1" lang="en-US" altLang="ja-JP" sz="1200" dirty="0">
-                <a:solidFill>
-                  <a:schemeClr val="bg1"/>
-                </a:solidFill>
-                <a:latin typeface="Trebuchet MS" panose="020B0603020202020204" pitchFamily="34" charset="0"/>
-                <a:ea typeface="Meiryo UI" panose="020B0604030504040204" pitchFamily="50" charset="-128"/>
-              </a:rPr>
-              <a:t>without</a:t>
-            </a:r>
-            <a:r>
-              <a:rPr kumimoji="1" lang="pl-PL" altLang="ja-JP" sz="1200" dirty="0">
-                <a:solidFill>
-                  <a:schemeClr val="bg1"/>
-                </a:solidFill>
-                <a:latin typeface="Trebuchet MS" panose="020B0603020202020204" pitchFamily="34" charset="0"/>
-                <a:ea typeface="Meiryo UI" panose="020B0604030504040204" pitchFamily="50" charset="-128"/>
-              </a:rPr>
-              <a:t> </a:t>
-            </a:r>
-            <a:br>
-              <a:rPr kumimoji="1" lang="en-US" altLang="ja-JP" sz="1200" dirty="0">
-                <a:solidFill>
-                  <a:schemeClr val="bg1"/>
-                </a:solidFill>
-                <a:latin typeface="Trebuchet MS" panose="020B0603020202020204" pitchFamily="34" charset="0"/>
-                <a:ea typeface="Meiryo UI" panose="020B0604030504040204" pitchFamily="50" charset="-128"/>
-              </a:rPr>
-            </a:br>
-            <a:r>
-              <a:rPr kumimoji="1" lang="pl-PL" altLang="ja-JP" sz="1200" dirty="0">
-                <a:solidFill>
-                  <a:schemeClr val="bg1"/>
-                </a:solidFill>
-                <a:latin typeface="Trebuchet MS" panose="020B0603020202020204" pitchFamily="34" charset="0"/>
-                <a:ea typeface="Meiryo UI" panose="020B0604030504040204" pitchFamily="50" charset="-128"/>
-              </a:rPr>
-              <a:t>Successor</a:t>
-            </a:r>
             <a:endParaRPr kumimoji="1" lang="ja-JP" altLang="en-US" sz="1200" dirty="0">
               <a:solidFill>
                 <a:schemeClr val="bg1"/>
@@ -6130,571 +6404,202 @@
           </a:p>
         </p:txBody>
       </p:sp>
-      <p:grpSp>
-        <p:nvGrpSpPr>
-          <p:cNvPr id="16" name="Group 15">
+      <p:sp>
+        <p:nvSpPr>
+          <p:cNvPr id="47" name="Rectangle 46">
             <a:extLst>
               <a:ext uri="{FF2B5EF4-FFF2-40B4-BE49-F238E27FC236}">
-                <a16:creationId xmlns:a16="http://schemas.microsoft.com/office/drawing/2014/main" id="{29DABBC7-CB90-050C-7E1D-EA2E6F4237C3}"/>
+                <a16:creationId xmlns:a16="http://schemas.microsoft.com/office/drawing/2014/main" id="{C7BDF827-2FDE-87F0-F2F6-BAF290D4915B}"/>
               </a:ext>
             </a:extLst>
           </p:cNvPr>
-          <p:cNvGrpSpPr/>
+          <p:cNvSpPr/>
           <p:nvPr/>
-        </p:nvGrpSpPr>
-        <p:grpSpPr>
+        </p:nvSpPr>
+        <p:spPr>
           <a:xfrm>
-            <a:off x="3794498" y="3028158"/>
-            <a:ext cx="648000" cy="1023734"/>
-            <a:chOff x="4617184" y="2938071"/>
-            <a:chExt cx="910800" cy="1023734"/>
+            <a:off x="1940834" y="3258036"/>
+            <a:ext cx="612692" cy="204555"/>
           </a:xfrm>
-        </p:grpSpPr>
-        <p:grpSp>
-          <p:nvGrpSpPr>
-            <p:cNvPr id="13" name="Group 12">
-              <a:extLst>
-                <a:ext uri="{FF2B5EF4-FFF2-40B4-BE49-F238E27FC236}">
-                  <a16:creationId xmlns:a16="http://schemas.microsoft.com/office/drawing/2014/main" id="{EBDF575E-1FAD-A2FF-1F97-07D7936155C6}"/>
-                </a:ext>
-              </a:extLst>
-            </p:cNvPr>
-            <p:cNvGrpSpPr/>
-            <p:nvPr/>
-          </p:nvGrpSpPr>
-          <p:grpSpPr>
-            <a:xfrm>
-              <a:off x="4617184" y="2938071"/>
-              <a:ext cx="910798" cy="434433"/>
-              <a:chOff x="4617184" y="3436363"/>
-              <a:chExt cx="910798" cy="434433"/>
-            </a:xfrm>
-          </p:grpSpPr>
-          <p:sp>
-            <p:nvSpPr>
-              <p:cNvPr id="38" name="Arrow: Right 37">
-                <a:extLst>
-                  <a:ext uri="{FF2B5EF4-FFF2-40B4-BE49-F238E27FC236}">
-                    <a16:creationId xmlns:a16="http://schemas.microsoft.com/office/drawing/2014/main" id="{39F2BD2B-BC2F-4B43-66A8-8B264EF1CF9F}"/>
-                  </a:ext>
-                </a:extLst>
-              </p:cNvPr>
-              <p:cNvSpPr/>
-              <p:nvPr/>
-            </p:nvSpPr>
-            <p:spPr>
-              <a:xfrm>
-                <a:off x="4617185" y="3436363"/>
-                <a:ext cx="910797" cy="243116"/>
-              </a:xfrm>
-              <a:prstGeom prst="rightArrow">
-                <a:avLst/>
-              </a:prstGeom>
-              <a:solidFill>
-                <a:srgbClr val="FFCCCC"/>
-              </a:solidFill>
-              <a:ln w="3175" cmpd="sng">
-                <a:noFill/>
-              </a:ln>
-            </p:spPr>
-            <p:txBody>
-              <a:bodyPr rot="0" spcFirstLastPara="0" vertOverflow="overflow" horzOverflow="overflow" vert="horz" wrap="none" lIns="91440" tIns="45720" rIns="91440" bIns="45720" numCol="1" spcCol="0" rtlCol="0" fromWordArt="0" anchor="ctr" anchorCtr="0" forceAA="0" compatLnSpc="1">
-                <a:prstTxWarp prst="textNoShape">
-                  <a:avLst/>
-                </a:prstTxWarp>
-                <a:noAutofit/>
-              </a:bodyPr>
-              <a:lstStyle/>
-              <a:p>
-                <a:pPr algn="ctr">
-                  <a:spcBef>
-                    <a:spcPct val="0"/>
-                  </a:spcBef>
-                </a:pPr>
-                <a:endParaRPr kumimoji="1" lang="ja-JP" altLang="en-US" sz="1050" dirty="0">
-                  <a:solidFill>
-                    <a:schemeClr val="bg1"/>
-                  </a:solidFill>
-                  <a:latin typeface="Trebuchet MS" panose="020B0603020202020204" pitchFamily="34" charset="0"/>
-                  <a:ea typeface="Meiryo UI" panose="020B0604030504040204" pitchFamily="50" charset="-128"/>
-                </a:endParaRPr>
-              </a:p>
-            </p:txBody>
-          </p:sp>
-          <p:sp>
-            <p:nvSpPr>
-              <p:cNvPr id="40" name="Rectangle 39">
-                <a:extLst>
-                  <a:ext uri="{FF2B5EF4-FFF2-40B4-BE49-F238E27FC236}">
-                    <a16:creationId xmlns:a16="http://schemas.microsoft.com/office/drawing/2014/main" id="{A0885063-2E48-5198-C5C8-B83434BE2B57}"/>
-                  </a:ext>
-                </a:extLst>
-              </p:cNvPr>
-              <p:cNvSpPr/>
-              <p:nvPr/>
-            </p:nvSpPr>
-            <p:spPr>
-              <a:xfrm>
-                <a:off x="4617184" y="3666241"/>
-                <a:ext cx="861235" cy="204555"/>
-              </a:xfrm>
-              <a:prstGeom prst="rect">
-                <a:avLst/>
-              </a:prstGeom>
-              <a:noFill/>
-              <a:ln w="3175" cmpd="sng">
-                <a:noFill/>
-              </a:ln>
-            </p:spPr>
-            <p:txBody>
-              <a:bodyPr rot="0" spcFirstLastPara="0" vertOverflow="overflow" horzOverflow="overflow" vert="horz" wrap="none" lIns="91440" tIns="45720" rIns="91440" bIns="45720" numCol="1" spcCol="0" rtlCol="0" fromWordArt="0" anchor="t" anchorCtr="0" forceAA="0" compatLnSpc="1">
-                <a:prstTxWarp prst="textNoShape">
-                  <a:avLst/>
-                </a:prstTxWarp>
-                <a:noAutofit/>
-              </a:bodyPr>
-              <a:lstStyle/>
-              <a:p>
-                <a:pPr algn="ctr">
-                  <a:spcBef>
-                    <a:spcPct val="0"/>
-                  </a:spcBef>
-                </a:pPr>
-                <a:r>
-                  <a:rPr kumimoji="1" lang="en-US" altLang="ja-JP" sz="1050" dirty="0">
-                    <a:solidFill>
-                      <a:schemeClr val="tx2"/>
-                    </a:solidFill>
-                    <a:latin typeface="Trebuchet MS" panose="020B0603020202020204" pitchFamily="34" charset="0"/>
-                    <a:ea typeface="Meiryo UI" panose="020B0604030504040204" pitchFamily="50" charset="-128"/>
-                  </a:rPr>
-                  <a:t>Financial</a:t>
-                </a:r>
-                <a:br>
-                  <a:rPr kumimoji="1" lang="en-US" altLang="ja-JP" sz="1050" dirty="0">
-                    <a:solidFill>
-                      <a:schemeClr val="tx2"/>
-                    </a:solidFill>
-                    <a:latin typeface="Trebuchet MS" panose="020B0603020202020204" pitchFamily="34" charset="0"/>
-                    <a:ea typeface="Meiryo UI" panose="020B0604030504040204" pitchFamily="50" charset="-128"/>
-                  </a:rPr>
-                </a:br>
-                <a:r>
-                  <a:rPr kumimoji="1" lang="en-US" altLang="ja-JP" sz="1050" dirty="0">
-                    <a:solidFill>
-                      <a:schemeClr val="tx2"/>
-                    </a:solidFill>
-                    <a:latin typeface="Trebuchet MS" panose="020B0603020202020204" pitchFamily="34" charset="0"/>
-                    <a:ea typeface="Meiryo UI" panose="020B0604030504040204" pitchFamily="50" charset="-128"/>
-                  </a:rPr>
-                  <a:t>Returns</a:t>
-                </a:r>
-                <a:endParaRPr kumimoji="1" lang="ja-JP" altLang="en-US" sz="1050" dirty="0">
-                  <a:solidFill>
-                    <a:schemeClr val="tx2"/>
-                  </a:solidFill>
-                  <a:latin typeface="Trebuchet MS" panose="020B0603020202020204" pitchFamily="34" charset="0"/>
-                  <a:ea typeface="Meiryo UI" panose="020B0604030504040204" pitchFamily="50" charset="-128"/>
-                </a:endParaRPr>
-              </a:p>
-            </p:txBody>
-          </p:sp>
-        </p:grpSp>
-        <p:sp>
-          <p:nvSpPr>
-            <p:cNvPr id="39" name="Arrow: Right 38">
-              <a:extLst>
-                <a:ext uri="{FF2B5EF4-FFF2-40B4-BE49-F238E27FC236}">
-                  <a16:creationId xmlns:a16="http://schemas.microsoft.com/office/drawing/2014/main" id="{5A6168D8-601B-0FE0-DE95-5BE12DFAF2FA}"/>
-                </a:ext>
-              </a:extLst>
-            </p:cNvPr>
-            <p:cNvSpPr/>
-            <p:nvPr/>
-          </p:nvSpPr>
-          <p:spPr>
-            <a:xfrm rot="10800000">
-              <a:off x="4617185" y="3565251"/>
-              <a:ext cx="910797" cy="243116"/>
-            </a:xfrm>
-            <a:prstGeom prst="rightArrow">
+          <a:prstGeom prst="rect">
+            <a:avLst/>
+          </a:prstGeom>
+          <a:noFill/>
+          <a:ln w="3175" cmpd="sng">
+            <a:noFill/>
+          </a:ln>
+        </p:spPr>
+        <p:txBody>
+          <a:bodyPr rot="0" spcFirstLastPara="0" vertOverflow="overflow" horzOverflow="overflow" vert="horz" wrap="none" lIns="91440" tIns="45720" rIns="91440" bIns="45720" numCol="1" spcCol="0" rtlCol="0" fromWordArt="0" anchor="t" anchorCtr="0" forceAA="0" compatLnSpc="1">
+            <a:prstTxWarp prst="textNoShape">
               <a:avLst/>
-            </a:prstGeom>
-            <a:solidFill>
-              <a:srgbClr val="FF6566"/>
-            </a:solidFill>
-            <a:ln w="3175" cmpd="sng">
-              <a:noFill/>
-            </a:ln>
-          </p:spPr>
-          <p:txBody>
-            <a:bodyPr rot="0" spcFirstLastPara="0" vertOverflow="overflow" horzOverflow="overflow" vert="horz" wrap="none" lIns="91440" tIns="45720" rIns="91440" bIns="45720" numCol="1" spcCol="0" rtlCol="0" fromWordArt="0" anchor="ctr" anchorCtr="0" forceAA="0" compatLnSpc="1">
-              <a:prstTxWarp prst="textNoShape">
-                <a:avLst/>
-              </a:prstTxWarp>
-              <a:noAutofit/>
-            </a:bodyPr>
-            <a:lstStyle/>
-            <a:p>
-              <a:pPr algn="ctr">
-                <a:spcBef>
-                  <a:spcPct val="0"/>
-                </a:spcBef>
-              </a:pPr>
-              <a:endParaRPr kumimoji="1" lang="ja-JP" altLang="en-US" sz="1050" dirty="0">
-                <a:solidFill>
-                  <a:schemeClr val="bg1"/>
-                </a:solidFill>
-                <a:latin typeface="Trebuchet MS" panose="020B0603020202020204" pitchFamily="34" charset="0"/>
-                <a:ea typeface="Meiryo UI" panose="020B0604030504040204" pitchFamily="50" charset="-128"/>
-              </a:endParaRPr>
-            </a:p>
-          </p:txBody>
-        </p:sp>
-        <p:sp>
-          <p:nvSpPr>
-            <p:cNvPr id="41" name="Rectangle 40">
-              <a:extLst>
-                <a:ext uri="{FF2B5EF4-FFF2-40B4-BE49-F238E27FC236}">
-                  <a16:creationId xmlns:a16="http://schemas.microsoft.com/office/drawing/2014/main" id="{1BCC2625-9555-E67C-9DEE-05BEBB8AA0FE}"/>
-                </a:ext>
-              </a:extLst>
-            </p:cNvPr>
-            <p:cNvSpPr/>
-            <p:nvPr/>
-          </p:nvSpPr>
-          <p:spPr>
-            <a:xfrm>
-              <a:off x="4617185" y="3757250"/>
-              <a:ext cx="910799" cy="204555"/>
-            </a:xfrm>
-            <a:prstGeom prst="rect">
-              <a:avLst/>
-            </a:prstGeom>
-            <a:noFill/>
-            <a:ln w="3175" cmpd="sng">
-              <a:noFill/>
-            </a:ln>
-          </p:spPr>
-          <p:txBody>
-            <a:bodyPr rot="0" spcFirstLastPara="0" vertOverflow="overflow" horzOverflow="overflow" vert="horz" wrap="none" lIns="91440" tIns="45720" rIns="91440" bIns="45720" numCol="1" spcCol="0" rtlCol="0" fromWordArt="0" anchor="t" anchorCtr="0" forceAA="0" compatLnSpc="1">
-              <a:prstTxWarp prst="textNoShape">
-                <a:avLst/>
-              </a:prstTxWarp>
-              <a:noAutofit/>
-            </a:bodyPr>
-            <a:lstStyle/>
-            <a:p>
-              <a:pPr algn="ctr">
-                <a:spcBef>
-                  <a:spcPct val="0"/>
-                </a:spcBef>
-              </a:pPr>
-              <a:r>
-                <a:rPr kumimoji="1" lang="en-US" altLang="ja-JP" sz="1050" dirty="0">
-                  <a:solidFill>
-                    <a:schemeClr val="tx2"/>
-                  </a:solidFill>
-                  <a:latin typeface="Trebuchet MS" panose="020B0603020202020204" pitchFamily="34" charset="0"/>
-                  <a:ea typeface="Meiryo UI" panose="020B0604030504040204" pitchFamily="50" charset="-128"/>
-                </a:rPr>
-                <a:t>Capital / </a:t>
-              </a:r>
-              <a:br>
-                <a:rPr kumimoji="1" lang="en-US" altLang="ja-JP" sz="1050" dirty="0">
-                  <a:solidFill>
-                    <a:schemeClr val="tx2"/>
-                  </a:solidFill>
-                  <a:latin typeface="Trebuchet MS" panose="020B0603020202020204" pitchFamily="34" charset="0"/>
-                  <a:ea typeface="Meiryo UI" panose="020B0604030504040204" pitchFamily="50" charset="-128"/>
-                </a:rPr>
-              </a:br>
-              <a:r>
-                <a:rPr kumimoji="1" lang="en-US" altLang="ja-JP" sz="1050" dirty="0">
-                  <a:solidFill>
-                    <a:schemeClr val="tx2"/>
-                  </a:solidFill>
-                  <a:latin typeface="Trebuchet MS" panose="020B0603020202020204" pitchFamily="34" charset="0"/>
-                  <a:ea typeface="Meiryo UI" panose="020B0604030504040204" pitchFamily="50" charset="-128"/>
-                </a:rPr>
-                <a:t>Expertise</a:t>
-              </a:r>
-              <a:endParaRPr kumimoji="1" lang="ja-JP" altLang="en-US" sz="1050" dirty="0">
+            </a:prstTxWarp>
+            <a:noAutofit/>
+          </a:bodyPr>
+          <a:lstStyle/>
+          <a:p>
+            <a:pPr algn="ctr">
+              <a:spcBef>
+                <a:spcPct val="0"/>
+              </a:spcBef>
+              <a:buFont typeface="Arial"/>
+              <a:buNone/>
+            </a:pPr>
+            <a:r>
+              <a:rPr kumimoji="1" lang="en-US" altLang="ja-JP" sz="1050" dirty="0">
                 <a:solidFill>
                   <a:schemeClr val="tx2"/>
                 </a:solidFill>
                 <a:latin typeface="Trebuchet MS" panose="020B0603020202020204" pitchFamily="34" charset="0"/>
                 <a:ea typeface="Meiryo UI" panose="020B0604030504040204" pitchFamily="50" charset="-128"/>
-              </a:endParaRPr>
-            </a:p>
-          </p:txBody>
-        </p:sp>
-      </p:grpSp>
-      <p:grpSp>
-        <p:nvGrpSpPr>
-          <p:cNvPr id="15" name="Group 14">
-            <a:extLst>
-              <a:ext uri="{FF2B5EF4-FFF2-40B4-BE49-F238E27FC236}">
-                <a16:creationId xmlns:a16="http://schemas.microsoft.com/office/drawing/2014/main" id="{8AC7B87C-D98D-06F7-12BF-96A171C27021}"/>
-              </a:ext>
-            </a:extLst>
-          </p:cNvPr>
-          <p:cNvGrpSpPr/>
-          <p:nvPr/>
-        </p:nvGrpSpPr>
-        <p:grpSpPr>
-          <a:xfrm>
-            <a:off x="1940834" y="3028158"/>
-            <a:ext cx="647954" cy="1023730"/>
-            <a:chOff x="2273417" y="2938071"/>
-            <a:chExt cx="910287" cy="1023730"/>
-          </a:xfrm>
-        </p:grpSpPr>
-        <p:sp>
-          <p:nvSpPr>
-            <p:cNvPr id="45" name="Arrow: Right 44">
-              <a:extLst>
-                <a:ext uri="{FF2B5EF4-FFF2-40B4-BE49-F238E27FC236}">
-                  <a16:creationId xmlns:a16="http://schemas.microsoft.com/office/drawing/2014/main" id="{70D8C301-AF08-4E05-8623-2EC047047F93}"/>
-                </a:ext>
-              </a:extLst>
-            </p:cNvPr>
-            <p:cNvSpPr/>
-            <p:nvPr/>
-          </p:nvSpPr>
-          <p:spPr>
-            <a:xfrm>
-              <a:off x="2273419" y="2938071"/>
-              <a:ext cx="910284" cy="243116"/>
-            </a:xfrm>
-            <a:prstGeom prst="rightArrow">
-              <a:avLst/>
-            </a:prstGeom>
-            <a:solidFill>
-              <a:srgbClr val="FFCCCC"/>
-            </a:solidFill>
-            <a:ln w="3175" cmpd="sng">
-              <a:noFill/>
-            </a:ln>
-          </p:spPr>
-          <p:txBody>
-            <a:bodyPr rot="0" spcFirstLastPara="0" vertOverflow="overflow" horzOverflow="overflow" vert="horz" wrap="none" lIns="91440" tIns="45720" rIns="91440" bIns="45720" numCol="1" spcCol="0" rtlCol="0" fromWordArt="0" anchor="ctr" anchorCtr="0" forceAA="0" compatLnSpc="1">
-              <a:prstTxWarp prst="textNoShape">
-                <a:avLst/>
-              </a:prstTxWarp>
-              <a:noAutofit/>
-            </a:bodyPr>
-            <a:lstStyle/>
-            <a:p>
-              <a:pPr algn="ctr">
-                <a:spcBef>
-                  <a:spcPct val="0"/>
-                </a:spcBef>
-              </a:pPr>
-              <a:endParaRPr kumimoji="1" lang="ja-JP" altLang="en-US" sz="1200" dirty="0">
-                <a:solidFill>
-                  <a:schemeClr val="bg1"/>
-                </a:solidFill>
-                <a:latin typeface="Trebuchet MS" panose="020B0603020202020204" pitchFamily="34" charset="0"/>
-                <a:ea typeface="Meiryo UI" panose="020B0604030504040204" pitchFamily="50" charset="-128"/>
-              </a:endParaRPr>
-            </a:p>
-          </p:txBody>
-        </p:sp>
-        <p:sp>
-          <p:nvSpPr>
-            <p:cNvPr id="47" name="Rectangle 46">
-              <a:extLst>
-                <a:ext uri="{FF2B5EF4-FFF2-40B4-BE49-F238E27FC236}">
-                  <a16:creationId xmlns:a16="http://schemas.microsoft.com/office/drawing/2014/main" id="{C7BDF827-2FDE-87F0-F2F6-BAF290D4915B}"/>
-                </a:ext>
-              </a:extLst>
-            </p:cNvPr>
-            <p:cNvSpPr/>
-            <p:nvPr/>
-          </p:nvSpPr>
-          <p:spPr>
-            <a:xfrm>
-              <a:off x="2273417" y="3167949"/>
-              <a:ext cx="860749" cy="204555"/>
-            </a:xfrm>
-            <a:prstGeom prst="rect">
-              <a:avLst/>
-            </a:prstGeom>
-            <a:noFill/>
-            <a:ln w="3175" cmpd="sng">
-              <a:noFill/>
-            </a:ln>
-          </p:spPr>
-          <p:txBody>
-            <a:bodyPr rot="0" spcFirstLastPara="0" vertOverflow="overflow" horzOverflow="overflow" vert="horz" wrap="none" lIns="91440" tIns="45720" rIns="91440" bIns="45720" numCol="1" spcCol="0" rtlCol="0" fromWordArt="0" anchor="t" anchorCtr="0" forceAA="0" compatLnSpc="1">
-              <a:prstTxWarp prst="textNoShape">
-                <a:avLst/>
-              </a:prstTxWarp>
-              <a:noAutofit/>
-            </a:bodyPr>
-            <a:lstStyle/>
-            <a:p>
-              <a:pPr algn="ctr">
-                <a:spcBef>
-                  <a:spcPct val="0"/>
-                </a:spcBef>
-                <a:buFont typeface="Arial"/>
-                <a:buNone/>
-              </a:pPr>
-              <a:r>
-                <a:rPr kumimoji="1" lang="en-US" altLang="ja-JP" sz="1050" dirty="0">
-                  <a:solidFill>
-                    <a:schemeClr val="tx2"/>
-                  </a:solidFill>
-                  <a:latin typeface="Trebuchet MS" panose="020B0603020202020204" pitchFamily="34" charset="0"/>
-                  <a:ea typeface="Meiryo UI" panose="020B0604030504040204" pitchFamily="50" charset="-128"/>
-                </a:rPr>
-                <a:t>Ownership</a:t>
-              </a:r>
-              <a:br>
-                <a:rPr kumimoji="1" lang="en-US" altLang="ja-JP" sz="1050" dirty="0">
-                  <a:solidFill>
-                    <a:schemeClr val="tx2"/>
-                  </a:solidFill>
-                  <a:latin typeface="Trebuchet MS" panose="020B0603020202020204" pitchFamily="34" charset="0"/>
-                  <a:ea typeface="Meiryo UI" panose="020B0604030504040204" pitchFamily="50" charset="-128"/>
-                </a:rPr>
-              </a:br>
-              <a:r>
-                <a:rPr kumimoji="1" lang="en-US" altLang="ja-JP" sz="1050" dirty="0">
-                  <a:solidFill>
-                    <a:schemeClr val="tx2"/>
-                  </a:solidFill>
-                  <a:latin typeface="Trebuchet MS" panose="020B0603020202020204" pitchFamily="34" charset="0"/>
-                  <a:ea typeface="Meiryo UI" panose="020B0604030504040204" pitchFamily="50" charset="-128"/>
-                </a:rPr>
-                <a:t>Transfer</a:t>
-              </a:r>
-            </a:p>
-          </p:txBody>
-        </p:sp>
-        <p:sp>
-          <p:nvSpPr>
-            <p:cNvPr id="46" name="Arrow: Right 45">
-              <a:extLst>
-                <a:ext uri="{FF2B5EF4-FFF2-40B4-BE49-F238E27FC236}">
-                  <a16:creationId xmlns:a16="http://schemas.microsoft.com/office/drawing/2014/main" id="{FDC2241B-9C45-1CFA-CAD7-6CFBC0909844}"/>
-                </a:ext>
-              </a:extLst>
-            </p:cNvPr>
-            <p:cNvSpPr/>
-            <p:nvPr/>
-          </p:nvSpPr>
-          <p:spPr>
-            <a:xfrm rot="10800000">
-              <a:off x="2273419" y="3565251"/>
-              <a:ext cx="910284" cy="243116"/>
-            </a:xfrm>
-            <a:prstGeom prst="rightArrow">
-              <a:avLst/>
-            </a:prstGeom>
-            <a:solidFill>
-              <a:srgbClr val="FF6566"/>
-            </a:solidFill>
-            <a:ln w="3175" cmpd="sng">
-              <a:noFill/>
-            </a:ln>
-          </p:spPr>
-          <p:txBody>
-            <a:bodyPr rot="0" spcFirstLastPara="0" vertOverflow="overflow" horzOverflow="overflow" vert="horz" wrap="none" lIns="91440" tIns="45720" rIns="91440" bIns="45720" numCol="1" spcCol="0" rtlCol="0" fromWordArt="0" anchor="ctr" anchorCtr="0" forceAA="0" compatLnSpc="1">
-              <a:prstTxWarp prst="textNoShape">
-                <a:avLst/>
-              </a:prstTxWarp>
-              <a:noAutofit/>
-            </a:bodyPr>
-            <a:lstStyle/>
-            <a:p>
-              <a:pPr algn="ctr">
-                <a:spcBef>
-                  <a:spcPct val="0"/>
-                </a:spcBef>
-              </a:pPr>
-              <a:endParaRPr kumimoji="1" lang="ja-JP" altLang="en-US" sz="1200" dirty="0">
-                <a:solidFill>
-                  <a:schemeClr val="bg1"/>
-                </a:solidFill>
-                <a:latin typeface="Trebuchet MS" panose="020B0603020202020204" pitchFamily="34" charset="0"/>
-                <a:ea typeface="Meiryo UI" panose="020B0604030504040204" pitchFamily="50" charset="-128"/>
-              </a:endParaRPr>
-            </a:p>
-          </p:txBody>
-        </p:sp>
-        <p:sp>
-          <p:nvSpPr>
-            <p:cNvPr id="48" name="Rectangle 47">
-              <a:extLst>
-                <a:ext uri="{FF2B5EF4-FFF2-40B4-BE49-F238E27FC236}">
-                  <a16:creationId xmlns:a16="http://schemas.microsoft.com/office/drawing/2014/main" id="{E6BFA825-2430-41B1-40B7-BA78BE828138}"/>
-                </a:ext>
-              </a:extLst>
-            </p:cNvPr>
-            <p:cNvSpPr/>
-            <p:nvPr/>
-          </p:nvSpPr>
-          <p:spPr>
-            <a:xfrm>
-              <a:off x="2273418" y="3757246"/>
-              <a:ext cx="910286" cy="204555"/>
-            </a:xfrm>
-            <a:prstGeom prst="rect">
-              <a:avLst/>
-            </a:prstGeom>
-            <a:noFill/>
-            <a:ln w="3175" cmpd="sng">
-              <a:noFill/>
-            </a:ln>
-          </p:spPr>
-          <p:txBody>
-            <a:bodyPr rot="0" spcFirstLastPara="0" vertOverflow="overflow" horzOverflow="overflow" vert="horz" wrap="none" lIns="91440" tIns="45720" rIns="91440" bIns="45720" numCol="1" spcCol="0" rtlCol="0" fromWordArt="0" anchor="t" anchorCtr="0" forceAA="0" compatLnSpc="1">
-              <a:prstTxWarp prst="textNoShape">
-                <a:avLst/>
-              </a:prstTxWarp>
-              <a:noAutofit/>
-            </a:bodyPr>
-            <a:lstStyle/>
-            <a:p>
-              <a:pPr algn="ctr">
-                <a:spcBef>
-                  <a:spcPct val="0"/>
-                </a:spcBef>
-                <a:buFont typeface="Arial"/>
-                <a:buNone/>
-              </a:pPr>
-              <a:r>
-                <a:rPr lang="ja-JP" altLang="ja-JP" sz="1050" dirty="0"/>
-                <a:t>Succession / </a:t>
-              </a:r>
-              <a:br>
-                <a:rPr lang="en-US" altLang="ja-JP" sz="1050" dirty="0"/>
-              </a:br>
-              <a:r>
-                <a:rPr lang="ja-JP" altLang="ja-JP" sz="1050" dirty="0"/>
-                <a:t>Long-term </a:t>
-              </a:r>
-              <a:br>
-                <a:rPr lang="en-US" altLang="ja-JP" sz="1050" dirty="0"/>
-              </a:br>
-              <a:r>
-                <a:rPr lang="ja-JP" altLang="ja-JP" sz="1050" dirty="0"/>
-                <a:t>Management</a:t>
-              </a:r>
-              <a:endParaRPr kumimoji="1" lang="en-US" altLang="ja-JP" sz="1050" dirty="0">
+              </a:rPr>
+              <a:t>Ownership</a:t>
+            </a:r>
+            <a:br>
+              <a:rPr kumimoji="1" lang="en-US" altLang="ja-JP" sz="1050" dirty="0">
                 <a:solidFill>
                   <a:schemeClr val="tx2"/>
                 </a:solidFill>
                 <a:latin typeface="Trebuchet MS" panose="020B0603020202020204" pitchFamily="34" charset="0"/>
                 <a:ea typeface="Meiryo UI" panose="020B0604030504040204" pitchFamily="50" charset="-128"/>
-              </a:endParaRPr>
-            </a:p>
-          </p:txBody>
-        </p:sp>
-      </p:grpSp>
+              </a:rPr>
+            </a:br>
+            <a:r>
+              <a:rPr kumimoji="1" lang="en-US" altLang="ja-JP" sz="1050" dirty="0">
+                <a:solidFill>
+                  <a:schemeClr val="tx2"/>
+                </a:solidFill>
+                <a:latin typeface="Trebuchet MS" panose="020B0603020202020204" pitchFamily="34" charset="0"/>
+                <a:ea typeface="Meiryo UI" panose="020B0604030504040204" pitchFamily="50" charset="-128"/>
+              </a:rPr>
+              <a:t>Transfer</a:t>
+            </a:r>
+          </a:p>
+        </p:txBody>
+      </p:sp>
+      <p:sp>
+        <p:nvSpPr>
+          <p:cNvPr id="46" name="Arrow: Right 45">
+            <a:extLst>
+              <a:ext uri="{FF2B5EF4-FFF2-40B4-BE49-F238E27FC236}">
+                <a16:creationId xmlns:a16="http://schemas.microsoft.com/office/drawing/2014/main" id="{FDC2241B-9C45-1CFA-CAD7-6CFBC0909844}"/>
+              </a:ext>
+            </a:extLst>
+          </p:cNvPr>
+          <p:cNvSpPr/>
+          <p:nvPr/>
+        </p:nvSpPr>
+        <p:spPr>
+          <a:xfrm rot="10800000">
+            <a:off x="1940835" y="3655338"/>
+            <a:ext cx="647952" cy="243116"/>
+          </a:xfrm>
+          <a:prstGeom prst="rightArrow">
+            <a:avLst/>
+          </a:prstGeom>
+          <a:solidFill>
+            <a:schemeClr val="bg2">
+              <a:lumMod val="60000"/>
+              <a:lumOff val="40000"/>
+            </a:schemeClr>
+          </a:solidFill>
+          <a:ln w="3175" cmpd="sng">
+            <a:noFill/>
+          </a:ln>
+        </p:spPr>
+        <p:txBody>
+          <a:bodyPr rot="0" spcFirstLastPara="0" vertOverflow="overflow" horzOverflow="overflow" vert="horz" wrap="none" lIns="91440" tIns="45720" rIns="91440" bIns="45720" numCol="1" spcCol="0" rtlCol="0" fromWordArt="0" anchor="ctr" anchorCtr="0" forceAA="0" compatLnSpc="1">
+            <a:prstTxWarp prst="textNoShape">
+              <a:avLst/>
+            </a:prstTxWarp>
+            <a:noAutofit/>
+          </a:bodyPr>
+          <a:lstStyle/>
+          <a:p>
+            <a:pPr algn="ctr">
+              <a:spcBef>
+                <a:spcPct val="0"/>
+              </a:spcBef>
+            </a:pPr>
+            <a:endParaRPr kumimoji="1" lang="ja-JP" altLang="en-US" sz="1200" dirty="0">
+              <a:solidFill>
+                <a:schemeClr val="bg1"/>
+              </a:solidFill>
+              <a:latin typeface="Trebuchet MS" panose="020B0603020202020204" pitchFamily="34" charset="0"/>
+              <a:ea typeface="Meiryo UI" panose="020B0604030504040204" pitchFamily="50" charset="-128"/>
+            </a:endParaRPr>
+          </a:p>
+        </p:txBody>
+      </p:sp>
+      <p:sp>
+        <p:nvSpPr>
+          <p:cNvPr id="48" name="Rectangle 47">
+            <a:extLst>
+              <a:ext uri="{FF2B5EF4-FFF2-40B4-BE49-F238E27FC236}">
+                <a16:creationId xmlns:a16="http://schemas.microsoft.com/office/drawing/2014/main" id="{E6BFA825-2430-41B1-40B7-BA78BE828138}"/>
+              </a:ext>
+            </a:extLst>
+          </p:cNvPr>
+          <p:cNvSpPr/>
+          <p:nvPr/>
+        </p:nvSpPr>
+        <p:spPr>
+          <a:xfrm>
+            <a:off x="1940835" y="3847333"/>
+            <a:ext cx="647953" cy="204555"/>
+          </a:xfrm>
+          <a:prstGeom prst="rect">
+            <a:avLst/>
+          </a:prstGeom>
+          <a:noFill/>
+          <a:ln w="3175" cmpd="sng">
+            <a:noFill/>
+          </a:ln>
+        </p:spPr>
+        <p:txBody>
+          <a:bodyPr rot="0" spcFirstLastPara="0" vertOverflow="overflow" horzOverflow="overflow" vert="horz" wrap="none" lIns="91440" tIns="45720" rIns="91440" bIns="45720" numCol="1" spcCol="0" rtlCol="0" fromWordArt="0" anchor="t" anchorCtr="0" forceAA="0" compatLnSpc="1">
+            <a:prstTxWarp prst="textNoShape">
+              <a:avLst/>
+            </a:prstTxWarp>
+            <a:noAutofit/>
+          </a:bodyPr>
+          <a:lstStyle/>
+          <a:p>
+            <a:pPr algn="ctr">
+              <a:spcBef>
+                <a:spcPct val="0"/>
+              </a:spcBef>
+              <a:buFont typeface="Arial"/>
+              <a:buNone/>
+            </a:pPr>
+            <a:r>
+              <a:rPr lang="ja-JP" altLang="ja-JP" sz="1050" dirty="0"/>
+              <a:t>Succession / </a:t>
+            </a:r>
+            <a:br>
+              <a:rPr lang="en-US" altLang="ja-JP" sz="1050" dirty="0"/>
+            </a:br>
+            <a:r>
+              <a:rPr lang="ja-JP" altLang="ja-JP" sz="1050" dirty="0"/>
+              <a:t>Long-term </a:t>
+            </a:r>
+            <a:br>
+              <a:rPr lang="en-US" altLang="ja-JP" sz="1050" dirty="0"/>
+            </a:br>
+            <a:r>
+              <a:rPr lang="ja-JP" altLang="ja-JP" sz="1050" dirty="0"/>
+              <a:t>Management</a:t>
+            </a:r>
+            <a:endParaRPr kumimoji="1" lang="en-US" altLang="ja-JP" sz="1050" dirty="0">
+              <a:solidFill>
+                <a:schemeClr val="tx2"/>
+              </a:solidFill>
+              <a:latin typeface="Trebuchet MS" panose="020B0603020202020204" pitchFamily="34" charset="0"/>
+              <a:ea typeface="Meiryo UI" panose="020B0604030504040204" pitchFamily="50" charset="-128"/>
+            </a:endParaRPr>
+          </a:p>
+        </p:txBody>
+      </p:sp>
       <p:pic>
         <p:nvPicPr>
           <p:cNvPr id="50" name="Graphic 49" descr="Building with solid fill">
@@ -7847,12 +7752,16 @@
 </file>
 
 <file path=customXml/item1.xml><?xml version="1.0" encoding="utf-8"?>
-<?mso-contentType ?>
-<FormTemplates xmlns="http://schemas.microsoft.com/sharepoint/v3/contenttype/forms">
-  <Display>DocumentLibraryForm</Display>
-  <Edit>DocumentLibraryForm</Edit>
-  <New>DocumentLibraryForm</New>
-</FormTemplates>
+<p:properties xmlns:p="http://schemas.microsoft.com/office/2006/metadata/properties" xmlns:xsi="http://www.w3.org/2001/XMLSchema-instance" xmlns:pc="http://schemas.microsoft.com/office/infopath/2007/PartnerControls">
+  <documentManagement>
+    <TaxCatchAll xmlns="52176ee0-b196-4eee-81dc-b20517a45410" xsi:nil="true"/>
+    <_x6559__x6388__x540d_ xmlns="bebe00b0-6253-4163-a3a9-ff8e32f5841b" xsi:nil="true"/>
+    <_x5e74__x5ea6_ xmlns="bebe00b0-6253-4163-a3a9-ff8e32f5841b" xsi:nil="true"/>
+    <lcf76f155ced4ddcb4097134ff3c332f xmlns="bebe00b0-6253-4163-a3a9-ff8e32f5841b">
+      <Terms xmlns="http://schemas.microsoft.com/office/infopath/2007/PartnerControls"/>
+    </lcf76f155ced4ddcb4097134ff3c332f>
+  </documentManagement>
+</p:properties>
 </file>
 
 <file path=customXml/item2.xml><?xml version="1.0" encoding="utf-8"?>
@@ -8111,22 +8020,27 @@
 </file>
 
 <file path=customXml/item3.xml><?xml version="1.0" encoding="utf-8"?>
-<p:properties xmlns:p="http://schemas.microsoft.com/office/2006/metadata/properties" xmlns:xsi="http://www.w3.org/2001/XMLSchema-instance" xmlns:pc="http://schemas.microsoft.com/office/infopath/2007/PartnerControls">
-  <documentManagement>
-    <TaxCatchAll xmlns="52176ee0-b196-4eee-81dc-b20517a45410" xsi:nil="true"/>
-    <_x6559__x6388__x540d_ xmlns="bebe00b0-6253-4163-a3a9-ff8e32f5841b" xsi:nil="true"/>
-    <_x5e74__x5ea6_ xmlns="bebe00b0-6253-4163-a3a9-ff8e32f5841b" xsi:nil="true"/>
-    <lcf76f155ced4ddcb4097134ff3c332f xmlns="bebe00b0-6253-4163-a3a9-ff8e32f5841b">
-      <Terms xmlns="http://schemas.microsoft.com/office/infopath/2007/PartnerControls"/>
-    </lcf76f155ced4ddcb4097134ff3c332f>
-  </documentManagement>
-</p:properties>
+<?mso-contentType ?>
+<FormTemplates xmlns="http://schemas.microsoft.com/sharepoint/v3/contenttype/forms">
+  <Display>DocumentLibraryForm</Display>
+  <Edit>DocumentLibraryForm</Edit>
+  <New>DocumentLibraryForm</New>
+</FormTemplates>
 </file>
 
 <file path=customXml/itemProps1.xml><?xml version="1.0" encoding="utf-8"?>
-<ds:datastoreItem xmlns:ds="http://schemas.openxmlformats.org/officeDocument/2006/customXml" ds:itemID="{2273376A-1569-4A1E-9453-558A6DBEF259}">
+<ds:datastoreItem xmlns:ds="http://schemas.openxmlformats.org/officeDocument/2006/customXml" ds:itemID="{FB5871EA-75A5-49D4-880D-C439ABCEF157}">
   <ds:schemaRefs>
-    <ds:schemaRef ds:uri="http://schemas.microsoft.com/sharepoint/v3/contenttype/forms"/>
+    <ds:schemaRef ds:uri="http://purl.org/dc/elements/1.1/"/>
+    <ds:schemaRef ds:uri="http://schemas.openxmlformats.org/package/2006/metadata/core-properties"/>
+    <ds:schemaRef ds:uri="http://purl.org/dc/dcmitype/"/>
+    <ds:schemaRef ds:uri="http://schemas.microsoft.com/office/infopath/2007/PartnerControls"/>
+    <ds:schemaRef ds:uri="http://www.w3.org/XML/1998/namespace"/>
+    <ds:schemaRef ds:uri="http://schemas.microsoft.com/office/2006/documentManagement/types"/>
+    <ds:schemaRef ds:uri="52176ee0-b196-4eee-81dc-b20517a45410"/>
+    <ds:schemaRef ds:uri="bebe00b0-6253-4163-a3a9-ff8e32f5841b"/>
+    <ds:schemaRef ds:uri="http://schemas.microsoft.com/office/2006/metadata/properties"/>
+    <ds:schemaRef ds:uri="http://purl.org/dc/terms/"/>
   </ds:schemaRefs>
 </ds:datastoreItem>
 </file>
@@ -8151,18 +8065,9 @@
 </file>
 
 <file path=customXml/itemProps3.xml><?xml version="1.0" encoding="utf-8"?>
-<ds:datastoreItem xmlns:ds="http://schemas.openxmlformats.org/officeDocument/2006/customXml" ds:itemID="{FB5871EA-75A5-49D4-880D-C439ABCEF157}">
+<ds:datastoreItem xmlns:ds="http://schemas.openxmlformats.org/officeDocument/2006/customXml" ds:itemID="{2273376A-1569-4A1E-9453-558A6DBEF259}">
   <ds:schemaRefs>
-    <ds:schemaRef ds:uri="http://purl.org/dc/elements/1.1/"/>
-    <ds:schemaRef ds:uri="http://schemas.openxmlformats.org/package/2006/metadata/core-properties"/>
-    <ds:schemaRef ds:uri="http://purl.org/dc/dcmitype/"/>
-    <ds:schemaRef ds:uri="http://schemas.microsoft.com/office/infopath/2007/PartnerControls"/>
-    <ds:schemaRef ds:uri="http://www.w3.org/XML/1998/namespace"/>
-    <ds:schemaRef ds:uri="http://schemas.microsoft.com/office/2006/documentManagement/types"/>
-    <ds:schemaRef ds:uri="52176ee0-b196-4eee-81dc-b20517a45410"/>
-    <ds:schemaRef ds:uri="bebe00b0-6253-4163-a3a9-ff8e32f5841b"/>
-    <ds:schemaRef ds:uri="http://schemas.microsoft.com/office/2006/metadata/properties"/>
-    <ds:schemaRef ds:uri="http://purl.org/dc/terms/"/>
+    <ds:schemaRef ds:uri="http://schemas.microsoft.com/sharepoint/v3/contenttype/forms"/>
   </ds:schemaRefs>
 </ds:datastoreItem>
 </file>